--- a/Lecture05_DataCleaning/Lecture5_DataCleaning-ResearchDesign.pptx
+++ b/Lecture05_DataCleaning/Lecture5_DataCleaning-ResearchDesign.pptx
@@ -5,7 +5,7 @@
     <p:sldMasterId id="2147483738" r:id="rId1"/>
   </p:sldMasterIdLst>
   <p:notesMasterIdLst>
-    <p:notesMasterId r:id="rId92"/>
+    <p:notesMasterId r:id="rId94"/>
   </p:notesMasterIdLst>
   <p:sldIdLst>
     <p:sldId id="256" r:id="rId2"/>
@@ -73,31 +73,33 @@
     <p:sldId id="780" r:id="rId64"/>
     <p:sldId id="781" r:id="rId65"/>
     <p:sldId id="783" r:id="rId66"/>
-    <p:sldId id="784" r:id="rId67"/>
-    <p:sldId id="785" r:id="rId68"/>
-    <p:sldId id="782" r:id="rId69"/>
-    <p:sldId id="682" r:id="rId70"/>
-    <p:sldId id="709" r:id="rId71"/>
-    <p:sldId id="718" r:id="rId72"/>
-    <p:sldId id="761" r:id="rId73"/>
-    <p:sldId id="741" r:id="rId74"/>
-    <p:sldId id="673" r:id="rId75"/>
-    <p:sldId id="677" r:id="rId76"/>
-    <p:sldId id="743" r:id="rId77"/>
-    <p:sldId id="744" r:id="rId78"/>
-    <p:sldId id="745" r:id="rId79"/>
-    <p:sldId id="708" r:id="rId80"/>
-    <p:sldId id="746" r:id="rId81"/>
-    <p:sldId id="747" r:id="rId82"/>
-    <p:sldId id="778" r:id="rId83"/>
-    <p:sldId id="681" r:id="rId84"/>
-    <p:sldId id="719" r:id="rId85"/>
-    <p:sldId id="720" r:id="rId86"/>
-    <p:sldId id="721" r:id="rId87"/>
-    <p:sldId id="722" r:id="rId88"/>
-    <p:sldId id="680" r:id="rId89"/>
-    <p:sldId id="698" r:id="rId90"/>
-    <p:sldId id="723" r:id="rId91"/>
+    <p:sldId id="787" r:id="rId67"/>
+    <p:sldId id="786" r:id="rId68"/>
+    <p:sldId id="784" r:id="rId69"/>
+    <p:sldId id="785" r:id="rId70"/>
+    <p:sldId id="782" r:id="rId71"/>
+    <p:sldId id="682" r:id="rId72"/>
+    <p:sldId id="709" r:id="rId73"/>
+    <p:sldId id="718" r:id="rId74"/>
+    <p:sldId id="761" r:id="rId75"/>
+    <p:sldId id="741" r:id="rId76"/>
+    <p:sldId id="673" r:id="rId77"/>
+    <p:sldId id="677" r:id="rId78"/>
+    <p:sldId id="743" r:id="rId79"/>
+    <p:sldId id="744" r:id="rId80"/>
+    <p:sldId id="745" r:id="rId81"/>
+    <p:sldId id="708" r:id="rId82"/>
+    <p:sldId id="746" r:id="rId83"/>
+    <p:sldId id="747" r:id="rId84"/>
+    <p:sldId id="778" r:id="rId85"/>
+    <p:sldId id="681" r:id="rId86"/>
+    <p:sldId id="719" r:id="rId87"/>
+    <p:sldId id="720" r:id="rId88"/>
+    <p:sldId id="721" r:id="rId89"/>
+    <p:sldId id="722" r:id="rId90"/>
+    <p:sldId id="680" r:id="rId91"/>
+    <p:sldId id="698" r:id="rId92"/>
+    <p:sldId id="723" r:id="rId93"/>
   </p:sldIdLst>
   <p:sldSz cx="12192000" cy="6858000"/>
   <p:notesSz cx="7010400" cy="9296400"/>
@@ -297,7 +299,7 @@
           <a:p>
             <a:fld id="{EF911157-0FC2-4F06-8D61-FD647FE4E19D}" type="datetimeFigureOut">
               <a:rPr lang="en-US" smtClean="0"/>
-              <a:t>7/22/2026</a:t>
+              <a:t>10/16/2026</a:t>
             </a:fld>
             <a:endParaRPr lang="en-US"/>
           </a:p>
@@ -625,7 +627,7 @@
             </a:pPr>
             <a:r>
               <a:rPr lang="en-US" dirty="0"/>
-              <a:t>don’t worry about citing packages in your assignments (do worry about these for referee reports and final paper)</a:t>
+              <a:t>don’t worry about citing packages in your assignments (do worry about these for referee reports and final paper). Talk about table formatting (you can do it any which way as long as it looks nice). </a:t>
             </a:r>
           </a:p>
           <a:p>
@@ -635,15 +637,7 @@
             </a:pPr>
             <a:r>
               <a:rPr lang="en-US" dirty="0"/>
-              <a:t>I have uploaded a sample referee report to </a:t>
-            </a:r>
-            <a:r>
-              <a:rPr lang="en-US" dirty="0" err="1"/>
-              <a:t>Github</a:t>
-            </a:r>
-            <a:r>
-              <a:rPr lang="en-US" dirty="0"/>
-              <a:t> – note that your research question + teams are due in two weeks (with an outline due two weeks after that), so you should commit by then to one of the two options. Referee reports start being available next week with consistency!</a:t>
+              <a:t>Note that A2 is due in 2 weeks and your research question + teams are due in three weeks (with an outline due soon). Walk through A2 together. Start planning your projects!</a:t>
             </a:r>
           </a:p>
           <a:p>
@@ -1760,10 +1754,7 @@
           <a:bodyPr/>
           <a:lstStyle/>
           <a:p>
-            <a:r>
-              <a:rPr lang="en-US" dirty="0"/>
-              <a:t>If you’re still uncommitted to research paper/referee report, maybe let me try to convince you to do a research project!</a:t>
-            </a:r>
+            <a:endParaRPr lang="en-US" dirty="0"/>
           </a:p>
         </p:txBody>
       </p:sp>
@@ -6645,7 +6636,7 @@
           <a:p>
             <a:r>
               <a:rPr lang="en-US" dirty="0"/>
-              <a:t>There are a whole lot more too! </a:t>
+              <a:t>There are a whole lot more too! Note that for assignment 2 I expect you to think carefully about these overall and apply them (or one of them) to your idea. You might not get it right, that’s okay. The idea is to start down *a* path for your project. </a:t>
             </a:r>
           </a:p>
         </p:txBody>
@@ -7177,7 +7168,10 @@
           <a:bodyPr/>
           <a:lstStyle/>
           <a:p>
-            <a:endParaRPr lang="en-US" dirty="0"/>
+            <a:r>
+              <a:rPr lang="en-US" dirty="0"/>
+              <a:t>A macabre thought experiment…</a:t>
+            </a:r>
           </a:p>
         </p:txBody>
       </p:sp>
@@ -7285,7 +7279,10 @@
           <a:bodyPr/>
           <a:lstStyle/>
           <a:p>
-            <a:endParaRPr lang="en-US" dirty="0"/>
+            <a:r>
+              <a:rPr lang="en-US" dirty="0"/>
+              <a:t>The experiment will tell you something about the identifying variation you want. Do you want a world where some people are assigned treatment and others control (and if so, can you get that with a DD? matching?) Do you need randomized encouragement (so more of an IV structure)? Are you using a cutoff (so something like an RD?)</a:t>
+            </a:r>
           </a:p>
         </p:txBody>
       </p:sp>
@@ -7544,6 +7541,39 @@
               <a:t>Then, on the next slide, we will talk about what they did and why it’s different.</a:t>
             </a:r>
           </a:p>
+          <a:p>
+            <a:pPr marL="228600" indent="-228600">
+              <a:buAutoNum type="arabicPeriod"/>
+            </a:pPr>
+            <a:r>
+              <a:rPr lang="en-US" dirty="0"/>
+              <a:t>There are RCTs on this, but we won’t have evidence for another decade. But we still have to design screening now. </a:t>
+            </a:r>
+          </a:p>
+          <a:p>
+            <a:pPr marL="228600" indent="-228600">
+              <a:buAutoNum type="arabicPeriod"/>
+            </a:pPr>
+            <a:r>
+              <a:rPr lang="en-US" dirty="0"/>
+              <a:t>Same as above, really. </a:t>
+            </a:r>
+          </a:p>
+          <a:p>
+            <a:pPr marL="228600" indent="-228600">
+              <a:buAutoNum type="arabicPeriod"/>
+            </a:pPr>
+            <a:r>
+              <a:rPr lang="en-US" dirty="0"/>
+              <a:t>Observational design: use a large claims data base (could we do this in OHIP? Why or why not?) and look at differences in CRC onset based on screening. Importantly, this paper shows *why* different simpler designs might fail. </a:t>
+            </a:r>
+          </a:p>
+          <a:p>
+            <a:pPr marL="228600" indent="-228600">
+              <a:buAutoNum type="arabicPeriod"/>
+            </a:pPr>
+            <a:endParaRPr lang="en-US" dirty="0"/>
+          </a:p>
         </p:txBody>
       </p:sp>
       <p:sp>
@@ -7589,6 +7619,329 @@
 </file>
 
 <file path=ppt/notesSlides/notesSlide66.xml><?xml version="1.0" encoding="utf-8"?>
+<p:notes xmlns:a="http://schemas.openxmlformats.org/drawingml/2006/main" xmlns:r="http://schemas.openxmlformats.org/officeDocument/2006/relationships" xmlns:p="http://schemas.openxmlformats.org/presentationml/2006/main">
+  <p:cSld>
+    <p:spTree>
+      <p:nvGrpSpPr>
+        <p:cNvPr id="1" name="">
+          <a:extLst>
+            <a:ext uri="{FF2B5EF4-FFF2-40B4-BE49-F238E27FC236}">
+              <a16:creationId xmlns:a16="http://schemas.microsoft.com/office/drawing/2014/main" id="{A3AEB9A4-82A1-04FD-1BB1-E5916D7F90D7}"/>
+            </a:ext>
+          </a:extLst>
+        </p:cNvPr>
+        <p:cNvGrpSpPr/>
+        <p:nvPr/>
+      </p:nvGrpSpPr>
+      <p:grpSpPr>
+        <a:xfrm>
+          <a:off x="0" y="0"/>
+          <a:ext cx="0" cy="0"/>
+          <a:chOff x="0" y="0"/>
+          <a:chExt cx="0" cy="0"/>
+        </a:xfrm>
+      </p:grpSpPr>
+      <p:sp>
+        <p:nvSpPr>
+          <p:cNvPr id="2" name="Slide Image Placeholder 1">
+            <a:extLst>
+              <a:ext uri="{FF2B5EF4-FFF2-40B4-BE49-F238E27FC236}">
+                <a16:creationId xmlns:a16="http://schemas.microsoft.com/office/drawing/2014/main" id="{7D83E0A8-A9BD-4472-9FB8-F2ECA996A9E9}"/>
+              </a:ext>
+            </a:extLst>
+          </p:cNvPr>
+          <p:cNvSpPr>
+            <a:spLocks noGrp="1" noRot="1" noChangeAspect="1"/>
+          </p:cNvSpPr>
+          <p:nvPr>
+            <p:ph type="sldImg"/>
+          </p:nvPr>
+        </p:nvSpPr>
+        <p:spPr/>
+      </p:sp>
+      <p:sp>
+        <p:nvSpPr>
+          <p:cNvPr id="3" name="Notes Placeholder 2">
+            <a:extLst>
+              <a:ext uri="{FF2B5EF4-FFF2-40B4-BE49-F238E27FC236}">
+                <a16:creationId xmlns:a16="http://schemas.microsoft.com/office/drawing/2014/main" id="{ABC1C726-AC96-EC1B-556E-342AAABA14E6}"/>
+              </a:ext>
+            </a:extLst>
+          </p:cNvPr>
+          <p:cNvSpPr>
+            <a:spLocks noGrp="1"/>
+          </p:cNvSpPr>
+          <p:nvPr>
+            <p:ph type="body" idx="1"/>
+          </p:nvPr>
+        </p:nvSpPr>
+        <p:spPr/>
+        <p:txBody>
+          <a:bodyPr/>
+          <a:lstStyle/>
+          <a:p>
+            <a:r>
+              <a:rPr lang="en-US" dirty="0"/>
+              <a:t>- 2. “That is, </a:t>
+            </a:r>
+            <a:r>
+              <a:rPr lang="en-US" dirty="0" err="1"/>
+              <a:t>weassign</a:t>
+            </a:r>
+            <a:r>
+              <a:rPr lang="en-US" dirty="0"/>
+              <a:t> individuals who receive a colonoscopy while </a:t>
+            </a:r>
+            <a:r>
+              <a:rPr lang="en-US" dirty="0" err="1"/>
+              <a:t>meetingthe</a:t>
+            </a:r>
+            <a:r>
+              <a:rPr lang="en-US" dirty="0"/>
+              <a:t> eligibility criteria to the colonoscopy strategy (with </a:t>
+            </a:r>
+            <a:r>
+              <a:rPr lang="en-US" dirty="0" err="1"/>
+              <a:t>timezero</a:t>
+            </a:r>
+            <a:r>
+              <a:rPr lang="en-US" dirty="0"/>
+              <a:t> being the time of the colonoscopy), and individuals </a:t>
+            </a:r>
+            <a:r>
+              <a:rPr lang="en-US" dirty="0" err="1"/>
+              <a:t>whodid</a:t>
+            </a:r>
+            <a:r>
+              <a:rPr lang="en-US" dirty="0"/>
+              <a:t> not receive a colonoscopy throughout the entire </a:t>
+            </a:r>
+            <a:r>
+              <a:rPr lang="en-US" dirty="0" err="1"/>
+              <a:t>studyperiod</a:t>
+            </a:r>
+            <a:r>
+              <a:rPr lang="en-US" dirty="0"/>
+              <a:t> to the no-colonoscopy group (with time zero being </a:t>
+            </a:r>
+            <a:r>
+              <a:rPr lang="en-US" dirty="0" err="1"/>
+              <a:t>theirfirst</a:t>
+            </a:r>
+            <a:r>
+              <a:rPr lang="en-US" dirty="0"/>
+              <a:t> eligible time during the study period).”</a:t>
+            </a:r>
+          </a:p>
+          <a:p>
+            <a:pPr marL="171450" indent="-171450">
+              <a:buFontTx/>
+              <a:buChar char="-"/>
+            </a:pPr>
+            <a:r>
+              <a:rPr lang="en-US" dirty="0"/>
+              <a:t>Excludes those with cancer from the control group, so would understate effectiveness of CRC screening (screening would look harmful!). </a:t>
+            </a:r>
+          </a:p>
+          <a:p>
+            <a:pPr marL="171450" indent="-171450">
+              <a:buFontTx/>
+              <a:buChar char="-"/>
+            </a:pPr>
+            <a:r>
+              <a:rPr lang="en-US" dirty="0"/>
+              <a:t>3. selecting an arbitrary </a:t>
+            </a:r>
+            <a:r>
+              <a:rPr lang="en-US" dirty="0" err="1"/>
+              <a:t>timezero</a:t>
+            </a:r>
+            <a:r>
+              <a:rPr lang="en-US" dirty="0"/>
+              <a:t> to ascertain eligibility, e.g., January 1, 2004, </a:t>
+            </a:r>
+            <a:r>
+              <a:rPr lang="en-US" dirty="0" err="1"/>
+              <a:t>andthen</a:t>
+            </a:r>
+            <a:r>
+              <a:rPr lang="en-US" dirty="0"/>
+              <a:t> assigning all eligible individuals to the </a:t>
+            </a:r>
+            <a:r>
+              <a:rPr lang="en-US" dirty="0" err="1"/>
+              <a:t>colonoscopystrategy</a:t>
+            </a:r>
+            <a:r>
+              <a:rPr lang="en-US" dirty="0"/>
+              <a:t> if they received a colonoscopy in the </a:t>
+            </a:r>
+            <a:r>
+              <a:rPr lang="en-US" dirty="0" err="1"/>
+              <a:t>previousfive</a:t>
+            </a:r>
+            <a:r>
+              <a:rPr lang="en-US" dirty="0"/>
+              <a:t> years, or to the no-screening strategy otherwise.</a:t>
+            </a:r>
+          </a:p>
+          <a:p>
+            <a:pPr marL="171450" indent="-171450">
+              <a:buFontTx/>
+              <a:buChar char="-"/>
+            </a:pPr>
+            <a:r>
+              <a:rPr lang="en-US" dirty="0"/>
+              <a:t>This one excludes those with cancer from the treatment group, not the control group! It also fails to think about endogenous selection into screening. Talk about this later on. </a:t>
+            </a:r>
+          </a:p>
+        </p:txBody>
+      </p:sp>
+      <p:sp>
+        <p:nvSpPr>
+          <p:cNvPr id="4" name="Slide Number Placeholder 3">
+            <a:extLst>
+              <a:ext uri="{FF2B5EF4-FFF2-40B4-BE49-F238E27FC236}">
+                <a16:creationId xmlns:a16="http://schemas.microsoft.com/office/drawing/2014/main" id="{3FE81CF2-F890-0961-1D62-AC4DD40BA4C0}"/>
+              </a:ext>
+            </a:extLst>
+          </p:cNvPr>
+          <p:cNvSpPr>
+            <a:spLocks noGrp="1"/>
+          </p:cNvSpPr>
+          <p:nvPr>
+            <p:ph type="sldNum" sz="quarter" idx="5"/>
+          </p:nvPr>
+        </p:nvSpPr>
+        <p:spPr/>
+        <p:txBody>
+          <a:bodyPr/>
+          <a:lstStyle/>
+          <a:p>
+            <a:fld id="{4AF79E1B-2C51-4B9B-8EA4-26DE9E345AFF}" type="slidenum">
+              <a:rPr lang="en-US" smtClean="0"/>
+              <a:t>66</a:t>
+            </a:fld>
+            <a:endParaRPr lang="en-US"/>
+          </a:p>
+        </p:txBody>
+      </p:sp>
+    </p:spTree>
+    <p:extLst>
+      <p:ext uri="{BB962C8B-B14F-4D97-AF65-F5344CB8AC3E}">
+        <p14:creationId xmlns:p14="http://schemas.microsoft.com/office/powerpoint/2010/main" val="410319028"/>
+      </p:ext>
+    </p:extLst>
+  </p:cSld>
+  <p:clrMapOvr>
+    <a:masterClrMapping/>
+  </p:clrMapOvr>
+</p:notes>
+</file>
+
+<file path=ppt/notesSlides/notesSlide67.xml><?xml version="1.0" encoding="utf-8"?>
+<p:notes xmlns:a="http://schemas.openxmlformats.org/drawingml/2006/main" xmlns:r="http://schemas.openxmlformats.org/officeDocument/2006/relationships" xmlns:p="http://schemas.openxmlformats.org/presentationml/2006/main">
+  <p:cSld>
+    <p:spTree>
+      <p:nvGrpSpPr>
+        <p:cNvPr id="1" name=""/>
+        <p:cNvGrpSpPr/>
+        <p:nvPr/>
+      </p:nvGrpSpPr>
+      <p:grpSpPr>
+        <a:xfrm>
+          <a:off x="0" y="0"/>
+          <a:ext cx="0" cy="0"/>
+          <a:chOff x="0" y="0"/>
+          <a:chExt cx="0" cy="0"/>
+        </a:xfrm>
+      </p:grpSpPr>
+      <p:sp>
+        <p:nvSpPr>
+          <p:cNvPr id="2" name="Slide Image Placeholder 1"/>
+          <p:cNvSpPr>
+            <a:spLocks noGrp="1" noRot="1" noChangeAspect="1"/>
+          </p:cNvSpPr>
+          <p:nvPr>
+            <p:ph type="sldImg"/>
+          </p:nvPr>
+        </p:nvSpPr>
+        <p:spPr/>
+      </p:sp>
+      <p:sp>
+        <p:nvSpPr>
+          <p:cNvPr id="3" name="Notes Placeholder 2"/>
+          <p:cNvSpPr>
+            <a:spLocks noGrp="1"/>
+          </p:cNvSpPr>
+          <p:nvPr>
+            <p:ph type="body" idx="1"/>
+          </p:nvPr>
+        </p:nvSpPr>
+        <p:spPr/>
+        <p:txBody>
+          <a:bodyPr/>
+          <a:lstStyle/>
+          <a:p>
+            <a:r>
+              <a:rPr lang="en-US" dirty="0"/>
+              <a:t>What design does this look like? Randomization based on controls </a:t>
+            </a:r>
+            <a:r>
+              <a:rPr lang="en-US" dirty="0">
+                <a:sym typeface="Wingdings" panose="05000000000000000000" pitchFamily="2" charset="2"/>
+              </a:rPr>
+              <a:t> matching design (that’s next week!)</a:t>
+            </a:r>
+          </a:p>
+          <a:p>
+            <a:r>
+              <a:rPr lang="en-US" dirty="0">
+                <a:sym typeface="Wingdings" panose="05000000000000000000" pitchFamily="2" charset="2"/>
+              </a:rPr>
+              <a:t>- In the next paragraph they talk about multiple trials over time  this is a DD (a “stacked” DD to be precise). That’s later on. Why would you do one over the other? </a:t>
+            </a:r>
+            <a:endParaRPr lang="en-US" dirty="0"/>
+          </a:p>
+        </p:txBody>
+      </p:sp>
+      <p:sp>
+        <p:nvSpPr>
+          <p:cNvPr id="4" name="Slide Number Placeholder 3"/>
+          <p:cNvSpPr>
+            <a:spLocks noGrp="1"/>
+          </p:cNvSpPr>
+          <p:nvPr>
+            <p:ph type="sldNum" sz="quarter" idx="5"/>
+          </p:nvPr>
+        </p:nvSpPr>
+        <p:spPr/>
+        <p:txBody>
+          <a:bodyPr/>
+          <a:lstStyle/>
+          <a:p>
+            <a:fld id="{4AF79E1B-2C51-4B9B-8EA4-26DE9E345AFF}" type="slidenum">
+              <a:rPr lang="en-US" smtClean="0"/>
+              <a:t>67</a:t>
+            </a:fld>
+            <a:endParaRPr lang="en-US"/>
+          </a:p>
+        </p:txBody>
+      </p:sp>
+    </p:spTree>
+    <p:extLst>
+      <p:ext uri="{BB962C8B-B14F-4D97-AF65-F5344CB8AC3E}">
+        <p14:creationId xmlns:p14="http://schemas.microsoft.com/office/powerpoint/2010/main" val="1547393696"/>
+      </p:ext>
+    </p:extLst>
+  </p:cSld>
+  <p:clrMapOvr>
+    <a:masterClrMapping/>
+  </p:clrMapOvr>
+</p:notes>
+</file>
+
+<file path=ppt/notesSlides/notesSlide68.xml><?xml version="1.0" encoding="utf-8"?>
 <p:notes xmlns:a="http://schemas.openxmlformats.org/drawingml/2006/main" xmlns:r="http://schemas.openxmlformats.org/officeDocument/2006/relationships" xmlns:p="http://schemas.openxmlformats.org/presentationml/2006/main">
   <p:cSld>
     <p:spTree>
@@ -7655,6 +8008,12 @@
               <a:t>What were the 4 approaches? What was the one that they did follow as the TTE and why was it different? </a:t>
             </a:r>
           </a:p>
+          <a:p>
+            <a:r>
+              <a:rPr lang="en-US" dirty="0"/>
+              <a:t>- Note: what are they missing here? Endogenous selection! This is why it helps to be an economist. </a:t>
+            </a:r>
+          </a:p>
         </p:txBody>
       </p:sp>
       <p:sp>
@@ -7680,7 +8039,7 @@
           <a:p>
             <a:fld id="{4AF79E1B-2C51-4B9B-8EA4-26DE9E345AFF}" type="slidenum">
               <a:rPr lang="en-US" smtClean="0"/>
-              <a:t>66</a:t>
+              <a:t>68</a:t>
             </a:fld>
             <a:endParaRPr lang="en-US"/>
           </a:p>
@@ -7699,7 +8058,7 @@
 </p:notes>
 </file>
 
-<file path=ppt/notesSlides/notesSlide67.xml><?xml version="1.0" encoding="utf-8"?>
+<file path=ppt/notesSlides/notesSlide69.xml><?xml version="1.0" encoding="utf-8"?>
 <p:notes xmlns:a="http://schemas.openxmlformats.org/drawingml/2006/main" xmlns:r="http://schemas.openxmlformats.org/officeDocument/2006/relationships" xmlns:p="http://schemas.openxmlformats.org/presentationml/2006/main">
   <p:cSld>
     <p:spTree>
@@ -7791,7 +8150,7 @@
           <a:p>
             <a:fld id="{4AF79E1B-2C51-4B9B-8EA4-26DE9E345AFF}" type="slidenum">
               <a:rPr lang="en-US" smtClean="0"/>
-              <a:t>67</a:t>
+              <a:t>69</a:t>
             </a:fld>
             <a:endParaRPr lang="en-US"/>
           </a:p>
@@ -7801,217 +8160,6 @@
     <p:extLst>
       <p:ext uri="{BB962C8B-B14F-4D97-AF65-F5344CB8AC3E}">
         <p14:creationId xmlns:p14="http://schemas.microsoft.com/office/powerpoint/2010/main" val="3403443446"/>
-      </p:ext>
-    </p:extLst>
-  </p:cSld>
-  <p:clrMapOvr>
-    <a:masterClrMapping/>
-  </p:clrMapOvr>
-</p:notes>
-</file>
-
-<file path=ppt/notesSlides/notesSlide68.xml><?xml version="1.0" encoding="utf-8"?>
-<p:notes xmlns:a="http://schemas.openxmlformats.org/drawingml/2006/main" xmlns:r="http://schemas.openxmlformats.org/officeDocument/2006/relationships" xmlns:p="http://schemas.openxmlformats.org/presentationml/2006/main">
-  <p:cSld>
-    <p:spTree>
-      <p:nvGrpSpPr>
-        <p:cNvPr id="1" name="">
-          <a:extLst>
-            <a:ext uri="{FF2B5EF4-FFF2-40B4-BE49-F238E27FC236}">
-              <a16:creationId xmlns:a16="http://schemas.microsoft.com/office/drawing/2014/main" id="{943C8B18-EBBA-CA03-E840-58D4A16F4D3D}"/>
-            </a:ext>
-          </a:extLst>
-        </p:cNvPr>
-        <p:cNvGrpSpPr/>
-        <p:nvPr/>
-      </p:nvGrpSpPr>
-      <p:grpSpPr>
-        <a:xfrm>
-          <a:off x="0" y="0"/>
-          <a:ext cx="0" cy="0"/>
-          <a:chOff x="0" y="0"/>
-          <a:chExt cx="0" cy="0"/>
-        </a:xfrm>
-      </p:grpSpPr>
-      <p:sp>
-        <p:nvSpPr>
-          <p:cNvPr id="2" name="Slide Image Placeholder 1">
-            <a:extLst>
-              <a:ext uri="{FF2B5EF4-FFF2-40B4-BE49-F238E27FC236}">
-                <a16:creationId xmlns:a16="http://schemas.microsoft.com/office/drawing/2014/main" id="{14FFBEDB-4C0B-C528-CE3A-14CADAC1C710}"/>
-              </a:ext>
-            </a:extLst>
-          </p:cNvPr>
-          <p:cNvSpPr>
-            <a:spLocks noGrp="1" noRot="1" noChangeAspect="1"/>
-          </p:cNvSpPr>
-          <p:nvPr>
-            <p:ph type="sldImg"/>
-          </p:nvPr>
-        </p:nvSpPr>
-        <p:spPr/>
-      </p:sp>
-      <p:sp>
-        <p:nvSpPr>
-          <p:cNvPr id="3" name="Notes Placeholder 2">
-            <a:extLst>
-              <a:ext uri="{FF2B5EF4-FFF2-40B4-BE49-F238E27FC236}">
-                <a16:creationId xmlns:a16="http://schemas.microsoft.com/office/drawing/2014/main" id="{82AA18C5-97DA-5B11-BAC8-15AC3F5AF131}"/>
-              </a:ext>
-            </a:extLst>
-          </p:cNvPr>
-          <p:cNvSpPr>
-            <a:spLocks noGrp="1"/>
-          </p:cNvSpPr>
-          <p:nvPr>
-            <p:ph type="body" idx="1"/>
-          </p:nvPr>
-        </p:nvSpPr>
-        <p:spPr/>
-        <p:txBody>
-          <a:bodyPr/>
-          <a:lstStyle/>
-          <a:p>
-            <a:r>
-              <a:rPr lang="en-US" dirty="0"/>
-              <a:t>We’re going to talk about different approaches to approximating an experiment throughout the rest of the term. This will primarily be focused on how to deal with selection/sample construction + estimation, combined with </a:t>
-            </a:r>
-            <a:r>
-              <a:rPr lang="en-US" i="1" dirty="0"/>
-              <a:t>identifying assumptions </a:t>
-            </a:r>
-            <a:r>
-              <a:rPr lang="en-US" i="0" dirty="0"/>
-              <a:t>that will allow us to move beyond observational data and into </a:t>
-            </a:r>
-            <a:r>
-              <a:rPr lang="en-US" i="0"/>
-              <a:t>design-based inference. </a:t>
-            </a:r>
-            <a:endParaRPr lang="en-US" dirty="0"/>
-          </a:p>
-        </p:txBody>
-      </p:sp>
-      <p:sp>
-        <p:nvSpPr>
-          <p:cNvPr id="4" name="Slide Number Placeholder 3">
-            <a:extLst>
-              <a:ext uri="{FF2B5EF4-FFF2-40B4-BE49-F238E27FC236}">
-                <a16:creationId xmlns:a16="http://schemas.microsoft.com/office/drawing/2014/main" id="{3016C4FA-4D62-524F-DA23-7F8F38EAFF80}"/>
-              </a:ext>
-            </a:extLst>
-          </p:cNvPr>
-          <p:cNvSpPr>
-            <a:spLocks noGrp="1"/>
-          </p:cNvSpPr>
-          <p:nvPr>
-            <p:ph type="sldNum" sz="quarter" idx="5"/>
-          </p:nvPr>
-        </p:nvSpPr>
-        <p:spPr/>
-        <p:txBody>
-          <a:bodyPr/>
-          <a:lstStyle/>
-          <a:p>
-            <a:fld id="{4AF79E1B-2C51-4B9B-8EA4-26DE9E345AFF}" type="slidenum">
-              <a:rPr lang="en-US" smtClean="0"/>
-              <a:t>68</a:t>
-            </a:fld>
-            <a:endParaRPr lang="en-US"/>
-          </a:p>
-        </p:txBody>
-      </p:sp>
-    </p:spTree>
-    <p:extLst>
-      <p:ext uri="{BB962C8B-B14F-4D97-AF65-F5344CB8AC3E}">
-        <p14:creationId xmlns:p14="http://schemas.microsoft.com/office/powerpoint/2010/main" val="1764220907"/>
-      </p:ext>
-    </p:extLst>
-  </p:cSld>
-  <p:clrMapOvr>
-    <a:masterClrMapping/>
-  </p:clrMapOvr>
-</p:notes>
-</file>
-
-<file path=ppt/notesSlides/notesSlide69.xml><?xml version="1.0" encoding="utf-8"?>
-<p:notes xmlns:a="http://schemas.openxmlformats.org/drawingml/2006/main" xmlns:r="http://schemas.openxmlformats.org/officeDocument/2006/relationships" xmlns:p="http://schemas.openxmlformats.org/presentationml/2006/main">
-  <p:cSld>
-    <p:spTree>
-      <p:nvGrpSpPr>
-        <p:cNvPr id="1" name=""/>
-        <p:cNvGrpSpPr/>
-        <p:nvPr/>
-      </p:nvGrpSpPr>
-      <p:grpSpPr>
-        <a:xfrm>
-          <a:off x="0" y="0"/>
-          <a:ext cx="0" cy="0"/>
-          <a:chOff x="0" y="0"/>
-          <a:chExt cx="0" cy="0"/>
-        </a:xfrm>
-      </p:grpSpPr>
-      <p:sp>
-        <p:nvSpPr>
-          <p:cNvPr id="2" name="Slide Image Placeholder 1"/>
-          <p:cNvSpPr>
-            <a:spLocks noGrp="1" noRot="1" noChangeAspect="1"/>
-          </p:cNvSpPr>
-          <p:nvPr>
-            <p:ph type="sldImg"/>
-          </p:nvPr>
-        </p:nvSpPr>
-        <p:spPr/>
-      </p:sp>
-      <p:sp>
-        <p:nvSpPr>
-          <p:cNvPr id="3" name="Notes Placeholder 2"/>
-          <p:cNvSpPr>
-            <a:spLocks noGrp="1"/>
-          </p:cNvSpPr>
-          <p:nvPr>
-            <p:ph type="body" idx="1"/>
-          </p:nvPr>
-        </p:nvSpPr>
-        <p:spPr/>
-        <p:txBody>
-          <a:bodyPr/>
-          <a:lstStyle/>
-          <a:p>
-            <a:r>
-              <a:rPr lang="en-US" dirty="0"/>
-              <a:t>Others include KFF morning briefing (US) and Healthy Debate (Canada)</a:t>
-            </a:r>
-          </a:p>
-        </p:txBody>
-      </p:sp>
-      <p:sp>
-        <p:nvSpPr>
-          <p:cNvPr id="4" name="Slide Number Placeholder 3"/>
-          <p:cNvSpPr>
-            <a:spLocks noGrp="1"/>
-          </p:cNvSpPr>
-          <p:nvPr>
-            <p:ph type="sldNum" sz="quarter" idx="5"/>
-          </p:nvPr>
-        </p:nvSpPr>
-        <p:spPr/>
-        <p:txBody>
-          <a:bodyPr/>
-          <a:lstStyle/>
-          <a:p>
-            <a:fld id="{4AF79E1B-2C51-4B9B-8EA4-26DE9E345AFF}" type="slidenum">
-              <a:rPr lang="en-US" smtClean="0"/>
-              <a:t>69</a:t>
-            </a:fld>
-            <a:endParaRPr lang="en-US"/>
-          </a:p>
-        </p:txBody>
-      </p:sp>
-    </p:spTree>
-    <p:extLst>
-      <p:ext uri="{BB962C8B-B14F-4D97-AF65-F5344CB8AC3E}">
-        <p14:creationId xmlns:p14="http://schemas.microsoft.com/office/powerpoint/2010/main" val="2538809164"/>
       </p:ext>
     </p:extLst>
   </p:cSld>
@@ -8113,7 +8261,13 @@
   <p:cSld>
     <p:spTree>
       <p:nvGrpSpPr>
-        <p:cNvPr id="1" name=""/>
+        <p:cNvPr id="1" name="">
+          <a:extLst>
+            <a:ext uri="{FF2B5EF4-FFF2-40B4-BE49-F238E27FC236}">
+              <a16:creationId xmlns:a16="http://schemas.microsoft.com/office/drawing/2014/main" id="{943C8B18-EBBA-CA03-E840-58D4A16F4D3D}"/>
+            </a:ext>
+          </a:extLst>
+        </p:cNvPr>
         <p:cNvGrpSpPr/>
         <p:nvPr/>
       </p:nvGrpSpPr>
@@ -8127,7 +8281,13 @@
       </p:grpSpPr>
       <p:sp>
         <p:nvSpPr>
-          <p:cNvPr id="2" name="Slide Image Placeholder 1"/>
+          <p:cNvPr id="2" name="Slide Image Placeholder 1">
+            <a:extLst>
+              <a:ext uri="{FF2B5EF4-FFF2-40B4-BE49-F238E27FC236}">
+                <a16:creationId xmlns:a16="http://schemas.microsoft.com/office/drawing/2014/main" id="{14FFBEDB-4C0B-C528-CE3A-14CADAC1C710}"/>
+              </a:ext>
+            </a:extLst>
+          </p:cNvPr>
           <p:cNvSpPr>
             <a:spLocks noGrp="1" noRot="1" noChangeAspect="1"/>
           </p:cNvSpPr>
@@ -8139,7 +8299,13 @@
       </p:sp>
       <p:sp>
         <p:nvSpPr>
-          <p:cNvPr id="3" name="Notes Placeholder 2"/>
+          <p:cNvPr id="3" name="Notes Placeholder 2">
+            <a:extLst>
+              <a:ext uri="{FF2B5EF4-FFF2-40B4-BE49-F238E27FC236}">
+                <a16:creationId xmlns:a16="http://schemas.microsoft.com/office/drawing/2014/main" id="{82AA18C5-97DA-5B11-BAC8-15AC3F5AF131}"/>
+              </a:ext>
+            </a:extLst>
+          </p:cNvPr>
           <p:cNvSpPr>
             <a:spLocks noGrp="1"/>
           </p:cNvSpPr>
@@ -8154,14 +8320,33 @@
           <a:p>
             <a:r>
               <a:rPr lang="en-US" dirty="0"/>
-              <a:t>Don’t be scared of regression equations – in fact, formalizing them will help you see threats to identification and improve your estimation approach. We are going to spend lots of time now on identifying assumptions (the bridge between TTE and truly causal work)</a:t>
-            </a:r>
-          </a:p>
-        </p:txBody>
-      </p:sp>
-      <p:sp>
-        <p:nvSpPr>
-          <p:cNvPr id="4" name="Slide Number Placeholder 3"/>
+              <a:t>We’re going to talk about different approaches to approximating an experiment throughout the rest of the term. This will primarily be focused on how to deal with selection/sample construction + estimation, combined with </a:t>
+            </a:r>
+            <a:r>
+              <a:rPr lang="en-US" i="1" dirty="0"/>
+              <a:t>identifying assumptions </a:t>
+            </a:r>
+            <a:r>
+              <a:rPr lang="en-US" i="0" dirty="0"/>
+              <a:t>that will allow us to move beyond observational data and into </a:t>
+            </a:r>
+            <a:r>
+              <a:rPr lang="en-US" i="0"/>
+              <a:t>design-based inference. </a:t>
+            </a:r>
+            <a:endParaRPr lang="en-US" dirty="0"/>
+          </a:p>
+        </p:txBody>
+      </p:sp>
+      <p:sp>
+        <p:nvSpPr>
+          <p:cNvPr id="4" name="Slide Number Placeholder 3">
+            <a:extLst>
+              <a:ext uri="{FF2B5EF4-FFF2-40B4-BE49-F238E27FC236}">
+                <a16:creationId xmlns:a16="http://schemas.microsoft.com/office/drawing/2014/main" id="{3016C4FA-4D62-524F-DA23-7F8F38EAFF80}"/>
+              </a:ext>
+            </a:extLst>
+          </p:cNvPr>
           <p:cNvSpPr>
             <a:spLocks noGrp="1"/>
           </p:cNvSpPr>
@@ -8185,7 +8370,7 @@
     </p:spTree>
     <p:extLst>
       <p:ext uri="{BB962C8B-B14F-4D97-AF65-F5344CB8AC3E}">
-        <p14:creationId xmlns:p14="http://schemas.microsoft.com/office/powerpoint/2010/main" val="4261254456"/>
+        <p14:creationId xmlns:p14="http://schemas.microsoft.com/office/powerpoint/2010/main" val="1764220907"/>
       </p:ext>
     </p:extLst>
   </p:cSld>
@@ -8241,7 +8426,7 @@
           <a:p>
             <a:r>
               <a:rPr lang="en-US" dirty="0"/>
-              <a:t>You’ll develop an intuition for this over time. Talk to lots of people about your thoughts!</a:t>
+              <a:t>Others include KFF morning briefing (US) and Healthy Debate (Canada)</a:t>
             </a:r>
           </a:p>
         </p:txBody>
@@ -8272,7 +8457,7 @@
     </p:spTree>
     <p:extLst>
       <p:ext uri="{BB962C8B-B14F-4D97-AF65-F5344CB8AC3E}">
-        <p14:creationId xmlns:p14="http://schemas.microsoft.com/office/powerpoint/2010/main" val="217382793"/>
+        <p14:creationId xmlns:p14="http://schemas.microsoft.com/office/powerpoint/2010/main" val="2538809164"/>
       </p:ext>
     </p:extLst>
   </p:cSld>
@@ -8287,13 +8472,7 @@
   <p:cSld>
     <p:spTree>
       <p:nvGrpSpPr>
-        <p:cNvPr id="1" name="">
-          <a:extLst>
-            <a:ext uri="{FF2B5EF4-FFF2-40B4-BE49-F238E27FC236}">
-              <a16:creationId xmlns:a16="http://schemas.microsoft.com/office/drawing/2014/main" id="{0187F0CE-0095-43A3-8E09-5FBB537E5E93}"/>
-            </a:ext>
-          </a:extLst>
-        </p:cNvPr>
+        <p:cNvPr id="1" name=""/>
         <p:cNvGrpSpPr/>
         <p:nvPr/>
       </p:nvGrpSpPr>
@@ -8307,13 +8486,7 @@
       </p:grpSpPr>
       <p:sp>
         <p:nvSpPr>
-          <p:cNvPr id="2" name="Slide Image Placeholder 1">
-            <a:extLst>
-              <a:ext uri="{FF2B5EF4-FFF2-40B4-BE49-F238E27FC236}">
-                <a16:creationId xmlns:a16="http://schemas.microsoft.com/office/drawing/2014/main" id="{17CE6E97-FD88-F08C-AC3D-A6E849C9E8F7}"/>
-              </a:ext>
-            </a:extLst>
-          </p:cNvPr>
+          <p:cNvPr id="2" name="Slide Image Placeholder 1"/>
           <p:cNvSpPr>
             <a:spLocks noGrp="1" noRot="1" noChangeAspect="1"/>
           </p:cNvSpPr>
@@ -8325,13 +8498,7 @@
       </p:sp>
       <p:sp>
         <p:nvSpPr>
-          <p:cNvPr id="3" name="Notes Placeholder 2">
-            <a:extLst>
-              <a:ext uri="{FF2B5EF4-FFF2-40B4-BE49-F238E27FC236}">
-                <a16:creationId xmlns:a16="http://schemas.microsoft.com/office/drawing/2014/main" id="{283E7D39-72FE-4CD9-6686-A6B14DDCC4E4}"/>
-              </a:ext>
-            </a:extLst>
-          </p:cNvPr>
+          <p:cNvPr id="3" name="Notes Placeholder 2"/>
           <p:cNvSpPr>
             <a:spLocks noGrp="1"/>
           </p:cNvSpPr>
@@ -8346,20 +8513,14 @@
           <a:p>
             <a:r>
               <a:rPr lang="en-US" dirty="0"/>
-              <a:t>Setting the stage appropriately can be incredibly powerful. Recall our earlier slides on this. </a:t>
-            </a:r>
-          </a:p>
-        </p:txBody>
-      </p:sp>
-      <p:sp>
-        <p:nvSpPr>
-          <p:cNvPr id="4" name="Slide Number Placeholder 3">
-            <a:extLst>
-              <a:ext uri="{FF2B5EF4-FFF2-40B4-BE49-F238E27FC236}">
-                <a16:creationId xmlns:a16="http://schemas.microsoft.com/office/drawing/2014/main" id="{BF5C9932-3C38-B795-57DB-693254E422C1}"/>
-              </a:ext>
-            </a:extLst>
-          </p:cNvPr>
+              <a:t>Don’t be scared of regression equations – in fact, formalizing them will help you see threats to identification and improve your estimation approach. We are going to spend lots of time now on identifying assumptions (the bridge between TTE and truly causal work)</a:t>
+            </a:r>
+          </a:p>
+        </p:txBody>
+      </p:sp>
+      <p:sp>
+        <p:nvSpPr>
+          <p:cNvPr id="4" name="Slide Number Placeholder 3"/>
           <p:cNvSpPr>
             <a:spLocks noGrp="1"/>
           </p:cNvSpPr>
@@ -8383,7 +8544,7 @@
     </p:spTree>
     <p:extLst>
       <p:ext uri="{BB962C8B-B14F-4D97-AF65-F5344CB8AC3E}">
-        <p14:creationId xmlns:p14="http://schemas.microsoft.com/office/powerpoint/2010/main" val="2880392013"/>
+        <p14:creationId xmlns:p14="http://schemas.microsoft.com/office/powerpoint/2010/main" val="4261254456"/>
       </p:ext>
     </p:extLst>
   </p:cSld>
@@ -8439,7 +8600,7 @@
           <a:p>
             <a:r>
               <a:rPr lang="en-US" dirty="0"/>
-              <a:t>This is the truth about all projects! </a:t>
+              <a:t>You’ll develop an intuition for this over time. Talk to lots of people about your thoughts!</a:t>
             </a:r>
           </a:p>
         </p:txBody>
@@ -8470,7 +8631,7 @@
     </p:spTree>
     <p:extLst>
       <p:ext uri="{BB962C8B-B14F-4D97-AF65-F5344CB8AC3E}">
-        <p14:creationId xmlns:p14="http://schemas.microsoft.com/office/powerpoint/2010/main" val="2409574444"/>
+        <p14:creationId xmlns:p14="http://schemas.microsoft.com/office/powerpoint/2010/main" val="217382793"/>
       </p:ext>
     </p:extLst>
   </p:cSld>
@@ -8485,7 +8646,13 @@
   <p:cSld>
     <p:spTree>
       <p:nvGrpSpPr>
-        <p:cNvPr id="1" name=""/>
+        <p:cNvPr id="1" name="">
+          <a:extLst>
+            <a:ext uri="{FF2B5EF4-FFF2-40B4-BE49-F238E27FC236}">
+              <a16:creationId xmlns:a16="http://schemas.microsoft.com/office/drawing/2014/main" id="{0187F0CE-0095-43A3-8E09-5FBB537E5E93}"/>
+            </a:ext>
+          </a:extLst>
+        </p:cNvPr>
         <p:cNvGrpSpPr/>
         <p:nvPr/>
       </p:nvGrpSpPr>
@@ -8499,7 +8666,13 @@
       </p:grpSpPr>
       <p:sp>
         <p:nvSpPr>
-          <p:cNvPr id="2" name="Slide Image Placeholder 1"/>
+          <p:cNvPr id="2" name="Slide Image Placeholder 1">
+            <a:extLst>
+              <a:ext uri="{FF2B5EF4-FFF2-40B4-BE49-F238E27FC236}">
+                <a16:creationId xmlns:a16="http://schemas.microsoft.com/office/drawing/2014/main" id="{17CE6E97-FD88-F08C-AC3D-A6E849C9E8F7}"/>
+              </a:ext>
+            </a:extLst>
+          </p:cNvPr>
           <p:cNvSpPr>
             <a:spLocks noGrp="1" noRot="1" noChangeAspect="1"/>
           </p:cNvSpPr>
@@ -8511,7 +8684,13 @@
       </p:sp>
       <p:sp>
         <p:nvSpPr>
-          <p:cNvPr id="3" name="Notes Placeholder 2"/>
+          <p:cNvPr id="3" name="Notes Placeholder 2">
+            <a:extLst>
+              <a:ext uri="{FF2B5EF4-FFF2-40B4-BE49-F238E27FC236}">
+                <a16:creationId xmlns:a16="http://schemas.microsoft.com/office/drawing/2014/main" id="{283E7D39-72FE-4CD9-6686-A6B14DDCC4E4}"/>
+              </a:ext>
+            </a:extLst>
+          </p:cNvPr>
           <p:cNvSpPr>
             <a:spLocks noGrp="1"/>
           </p:cNvSpPr>
@@ -8526,14 +8705,20 @@
           <a:p>
             <a:r>
               <a:rPr lang="en-US" dirty="0"/>
-              <a:t>(skip this section if needed for time). Your figures and tables are valuable real estate! Treat them as such. </a:t>
-            </a:r>
-          </a:p>
-        </p:txBody>
-      </p:sp>
-      <p:sp>
-        <p:nvSpPr>
-          <p:cNvPr id="4" name="Slide Number Placeholder 3"/>
+              <a:t>Setting the stage appropriately can be incredibly powerful. Recall our earlier slides on this. </a:t>
+            </a:r>
+          </a:p>
+        </p:txBody>
+      </p:sp>
+      <p:sp>
+        <p:nvSpPr>
+          <p:cNvPr id="4" name="Slide Number Placeholder 3">
+            <a:extLst>
+              <a:ext uri="{FF2B5EF4-FFF2-40B4-BE49-F238E27FC236}">
+                <a16:creationId xmlns:a16="http://schemas.microsoft.com/office/drawing/2014/main" id="{BF5C9932-3C38-B795-57DB-693254E422C1}"/>
+              </a:ext>
+            </a:extLst>
+          </p:cNvPr>
           <p:cNvSpPr>
             <a:spLocks noGrp="1"/>
           </p:cNvSpPr>
@@ -8557,7 +8742,7 @@
     </p:spTree>
     <p:extLst>
       <p:ext uri="{BB962C8B-B14F-4D97-AF65-F5344CB8AC3E}">
-        <p14:creationId xmlns:p14="http://schemas.microsoft.com/office/powerpoint/2010/main" val="836899741"/>
+        <p14:creationId xmlns:p14="http://schemas.microsoft.com/office/powerpoint/2010/main" val="2880392013"/>
       </p:ext>
     </p:extLst>
   </p:cSld>
@@ -8611,7 +8796,10 @@
           <a:bodyPr/>
           <a:lstStyle/>
           <a:p>
-            <a:endParaRPr lang="en-US" dirty="0"/>
+            <a:r>
+              <a:rPr lang="en-US" dirty="0"/>
+              <a:t>This is the truth about all projects! </a:t>
+            </a:r>
           </a:p>
         </p:txBody>
       </p:sp>
@@ -8641,7 +8829,7 @@
     </p:spTree>
     <p:extLst>
       <p:ext uri="{BB962C8B-B14F-4D97-AF65-F5344CB8AC3E}">
-        <p14:creationId xmlns:p14="http://schemas.microsoft.com/office/powerpoint/2010/main" val="2981808148"/>
+        <p14:creationId xmlns:p14="http://schemas.microsoft.com/office/powerpoint/2010/main" val="2409574444"/>
       </p:ext>
     </p:extLst>
   </p:cSld>
@@ -8697,7 +8885,7 @@
           <a:p>
             <a:r>
               <a:rPr lang="en-US" dirty="0"/>
-              <a:t>Source: David Card’s lectures https://davidcard.berkeley.edu/lectures/woytinsky.pdf. </a:t>
+              <a:t>(skip this section if needed for time). Your figures and tables are valuable real estate! Treat them as such. </a:t>
             </a:r>
           </a:p>
         </p:txBody>
@@ -8728,7 +8916,7 @@
     </p:spTree>
     <p:extLst>
       <p:ext uri="{BB962C8B-B14F-4D97-AF65-F5344CB8AC3E}">
-        <p14:creationId xmlns:p14="http://schemas.microsoft.com/office/powerpoint/2010/main" val="551824792"/>
+        <p14:creationId xmlns:p14="http://schemas.microsoft.com/office/powerpoint/2010/main" val="836899741"/>
       </p:ext>
     </p:extLst>
   </p:cSld>
@@ -8782,10 +8970,7 @@
           <a:bodyPr/>
           <a:lstStyle/>
           <a:p>
-            <a:r>
-              <a:rPr lang="en-US" dirty="0"/>
-              <a:t>Source: David Card’s lectures https://davidcard.berkeley.edu/lectures/woytinsky.pdf. </a:t>
-            </a:r>
+            <a:endParaRPr lang="en-US" dirty="0"/>
           </a:p>
         </p:txBody>
       </p:sp>
@@ -8815,7 +9000,7 @@
     </p:spTree>
     <p:extLst>
       <p:ext uri="{BB962C8B-B14F-4D97-AF65-F5344CB8AC3E}">
-        <p14:creationId xmlns:p14="http://schemas.microsoft.com/office/powerpoint/2010/main" val="1178471820"/>
+        <p14:creationId xmlns:p14="http://schemas.microsoft.com/office/powerpoint/2010/main" val="2981808148"/>
       </p:ext>
     </p:extLst>
   </p:cSld>
@@ -8902,7 +9087,7 @@
     </p:spTree>
     <p:extLst>
       <p:ext uri="{BB962C8B-B14F-4D97-AF65-F5344CB8AC3E}">
-        <p14:creationId xmlns:p14="http://schemas.microsoft.com/office/powerpoint/2010/main" val="2681681332"/>
+        <p14:creationId xmlns:p14="http://schemas.microsoft.com/office/powerpoint/2010/main" val="551824792"/>
       </p:ext>
     </p:extLst>
   </p:cSld>
@@ -8958,7 +9143,7 @@
           <a:p>
             <a:r>
               <a:rPr lang="en-US" dirty="0"/>
-              <a:t>Building a model may require some calculus to solve it, but provides useful insights into relative comparative statics, what the real parameter of interest is (hint: usually a first/second derivative). Can embed these even further into a structural approach (more on this in a separate course, if there is demand?)</a:t>
+              <a:t>Source: David Card’s lectures https://davidcard.berkeley.edu/lectures/woytinsky.pdf. </a:t>
             </a:r>
           </a:p>
         </p:txBody>
@@ -8989,7 +9174,7 @@
     </p:spTree>
     <p:extLst>
       <p:ext uri="{BB962C8B-B14F-4D97-AF65-F5344CB8AC3E}">
-        <p14:creationId xmlns:p14="http://schemas.microsoft.com/office/powerpoint/2010/main" val="1148368308"/>
+        <p14:creationId xmlns:p14="http://schemas.microsoft.com/office/powerpoint/2010/main" val="1178471820"/>
       </p:ext>
     </p:extLst>
   </p:cSld>
@@ -9132,7 +9317,7 @@
           <a:p>
             <a:r>
               <a:rPr lang="en-US" dirty="0"/>
-              <a:t>Source: David Card’s lectures https://davidcard.berkeley.edu/lectures/woytinsky.pdf. Limited extrapolation/external validity for one. No understanding of underlying behavior either. Example: what’s the effect of a health shock? What is the quasi-exogenous variation we are using? What’s the one-equation model? </a:t>
+              <a:t>Source: David Card’s lectures https://davidcard.berkeley.edu/lectures/woytinsky.pdf. </a:t>
             </a:r>
           </a:p>
         </p:txBody>
@@ -9163,7 +9348,7 @@
     </p:spTree>
     <p:extLst>
       <p:ext uri="{BB962C8B-B14F-4D97-AF65-F5344CB8AC3E}">
-        <p14:creationId xmlns:p14="http://schemas.microsoft.com/office/powerpoint/2010/main" val="1989243959"/>
+        <p14:creationId xmlns:p14="http://schemas.microsoft.com/office/powerpoint/2010/main" val="2681681332"/>
       </p:ext>
     </p:extLst>
   </p:cSld>
@@ -9219,7 +9404,7 @@
           <a:p>
             <a:r>
               <a:rPr lang="en-US" dirty="0"/>
-              <a:t>Source: David Card’s lectures https://davidcard.berkeley.edu/lectures/woytinsky.pdf. Example: what’s the effect of a health shock? What is the quasi-exogenous variation we are using? What’s the counterfactual? </a:t>
+              <a:t>Building a model may require some calculus to solve it, but provides useful insights into relative comparative statics, what the real parameter of interest is (hint: usually a first/second derivative). Can embed these even further into a structural approach (more on this in a separate course, if there is demand?)</a:t>
             </a:r>
           </a:p>
         </p:txBody>
@@ -9250,7 +9435,7 @@
     </p:spTree>
     <p:extLst>
       <p:ext uri="{BB962C8B-B14F-4D97-AF65-F5344CB8AC3E}">
-        <p14:creationId xmlns:p14="http://schemas.microsoft.com/office/powerpoint/2010/main" val="1572588499"/>
+        <p14:creationId xmlns:p14="http://schemas.microsoft.com/office/powerpoint/2010/main" val="1148368308"/>
       </p:ext>
     </p:extLst>
   </p:cSld>
@@ -9265,13 +9450,7 @@
   <p:cSld>
     <p:spTree>
       <p:nvGrpSpPr>
-        <p:cNvPr id="1" name="">
-          <a:extLst>
-            <a:ext uri="{FF2B5EF4-FFF2-40B4-BE49-F238E27FC236}">
-              <a16:creationId xmlns:a16="http://schemas.microsoft.com/office/drawing/2014/main" id="{D42E8D20-BF67-1798-143B-C1B0A5B22BF8}"/>
-            </a:ext>
-          </a:extLst>
-        </p:cNvPr>
+        <p:cNvPr id="1" name=""/>
         <p:cNvGrpSpPr/>
         <p:nvPr/>
       </p:nvGrpSpPr>
@@ -9285,13 +9464,7 @@
       </p:grpSpPr>
       <p:sp>
         <p:nvSpPr>
-          <p:cNvPr id="2" name="Slide Image Placeholder 1">
-            <a:extLst>
-              <a:ext uri="{FF2B5EF4-FFF2-40B4-BE49-F238E27FC236}">
-                <a16:creationId xmlns:a16="http://schemas.microsoft.com/office/drawing/2014/main" id="{7AAAEF9A-5D92-F2C6-6C69-066ADB206371}"/>
-              </a:ext>
-            </a:extLst>
-          </p:cNvPr>
+          <p:cNvPr id="2" name="Slide Image Placeholder 1"/>
           <p:cNvSpPr>
             <a:spLocks noGrp="1" noRot="1" noChangeAspect="1"/>
           </p:cNvSpPr>
@@ -9303,13 +9476,7 @@
       </p:sp>
       <p:sp>
         <p:nvSpPr>
-          <p:cNvPr id="3" name="Notes Placeholder 2">
-            <a:extLst>
-              <a:ext uri="{FF2B5EF4-FFF2-40B4-BE49-F238E27FC236}">
-                <a16:creationId xmlns:a16="http://schemas.microsoft.com/office/drawing/2014/main" id="{91D0B2F5-44EA-A2E0-EE54-B5581083ACCC}"/>
-              </a:ext>
-            </a:extLst>
-          </p:cNvPr>
+          <p:cNvPr id="3" name="Notes Placeholder 2"/>
           <p:cNvSpPr>
             <a:spLocks noGrp="1"/>
           </p:cNvSpPr>
@@ -9324,20 +9491,14 @@
           <a:p>
             <a:r>
               <a:rPr lang="en-US" dirty="0"/>
-              <a:t>(skip this section if needed for time). Your figures and tables are valuable real estate! Treat them as such. </a:t>
-            </a:r>
-          </a:p>
-        </p:txBody>
-      </p:sp>
-      <p:sp>
-        <p:nvSpPr>
-          <p:cNvPr id="4" name="Slide Number Placeholder 3">
-            <a:extLst>
-              <a:ext uri="{FF2B5EF4-FFF2-40B4-BE49-F238E27FC236}">
-                <a16:creationId xmlns:a16="http://schemas.microsoft.com/office/drawing/2014/main" id="{ACD3FDC9-9FD8-CF73-A592-23A7F5AE7175}"/>
-              </a:ext>
-            </a:extLst>
-          </p:cNvPr>
+              <a:t>Source: David Card’s lectures https://davidcard.berkeley.edu/lectures/woytinsky.pdf. Limited extrapolation/external validity for one. No understanding of underlying behavior either. Example: what’s the effect of a health shock? What is the quasi-exogenous variation we are using? What’s the one-equation model? </a:t>
+            </a:r>
+          </a:p>
+        </p:txBody>
+      </p:sp>
+      <p:sp>
+        <p:nvSpPr>
+          <p:cNvPr id="4" name="Slide Number Placeholder 3"/>
           <p:cNvSpPr>
             <a:spLocks noGrp="1"/>
           </p:cNvSpPr>
@@ -9361,7 +9522,7 @@
     </p:spTree>
     <p:extLst>
       <p:ext uri="{BB962C8B-B14F-4D97-AF65-F5344CB8AC3E}">
-        <p14:creationId xmlns:p14="http://schemas.microsoft.com/office/powerpoint/2010/main" val="2014053082"/>
+        <p14:creationId xmlns:p14="http://schemas.microsoft.com/office/powerpoint/2010/main" val="1989243959"/>
       </p:ext>
     </p:extLst>
   </p:cSld>
@@ -9417,27 +9578,7 @@
           <a:p>
             <a:r>
               <a:rPr lang="en-US" dirty="0"/>
-              <a:t>Figures are </a:t>
-            </a:r>
-            <a:r>
-              <a:rPr lang="en-US" b="1" dirty="0"/>
-              <a:t>the most important thing </a:t>
-            </a:r>
-            <a:r>
-              <a:rPr lang="en-US" b="0" dirty="0"/>
-              <a:t>about a paper – no, really. I think this is why TWFE took off more than anything else – the figures. </a:t>
-            </a:r>
-            <a:r>
-              <a:rPr lang="en-US" dirty="0"/>
-              <a:t>Read this article in </a:t>
-            </a:r>
-            <a:r>
-              <a:rPr lang="en-US" dirty="0" err="1"/>
-              <a:t>Github</a:t>
-            </a:r>
-            <a:r>
-              <a:rPr lang="en-US" dirty="0"/>
-              <a:t> repo. How does the data viz stack up to some of these principles</a:t>
+              <a:t>Source: David Card’s lectures https://davidcard.berkeley.edu/lectures/woytinsky.pdf. Example: what’s the effect of a health shock? What is the quasi-exogenous variation we are using? What’s the counterfactual? </a:t>
             </a:r>
           </a:p>
         </p:txBody>
@@ -9468,7 +9609,7 @@
     </p:spTree>
     <p:extLst>
       <p:ext uri="{BB962C8B-B14F-4D97-AF65-F5344CB8AC3E}">
-        <p14:creationId xmlns:p14="http://schemas.microsoft.com/office/powerpoint/2010/main" val="4181808659"/>
+        <p14:creationId xmlns:p14="http://schemas.microsoft.com/office/powerpoint/2010/main" val="1572588499"/>
       </p:ext>
     </p:extLst>
   </p:cSld>
@@ -9483,7 +9624,13 @@
   <p:cSld>
     <p:spTree>
       <p:nvGrpSpPr>
-        <p:cNvPr id="1" name=""/>
+        <p:cNvPr id="1" name="">
+          <a:extLst>
+            <a:ext uri="{FF2B5EF4-FFF2-40B4-BE49-F238E27FC236}">
+              <a16:creationId xmlns:a16="http://schemas.microsoft.com/office/drawing/2014/main" id="{D42E8D20-BF67-1798-143B-C1B0A5B22BF8}"/>
+            </a:ext>
+          </a:extLst>
+        </p:cNvPr>
         <p:cNvGrpSpPr/>
         <p:nvPr/>
       </p:nvGrpSpPr>
@@ -9497,7 +9644,13 @@
       </p:grpSpPr>
       <p:sp>
         <p:nvSpPr>
-          <p:cNvPr id="2" name="Slide Image Placeholder 1"/>
+          <p:cNvPr id="2" name="Slide Image Placeholder 1">
+            <a:extLst>
+              <a:ext uri="{FF2B5EF4-FFF2-40B4-BE49-F238E27FC236}">
+                <a16:creationId xmlns:a16="http://schemas.microsoft.com/office/drawing/2014/main" id="{7AAAEF9A-5D92-F2C6-6C69-066ADB206371}"/>
+              </a:ext>
+            </a:extLst>
+          </p:cNvPr>
           <p:cNvSpPr>
             <a:spLocks noGrp="1" noRot="1" noChangeAspect="1"/>
           </p:cNvSpPr>
@@ -9509,7 +9662,13 @@
       </p:sp>
       <p:sp>
         <p:nvSpPr>
-          <p:cNvPr id="3" name="Notes Placeholder 2"/>
+          <p:cNvPr id="3" name="Notes Placeholder 2">
+            <a:extLst>
+              <a:ext uri="{FF2B5EF4-FFF2-40B4-BE49-F238E27FC236}">
+                <a16:creationId xmlns:a16="http://schemas.microsoft.com/office/drawing/2014/main" id="{91D0B2F5-44EA-A2E0-EE54-B5581083ACCC}"/>
+              </a:ext>
+            </a:extLst>
+          </p:cNvPr>
           <p:cNvSpPr>
             <a:spLocks noGrp="1"/>
           </p:cNvSpPr>
@@ -9524,22 +9683,20 @@
           <a:p>
             <a:r>
               <a:rPr lang="en-US" dirty="0"/>
-              <a:t>What are some problems with this? This graph is super easy to make in R – but it pays to take the </a:t>
-            </a:r>
-            <a:r>
-              <a:rPr lang="en-US" dirty="0" err="1"/>
-              <a:t>tmie</a:t>
-            </a:r>
-            <a:r>
-              <a:rPr lang="en-US" dirty="0"/>
-              <a:t> to clean it up. </a:t>
-            </a:r>
-          </a:p>
-        </p:txBody>
-      </p:sp>
-      <p:sp>
-        <p:nvSpPr>
-          <p:cNvPr id="4" name="Slide Number Placeholder 3"/>
+              <a:t>(skip this section if needed for time). Your figures and tables are valuable real estate! Treat them as such. </a:t>
+            </a:r>
+          </a:p>
+        </p:txBody>
+      </p:sp>
+      <p:sp>
+        <p:nvSpPr>
+          <p:cNvPr id="4" name="Slide Number Placeholder 3">
+            <a:extLst>
+              <a:ext uri="{FF2B5EF4-FFF2-40B4-BE49-F238E27FC236}">
+                <a16:creationId xmlns:a16="http://schemas.microsoft.com/office/drawing/2014/main" id="{ACD3FDC9-9FD8-CF73-A592-23A7F5AE7175}"/>
+              </a:ext>
+            </a:extLst>
+          </p:cNvPr>
           <p:cNvSpPr>
             <a:spLocks noGrp="1"/>
           </p:cNvSpPr>
@@ -9563,7 +9720,7 @@
     </p:spTree>
     <p:extLst>
       <p:ext uri="{BB962C8B-B14F-4D97-AF65-F5344CB8AC3E}">
-        <p14:creationId xmlns:p14="http://schemas.microsoft.com/office/powerpoint/2010/main" val="2852813994"/>
+        <p14:creationId xmlns:p14="http://schemas.microsoft.com/office/powerpoint/2010/main" val="2014053082"/>
       </p:ext>
     </p:extLst>
   </p:cSld>
@@ -9619,7 +9776,27 @@
           <a:p>
             <a:r>
               <a:rPr lang="en-US" dirty="0"/>
-              <a:t>How is this better/ What does it tell us about the paper without reading it? </a:t>
+              <a:t>Figures are </a:t>
+            </a:r>
+            <a:r>
+              <a:rPr lang="en-US" b="1" dirty="0"/>
+              <a:t>the most important thing </a:t>
+            </a:r>
+            <a:r>
+              <a:rPr lang="en-US" b="0" dirty="0"/>
+              <a:t>about a paper – no, really. I think this is why TWFE took off more than anything else – the figures. </a:t>
+            </a:r>
+            <a:r>
+              <a:rPr lang="en-US" dirty="0"/>
+              <a:t>Read this article in </a:t>
+            </a:r>
+            <a:r>
+              <a:rPr lang="en-US" dirty="0" err="1"/>
+              <a:t>Github</a:t>
+            </a:r>
+            <a:r>
+              <a:rPr lang="en-US" dirty="0"/>
+              <a:t> repo. How does the data viz stack up to some of these principles</a:t>
             </a:r>
           </a:p>
         </p:txBody>
@@ -9650,7 +9827,7 @@
     </p:spTree>
     <p:extLst>
       <p:ext uri="{BB962C8B-B14F-4D97-AF65-F5344CB8AC3E}">
-        <p14:creationId xmlns:p14="http://schemas.microsoft.com/office/powerpoint/2010/main" val="1183015076"/>
+        <p14:creationId xmlns:p14="http://schemas.microsoft.com/office/powerpoint/2010/main" val="4181808659"/>
       </p:ext>
     </p:extLst>
   </p:cSld>
@@ -9706,7 +9883,15 @@
           <a:p>
             <a:r>
               <a:rPr lang="en-US" dirty="0"/>
-              <a:t>This chart just doesn’t tell the story we want it to!</a:t>
+              <a:t>What are some problems with this? This graph is super easy to make in R – but it pays to take the </a:t>
+            </a:r>
+            <a:r>
+              <a:rPr lang="en-US" dirty="0" err="1"/>
+              <a:t>tmie</a:t>
+            </a:r>
+            <a:r>
+              <a:rPr lang="en-US" dirty="0"/>
+              <a:t> to clean it up. </a:t>
             </a:r>
           </a:p>
         </p:txBody>
@@ -9737,7 +9922,7 @@
     </p:spTree>
     <p:extLst>
       <p:ext uri="{BB962C8B-B14F-4D97-AF65-F5344CB8AC3E}">
-        <p14:creationId xmlns:p14="http://schemas.microsoft.com/office/powerpoint/2010/main" val="3487485327"/>
+        <p14:creationId xmlns:p14="http://schemas.microsoft.com/office/powerpoint/2010/main" val="2852813994"/>
       </p:ext>
     </p:extLst>
   </p:cSld>
@@ -9793,7 +9978,7 @@
           <a:p>
             <a:r>
               <a:rPr lang="en-US" dirty="0"/>
-              <a:t>Now what’s the takeaway? </a:t>
+              <a:t>How is this better/ What does it tell us about the paper without reading it? </a:t>
             </a:r>
           </a:p>
         </p:txBody>
@@ -9824,7 +10009,7 @@
     </p:spTree>
     <p:extLst>
       <p:ext uri="{BB962C8B-B14F-4D97-AF65-F5344CB8AC3E}">
-        <p14:creationId xmlns:p14="http://schemas.microsoft.com/office/powerpoint/2010/main" val="646126177"/>
+        <p14:creationId xmlns:p14="http://schemas.microsoft.com/office/powerpoint/2010/main" val="1183015076"/>
       </p:ext>
     </p:extLst>
   </p:cSld>
@@ -9880,13 +10065,7 @@
           <a:p>
             <a:r>
               <a:rPr lang="en-US" dirty="0"/>
-              <a:t>If there’s time, data storytelling ted talks (probably will have to skip). Start with #1 if time. </a:t>
-            </a:r>
-          </a:p>
-          <a:p>
-            <a:r>
-              <a:rPr lang="en-US" dirty="0"/>
-              <a:t>* Ideas should be simple, and you should focus on one. People think I do this, but really I do this (start at 6minutes)</a:t>
+              <a:t>This chart just doesn’t tell the story we want it to!</a:t>
             </a:r>
           </a:p>
         </p:txBody>
@@ -9917,7 +10096,7 @@
     </p:spTree>
     <p:extLst>
       <p:ext uri="{BB962C8B-B14F-4D97-AF65-F5344CB8AC3E}">
-        <p14:creationId xmlns:p14="http://schemas.microsoft.com/office/powerpoint/2010/main" val="3595373388"/>
+        <p14:creationId xmlns:p14="http://schemas.microsoft.com/office/powerpoint/2010/main" val="3487485327"/>
       </p:ext>
     </p:extLst>
   </p:cSld>
@@ -9973,7 +10152,7 @@
           <a:p>
             <a:r>
               <a:rPr lang="en-US" dirty="0"/>
-              <a:t>Follow the outlines! </a:t>
+              <a:t>Now what’s the takeaway? </a:t>
             </a:r>
           </a:p>
         </p:txBody>
@@ -10004,7 +10183,7 @@
     </p:spTree>
     <p:extLst>
       <p:ext uri="{BB962C8B-B14F-4D97-AF65-F5344CB8AC3E}">
-        <p14:creationId xmlns:p14="http://schemas.microsoft.com/office/powerpoint/2010/main" val="3569071865"/>
+        <p14:creationId xmlns:p14="http://schemas.microsoft.com/office/powerpoint/2010/main" val="646126177"/>
       </p:ext>
     </p:extLst>
   </p:cSld>
@@ -10171,7 +10350,13 @@
           <a:p>
             <a:r>
               <a:rPr lang="en-US" dirty="0"/>
-              <a:t>What’s more, just copy structures of papers you think are good (literally – table 1 does X, etc.) This both makes your writing better and makes it easier for reviewers. </a:t>
+              <a:t>If there’s time, data storytelling ted talks (probably will have to skip). Start with #1 if time. </a:t>
+            </a:r>
+          </a:p>
+          <a:p>
+            <a:r>
+              <a:rPr lang="en-US" dirty="0"/>
+              <a:t>* Ideas should be simple, and you should focus on one. People think I do this, but really I do this (start at 6minutes)</a:t>
             </a:r>
           </a:p>
         </p:txBody>
@@ -10194,6 +10379,180 @@
             <a:fld id="{4AF79E1B-2C51-4B9B-8EA4-26DE9E345AFF}" type="slidenum">
               <a:rPr lang="en-US" smtClean="0"/>
               <a:t>90</a:t>
+            </a:fld>
+            <a:endParaRPr lang="en-US"/>
+          </a:p>
+        </p:txBody>
+      </p:sp>
+    </p:spTree>
+    <p:extLst>
+      <p:ext uri="{BB962C8B-B14F-4D97-AF65-F5344CB8AC3E}">
+        <p14:creationId xmlns:p14="http://schemas.microsoft.com/office/powerpoint/2010/main" val="3595373388"/>
+      </p:ext>
+    </p:extLst>
+  </p:cSld>
+  <p:clrMapOvr>
+    <a:masterClrMapping/>
+  </p:clrMapOvr>
+</p:notes>
+</file>
+
+<file path=ppt/notesSlides/notesSlide91.xml><?xml version="1.0" encoding="utf-8"?>
+<p:notes xmlns:a="http://schemas.openxmlformats.org/drawingml/2006/main" xmlns:r="http://schemas.openxmlformats.org/officeDocument/2006/relationships" xmlns:p="http://schemas.openxmlformats.org/presentationml/2006/main">
+  <p:cSld>
+    <p:spTree>
+      <p:nvGrpSpPr>
+        <p:cNvPr id="1" name=""/>
+        <p:cNvGrpSpPr/>
+        <p:nvPr/>
+      </p:nvGrpSpPr>
+      <p:grpSpPr>
+        <a:xfrm>
+          <a:off x="0" y="0"/>
+          <a:ext cx="0" cy="0"/>
+          <a:chOff x="0" y="0"/>
+          <a:chExt cx="0" cy="0"/>
+        </a:xfrm>
+      </p:grpSpPr>
+      <p:sp>
+        <p:nvSpPr>
+          <p:cNvPr id="2" name="Slide Image Placeholder 1"/>
+          <p:cNvSpPr>
+            <a:spLocks noGrp="1" noRot="1" noChangeAspect="1"/>
+          </p:cNvSpPr>
+          <p:nvPr>
+            <p:ph type="sldImg"/>
+          </p:nvPr>
+        </p:nvSpPr>
+        <p:spPr/>
+      </p:sp>
+      <p:sp>
+        <p:nvSpPr>
+          <p:cNvPr id="3" name="Notes Placeholder 2"/>
+          <p:cNvSpPr>
+            <a:spLocks noGrp="1"/>
+          </p:cNvSpPr>
+          <p:nvPr>
+            <p:ph type="body" idx="1"/>
+          </p:nvPr>
+        </p:nvSpPr>
+        <p:spPr/>
+        <p:txBody>
+          <a:bodyPr/>
+          <a:lstStyle/>
+          <a:p>
+            <a:r>
+              <a:rPr lang="en-US" dirty="0"/>
+              <a:t>Follow the outlines! </a:t>
+            </a:r>
+          </a:p>
+        </p:txBody>
+      </p:sp>
+      <p:sp>
+        <p:nvSpPr>
+          <p:cNvPr id="4" name="Slide Number Placeholder 3"/>
+          <p:cNvSpPr>
+            <a:spLocks noGrp="1"/>
+          </p:cNvSpPr>
+          <p:nvPr>
+            <p:ph type="sldNum" sz="quarter" idx="5"/>
+          </p:nvPr>
+        </p:nvSpPr>
+        <p:spPr/>
+        <p:txBody>
+          <a:bodyPr/>
+          <a:lstStyle/>
+          <a:p>
+            <a:fld id="{4AF79E1B-2C51-4B9B-8EA4-26DE9E345AFF}" type="slidenum">
+              <a:rPr lang="en-US" smtClean="0"/>
+              <a:t>91</a:t>
+            </a:fld>
+            <a:endParaRPr lang="en-US"/>
+          </a:p>
+        </p:txBody>
+      </p:sp>
+    </p:spTree>
+    <p:extLst>
+      <p:ext uri="{BB962C8B-B14F-4D97-AF65-F5344CB8AC3E}">
+        <p14:creationId xmlns:p14="http://schemas.microsoft.com/office/powerpoint/2010/main" val="3569071865"/>
+      </p:ext>
+    </p:extLst>
+  </p:cSld>
+  <p:clrMapOvr>
+    <a:masterClrMapping/>
+  </p:clrMapOvr>
+</p:notes>
+</file>
+
+<file path=ppt/notesSlides/notesSlide92.xml><?xml version="1.0" encoding="utf-8"?>
+<p:notes xmlns:a="http://schemas.openxmlformats.org/drawingml/2006/main" xmlns:r="http://schemas.openxmlformats.org/officeDocument/2006/relationships" xmlns:p="http://schemas.openxmlformats.org/presentationml/2006/main">
+  <p:cSld>
+    <p:spTree>
+      <p:nvGrpSpPr>
+        <p:cNvPr id="1" name=""/>
+        <p:cNvGrpSpPr/>
+        <p:nvPr/>
+      </p:nvGrpSpPr>
+      <p:grpSpPr>
+        <a:xfrm>
+          <a:off x="0" y="0"/>
+          <a:ext cx="0" cy="0"/>
+          <a:chOff x="0" y="0"/>
+          <a:chExt cx="0" cy="0"/>
+        </a:xfrm>
+      </p:grpSpPr>
+      <p:sp>
+        <p:nvSpPr>
+          <p:cNvPr id="2" name="Slide Image Placeholder 1"/>
+          <p:cNvSpPr>
+            <a:spLocks noGrp="1" noRot="1" noChangeAspect="1"/>
+          </p:cNvSpPr>
+          <p:nvPr>
+            <p:ph type="sldImg"/>
+          </p:nvPr>
+        </p:nvSpPr>
+        <p:spPr/>
+      </p:sp>
+      <p:sp>
+        <p:nvSpPr>
+          <p:cNvPr id="3" name="Notes Placeholder 2"/>
+          <p:cNvSpPr>
+            <a:spLocks noGrp="1"/>
+          </p:cNvSpPr>
+          <p:nvPr>
+            <p:ph type="body" idx="1"/>
+          </p:nvPr>
+        </p:nvSpPr>
+        <p:spPr/>
+        <p:txBody>
+          <a:bodyPr/>
+          <a:lstStyle/>
+          <a:p>
+            <a:r>
+              <a:rPr lang="en-US" dirty="0"/>
+              <a:t>What’s more, just copy structures of papers you think are good (literally – table 1 does X, etc.) This both makes your writing better and makes it easier for reviewers. </a:t>
+            </a:r>
+          </a:p>
+        </p:txBody>
+      </p:sp>
+      <p:sp>
+        <p:nvSpPr>
+          <p:cNvPr id="4" name="Slide Number Placeholder 3"/>
+          <p:cNvSpPr>
+            <a:spLocks noGrp="1"/>
+          </p:cNvSpPr>
+          <p:nvPr>
+            <p:ph type="sldNum" sz="quarter" idx="5"/>
+          </p:nvPr>
+        </p:nvSpPr>
+        <p:spPr/>
+        <p:txBody>
+          <a:bodyPr/>
+          <a:lstStyle/>
+          <a:p>
+            <a:fld id="{4AF79E1B-2C51-4B9B-8EA4-26DE9E345AFF}" type="slidenum">
+              <a:rPr lang="en-US" smtClean="0"/>
+              <a:t>92</a:t>
             </a:fld>
             <a:endParaRPr lang="en-US"/>
           </a:p>
@@ -10381,7 +10740,7 @@
             <a:fld id="{0972D05C-DCFB-4BB6-B49C-AC126BF3ED2C}" type="datetimeFigureOut">
               <a:rPr lang="en-US" smtClean="0"/>
               <a:pPr/>
-              <a:t>7/22/2026</a:t>
+              <a:t>10/16/2026</a:t>
             </a:fld>
             <a:endParaRPr lang="en-US"/>
           </a:p>
@@ -10618,7 +10977,7 @@
             <a:fld id="{0972D05C-DCFB-4BB6-B49C-AC126BF3ED2C}" type="datetimeFigureOut">
               <a:rPr lang="en-US" smtClean="0"/>
               <a:pPr/>
-              <a:t>7/22/2026</a:t>
+              <a:t>10/16/2026</a:t>
             </a:fld>
             <a:endParaRPr lang="en-US"/>
           </a:p>
@@ -10800,7 +11159,7 @@
             <a:fld id="{0972D05C-DCFB-4BB6-B49C-AC126BF3ED2C}" type="datetimeFigureOut">
               <a:rPr lang="en-US" smtClean="0"/>
               <a:pPr/>
-              <a:t>7/22/2026</a:t>
+              <a:t>10/16/2026</a:t>
             </a:fld>
             <a:endParaRPr lang="en-US"/>
           </a:p>
@@ -10972,7 +11331,7 @@
             <a:fld id="{0972D05C-DCFB-4BB6-B49C-AC126BF3ED2C}" type="datetimeFigureOut">
               <a:rPr lang="en-US" smtClean="0"/>
               <a:pPr/>
-              <a:t>7/22/2026</a:t>
+              <a:t>10/16/2026</a:t>
             </a:fld>
             <a:endParaRPr lang="en-US"/>
           </a:p>
@@ -11228,7 +11587,7 @@
             <a:fld id="{0972D05C-DCFB-4BB6-B49C-AC126BF3ED2C}" type="datetimeFigureOut">
               <a:rPr lang="en-US" smtClean="0"/>
               <a:pPr/>
-              <a:t>7/22/2026</a:t>
+              <a:t>10/16/2026</a:t>
             </a:fld>
             <a:endParaRPr lang="en-US"/>
           </a:p>
@@ -11556,7 +11915,7 @@
             <a:fld id="{0972D05C-DCFB-4BB6-B49C-AC126BF3ED2C}" type="datetimeFigureOut">
               <a:rPr lang="en-US" smtClean="0"/>
               <a:pPr/>
-              <a:t>7/22/2026</a:t>
+              <a:t>10/16/2026</a:t>
             </a:fld>
             <a:endParaRPr lang="en-US"/>
           </a:p>
@@ -12009,7 +12368,7 @@
             <a:fld id="{0972D05C-DCFB-4BB6-B49C-AC126BF3ED2C}" type="datetimeFigureOut">
               <a:rPr lang="en-US" smtClean="0"/>
               <a:pPr/>
-              <a:t>7/22/2026</a:t>
+              <a:t>10/16/2026</a:t>
             </a:fld>
             <a:endParaRPr lang="en-US"/>
           </a:p>
@@ -12129,7 +12488,7 @@
             <a:fld id="{0972D05C-DCFB-4BB6-B49C-AC126BF3ED2C}" type="datetimeFigureOut">
               <a:rPr lang="en-US" smtClean="0"/>
               <a:pPr/>
-              <a:t>7/22/2026</a:t>
+              <a:t>10/16/2026</a:t>
             </a:fld>
             <a:endParaRPr lang="en-US"/>
           </a:p>
@@ -12226,7 +12585,7 @@
             <a:fld id="{0972D05C-DCFB-4BB6-B49C-AC126BF3ED2C}" type="datetimeFigureOut">
               <a:rPr lang="en-US" smtClean="0"/>
               <a:pPr/>
-              <a:t>7/22/2026</a:t>
+              <a:t>10/16/2026</a:t>
             </a:fld>
             <a:endParaRPr lang="en-US"/>
           </a:p>
@@ -12515,7 +12874,7 @@
             <a:fld id="{0972D05C-DCFB-4BB6-B49C-AC126BF3ED2C}" type="datetimeFigureOut">
               <a:rPr lang="en-US" smtClean="0"/>
               <a:pPr/>
-              <a:t>7/22/2026</a:t>
+              <a:t>10/16/2026</a:t>
             </a:fld>
             <a:endParaRPr lang="en-US"/>
           </a:p>
@@ -12839,7 +13198,7 @@
             <a:fld id="{0972D05C-DCFB-4BB6-B49C-AC126BF3ED2C}" type="datetimeFigureOut">
               <a:rPr lang="en-US" smtClean="0"/>
               <a:pPr/>
-              <a:t>7/22/2026</a:t>
+              <a:t>10/16/2026</a:t>
             </a:fld>
             <a:endParaRPr lang="en-US"/>
           </a:p>
@@ -13101,7 +13460,7 @@
             <a:fld id="{0972D05C-DCFB-4BB6-B49C-AC126BF3ED2C}" type="datetimeFigureOut">
               <a:rPr lang="en-US" smtClean="0"/>
               <a:pPr/>
-              <a:t>7/22/2026</a:t>
+              <a:t>10/16/2026</a:t>
             </a:fld>
             <a:endParaRPr lang="en-US" dirty="0"/>
           </a:p>
@@ -28468,15 +28827,6 @@
             <a:pPr marL="457200" indent="-457200">
               <a:buAutoNum type="arabicPeriod"/>
             </a:pPr>
-            <a:r>
-              <a:rPr lang="en-US" sz="2400" dirty="0"/>
-              <a:t> </a:t>
-            </a:r>
-          </a:p>
-          <a:p>
-            <a:pPr marL="457200" indent="-457200">
-              <a:buAutoNum type="arabicPeriod"/>
-            </a:pPr>
             <a:endParaRPr lang="en-US" sz="2400" dirty="0"/>
           </a:p>
         </p:txBody>
@@ -28495,6 +28845,387 @@
 </file>
 
 <file path=ppt/slides/slide66.xml><?xml version="1.0" encoding="utf-8"?>
+<p:sld xmlns:a="http://schemas.openxmlformats.org/drawingml/2006/main" xmlns:r="http://schemas.openxmlformats.org/officeDocument/2006/relationships" xmlns:p="http://schemas.openxmlformats.org/presentationml/2006/main">
+  <p:cSld>
+    <p:spTree>
+      <p:nvGrpSpPr>
+        <p:cNvPr id="1" name="">
+          <a:extLst>
+            <a:ext uri="{FF2B5EF4-FFF2-40B4-BE49-F238E27FC236}">
+              <a16:creationId xmlns:a16="http://schemas.microsoft.com/office/drawing/2014/main" id="{18895C7E-DED7-6BCF-36CA-4232E4A9588E}"/>
+            </a:ext>
+          </a:extLst>
+        </p:cNvPr>
+        <p:cNvGrpSpPr/>
+        <p:nvPr/>
+      </p:nvGrpSpPr>
+      <p:grpSpPr>
+        <a:xfrm>
+          <a:off x="0" y="0"/>
+          <a:ext cx="0" cy="0"/>
+          <a:chOff x="0" y="0"/>
+          <a:chExt cx="0" cy="0"/>
+        </a:xfrm>
+      </p:grpSpPr>
+      <p:sp>
+        <p:nvSpPr>
+          <p:cNvPr id="2" name="Title 1">
+            <a:extLst>
+              <a:ext uri="{FF2B5EF4-FFF2-40B4-BE49-F238E27FC236}">
+                <a16:creationId xmlns:a16="http://schemas.microsoft.com/office/drawing/2014/main" id="{69702F8D-E40C-5E73-663B-D0195C392ED8}"/>
+              </a:ext>
+            </a:extLst>
+          </p:cNvPr>
+          <p:cNvSpPr>
+            <a:spLocks noGrp="1"/>
+          </p:cNvSpPr>
+          <p:nvPr>
+            <p:ph type="title"/>
+          </p:nvPr>
+        </p:nvSpPr>
+        <p:spPr>
+          <a:xfrm>
+            <a:off x="609600" y="337392"/>
+            <a:ext cx="10439400" cy="624840"/>
+          </a:xfrm>
+        </p:spPr>
+        <p:txBody>
+          <a:bodyPr>
+            <a:noAutofit/>
+          </a:bodyPr>
+          <a:lstStyle/>
+          <a:p>
+            <a:r>
+              <a:rPr lang="en-US" sz="3600" dirty="0">
+                <a:cs typeface="Times New Roman" panose="02020603050405020304" pitchFamily="18" charset="0"/>
+              </a:rPr>
+              <a:t>Case study: Cancer Screening and Diagnoses</a:t>
+            </a:r>
+            <a:endParaRPr lang="en-US" sz="3600" dirty="0">
+              <a:latin typeface="Times New Roman" panose="02020603050405020304" pitchFamily="18" charset="0"/>
+              <a:cs typeface="Times New Roman" panose="02020603050405020304" pitchFamily="18" charset="0"/>
+            </a:endParaRPr>
+          </a:p>
+        </p:txBody>
+      </p:sp>
+      <p:sp>
+        <p:nvSpPr>
+          <p:cNvPr id="5" name="Content Placeholder 4">
+            <a:extLst>
+              <a:ext uri="{FF2B5EF4-FFF2-40B4-BE49-F238E27FC236}">
+                <a16:creationId xmlns:a16="http://schemas.microsoft.com/office/drawing/2014/main" id="{325BCA54-0C23-FA90-9BB4-1ACD8EFAA121}"/>
+              </a:ext>
+            </a:extLst>
+          </p:cNvPr>
+          <p:cNvSpPr>
+            <a:spLocks noGrp="1"/>
+          </p:cNvSpPr>
+          <p:nvPr>
+            <p:ph idx="1"/>
+          </p:nvPr>
+        </p:nvSpPr>
+        <p:spPr>
+          <a:xfrm>
+            <a:off x="762000" y="962232"/>
+            <a:ext cx="9982200" cy="5217905"/>
+          </a:xfrm>
+        </p:spPr>
+        <p:txBody>
+          <a:bodyPr>
+            <a:normAutofit/>
+          </a:bodyPr>
+          <a:lstStyle/>
+          <a:p>
+            <a:pPr marL="0" indent="0">
+              <a:buNone/>
+            </a:pPr>
+            <a:r>
+              <a:rPr lang="en-US" sz="2400" dirty="0"/>
+              <a:t>Cancer screening is a surprisingly hot topic! </a:t>
+            </a:r>
+          </a:p>
+          <a:p>
+            <a:pPr marL="0" indent="0">
+              <a:buNone/>
+            </a:pPr>
+            <a:r>
+              <a:rPr lang="en-US" sz="2400" dirty="0"/>
+              <a:t>For our case study, can you give me: </a:t>
+            </a:r>
+          </a:p>
+          <a:p>
+            <a:pPr marL="457200" indent="-457200">
+              <a:buAutoNum type="arabicPeriod"/>
+            </a:pPr>
+            <a:r>
+              <a:rPr lang="en-US" sz="2400" dirty="0"/>
+              <a:t>The motivation – why do we need this study? </a:t>
+            </a:r>
+          </a:p>
+          <a:p>
+            <a:pPr marL="457200" indent="-457200">
+              <a:buAutoNum type="arabicPeriod"/>
+            </a:pPr>
+            <a:r>
+              <a:rPr lang="en-US" sz="2400" dirty="0"/>
+              <a:t>The observational component – why can’t this be a clinical trial?</a:t>
+            </a:r>
+          </a:p>
+          <a:p>
+            <a:pPr marL="457200" indent="-457200">
+              <a:buAutoNum type="arabicPeriod"/>
+            </a:pPr>
+            <a:r>
+              <a:rPr lang="en-US" sz="2400" dirty="0"/>
+              <a:t>The simple design – why does this fail? Why do we need something like a TTE? </a:t>
+            </a:r>
+          </a:p>
+          <a:p>
+            <a:pPr marL="457200" indent="-457200">
+              <a:buAutoNum type="arabicPeriod"/>
+            </a:pPr>
+            <a:endParaRPr lang="en-US" sz="2400" dirty="0"/>
+          </a:p>
+        </p:txBody>
+      </p:sp>
+      <p:sp>
+        <p:nvSpPr>
+          <p:cNvPr id="3" name="TextBox 2">
+            <a:extLst>
+              <a:ext uri="{FF2B5EF4-FFF2-40B4-BE49-F238E27FC236}">
+                <a16:creationId xmlns:a16="http://schemas.microsoft.com/office/drawing/2014/main" id="{F62F48FC-57C4-9580-4768-A949D2C4FC49}"/>
+              </a:ext>
+            </a:extLst>
+          </p:cNvPr>
+          <p:cNvSpPr txBox="1"/>
+          <p:nvPr/>
+        </p:nvSpPr>
+        <p:spPr>
+          <a:xfrm>
+            <a:off x="1600200" y="4038600"/>
+            <a:ext cx="9525000" cy="2585323"/>
+          </a:xfrm>
+          <a:prstGeom prst="rect">
+            <a:avLst/>
+          </a:prstGeom>
+          <a:solidFill>
+            <a:schemeClr val="accent2"/>
+          </a:solidFill>
+        </p:spPr>
+        <p:txBody>
+          <a:bodyPr wrap="square" rtlCol="0">
+            <a:spAutoFit/>
+          </a:bodyPr>
+          <a:lstStyle/>
+          <a:p>
+            <a:r>
+              <a:rPr lang="en-US" dirty="0">
+                <a:solidFill>
+                  <a:schemeClr val="bg1"/>
+                </a:solidFill>
+              </a:rPr>
+              <a:t>3 simpler designs: </a:t>
+            </a:r>
+          </a:p>
+          <a:p>
+            <a:pPr marL="342900" indent="-342900">
+              <a:buAutoNum type="arabicPeriod"/>
+            </a:pPr>
+            <a:r>
+              <a:rPr lang="en-US" b="1" u="sng" dirty="0">
+                <a:solidFill>
+                  <a:schemeClr val="bg1"/>
+                </a:solidFill>
+              </a:rPr>
+              <a:t>Just look at time 0 for everyone</a:t>
+            </a:r>
+            <a:r>
+              <a:rPr lang="en-US" dirty="0">
+                <a:solidFill>
+                  <a:schemeClr val="bg1"/>
+                </a:solidFill>
+              </a:rPr>
+              <a:t> – this works, but doesn’t use enough information (limited power).</a:t>
+            </a:r>
+          </a:p>
+          <a:p>
+            <a:pPr marL="342900" indent="-342900">
+              <a:buAutoNum type="arabicPeriod"/>
+            </a:pPr>
+            <a:r>
+              <a:rPr lang="en-US" b="1" u="sng" dirty="0">
+                <a:solidFill>
+                  <a:schemeClr val="bg1"/>
+                </a:solidFill>
+              </a:rPr>
+              <a:t>Treatment at time 0, but control group for the entire duration of eligibility</a:t>
+            </a:r>
+            <a:r>
+              <a:rPr lang="en-US" dirty="0">
+                <a:solidFill>
+                  <a:schemeClr val="bg1"/>
+                </a:solidFill>
+              </a:rPr>
+              <a:t> – this introduces selection on the treatment! Who does it exclude from the treatment group? What is the direction of the bias?  </a:t>
+            </a:r>
+          </a:p>
+          <a:p>
+            <a:pPr marL="342900" indent="-342900">
+              <a:buAutoNum type="arabicPeriod"/>
+            </a:pPr>
+            <a:r>
+              <a:rPr lang="en-US" b="1" u="sng" dirty="0">
+                <a:solidFill>
+                  <a:schemeClr val="bg1"/>
+                </a:solidFill>
+              </a:rPr>
+              <a:t>Treatment before time 0, control group at time 0</a:t>
+            </a:r>
+            <a:r>
+              <a:rPr lang="en-US" dirty="0">
+                <a:solidFill>
+                  <a:schemeClr val="bg1"/>
+                </a:solidFill>
+              </a:rPr>
+              <a:t> – based on an arbitrary time 0 but then allowing free selection into/out of treatment. Who is excluded now? </a:t>
+            </a:r>
+          </a:p>
+          <a:p>
+            <a:pPr marL="342900" indent="-342900">
+              <a:buAutoNum type="arabicPeriod"/>
+            </a:pPr>
+            <a:endParaRPr lang="en-US" dirty="0">
+              <a:solidFill>
+                <a:schemeClr val="bg1"/>
+              </a:solidFill>
+            </a:endParaRPr>
+          </a:p>
+        </p:txBody>
+      </p:sp>
+    </p:spTree>
+    <p:extLst>
+      <p:ext uri="{BB962C8B-B14F-4D97-AF65-F5344CB8AC3E}">
+        <p14:creationId xmlns:p14="http://schemas.microsoft.com/office/powerpoint/2010/main" val="3691417995"/>
+      </p:ext>
+    </p:extLst>
+  </p:cSld>
+  <p:clrMapOvr>
+    <a:masterClrMapping/>
+  </p:clrMapOvr>
+</p:sld>
+</file>
+
+<file path=ppt/slides/slide67.xml><?xml version="1.0" encoding="utf-8"?>
+<p:sld xmlns:a="http://schemas.openxmlformats.org/drawingml/2006/main" xmlns:r="http://schemas.openxmlformats.org/officeDocument/2006/relationships" xmlns:p="http://schemas.openxmlformats.org/presentationml/2006/main">
+  <p:cSld>
+    <p:spTree>
+      <p:nvGrpSpPr>
+        <p:cNvPr id="1" name=""/>
+        <p:cNvGrpSpPr/>
+        <p:nvPr/>
+      </p:nvGrpSpPr>
+      <p:grpSpPr>
+        <a:xfrm>
+          <a:off x="0" y="0"/>
+          <a:ext cx="0" cy="0"/>
+          <a:chOff x="0" y="0"/>
+          <a:chExt cx="0" cy="0"/>
+        </a:xfrm>
+      </p:grpSpPr>
+      <p:sp>
+        <p:nvSpPr>
+          <p:cNvPr id="2" name="Title 1">
+            <a:extLst>
+              <a:ext uri="{FF2B5EF4-FFF2-40B4-BE49-F238E27FC236}">
+                <a16:creationId xmlns:a16="http://schemas.microsoft.com/office/drawing/2014/main" id="{09D8999A-516D-AD76-AE65-F0006DD0791F}"/>
+              </a:ext>
+            </a:extLst>
+          </p:cNvPr>
+          <p:cNvSpPr>
+            <a:spLocks noGrp="1"/>
+          </p:cNvSpPr>
+          <p:nvPr>
+            <p:ph type="title"/>
+          </p:nvPr>
+        </p:nvSpPr>
+        <p:spPr/>
+        <p:txBody>
+          <a:bodyPr/>
+          <a:lstStyle/>
+          <a:p>
+            <a:endParaRPr lang="en-US"/>
+          </a:p>
+        </p:txBody>
+      </p:sp>
+      <p:sp>
+        <p:nvSpPr>
+          <p:cNvPr id="3" name="Content Placeholder 2">
+            <a:extLst>
+              <a:ext uri="{FF2B5EF4-FFF2-40B4-BE49-F238E27FC236}">
+                <a16:creationId xmlns:a16="http://schemas.microsoft.com/office/drawing/2014/main" id="{C97D0FA3-3C5A-2D50-DE52-7740744F8649}"/>
+              </a:ext>
+            </a:extLst>
+          </p:cNvPr>
+          <p:cNvSpPr>
+            <a:spLocks noGrp="1"/>
+          </p:cNvSpPr>
+          <p:nvPr>
+            <p:ph idx="1"/>
+          </p:nvPr>
+        </p:nvSpPr>
+        <p:spPr/>
+        <p:txBody>
+          <a:bodyPr/>
+          <a:lstStyle/>
+          <a:p>
+            <a:endParaRPr lang="en-US" dirty="0"/>
+          </a:p>
+        </p:txBody>
+      </p:sp>
+      <p:pic>
+        <p:nvPicPr>
+          <p:cNvPr id="5" name="Picture 4">
+            <a:extLst>
+              <a:ext uri="{FF2B5EF4-FFF2-40B4-BE49-F238E27FC236}">
+                <a16:creationId xmlns:a16="http://schemas.microsoft.com/office/drawing/2014/main" id="{1CD4C642-584C-9FC2-C2B7-8300802AF3D5}"/>
+              </a:ext>
+            </a:extLst>
+          </p:cNvPr>
+          <p:cNvPicPr>
+            <a:picLocks noChangeAspect="1"/>
+          </p:cNvPicPr>
+          <p:nvPr/>
+        </p:nvPicPr>
+        <p:blipFill>
+          <a:blip r:embed="rId3"/>
+          <a:stretch>
+            <a:fillRect/>
+          </a:stretch>
+        </p:blipFill>
+        <p:spPr>
+          <a:xfrm>
+            <a:off x="201058" y="152400"/>
+            <a:ext cx="6675680" cy="6477000"/>
+          </a:xfrm>
+          <a:prstGeom prst="rect">
+            <a:avLst/>
+          </a:prstGeom>
+        </p:spPr>
+      </p:pic>
+    </p:spTree>
+    <p:extLst>
+      <p:ext uri="{BB962C8B-B14F-4D97-AF65-F5344CB8AC3E}">
+        <p14:creationId xmlns:p14="http://schemas.microsoft.com/office/powerpoint/2010/main" val="2628900068"/>
+      </p:ext>
+    </p:extLst>
+  </p:cSld>
+  <p:clrMapOvr>
+    <a:masterClrMapping/>
+  </p:clrMapOvr>
+</p:sld>
+</file>
+
+<file path=ppt/slides/slide68.xml><?xml version="1.0" encoding="utf-8"?>
 <p:sld xmlns:a="http://schemas.openxmlformats.org/drawingml/2006/main" xmlns:r="http://schemas.openxmlformats.org/officeDocument/2006/relationships" xmlns:p="http://schemas.openxmlformats.org/presentationml/2006/main">
   <p:cSld>
     <p:spTree>
@@ -28604,7 +29335,7 @@
 </p:sld>
 </file>
 
-<file path=ppt/slides/slide67.xml><?xml version="1.0" encoding="utf-8"?>
+<file path=ppt/slides/slide69.xml><?xml version="1.0" encoding="utf-8"?>
 <p:sld xmlns:a="http://schemas.openxmlformats.org/drawingml/2006/main" xmlns:r="http://schemas.openxmlformats.org/officeDocument/2006/relationships" xmlns:p="http://schemas.openxmlformats.org/presentationml/2006/main">
   <p:cSld>
     <p:spTree>
@@ -28735,306 +29466,6 @@
     <p:extLst>
       <p:ext uri="{BB962C8B-B14F-4D97-AF65-F5344CB8AC3E}">
         <p14:creationId xmlns:p14="http://schemas.microsoft.com/office/powerpoint/2010/main" val="946344103"/>
-      </p:ext>
-    </p:extLst>
-  </p:cSld>
-  <p:clrMapOvr>
-    <a:masterClrMapping/>
-  </p:clrMapOvr>
-</p:sld>
-</file>
-
-<file path=ppt/slides/slide68.xml><?xml version="1.0" encoding="utf-8"?>
-<p:sld xmlns:a="http://schemas.openxmlformats.org/drawingml/2006/main" xmlns:r="http://schemas.openxmlformats.org/officeDocument/2006/relationships" xmlns:p="http://schemas.openxmlformats.org/presentationml/2006/main">
-  <p:cSld>
-    <p:spTree>
-      <p:nvGrpSpPr>
-        <p:cNvPr id="1" name="">
-          <a:extLst>
-            <a:ext uri="{FF2B5EF4-FFF2-40B4-BE49-F238E27FC236}">
-              <a16:creationId xmlns:a16="http://schemas.microsoft.com/office/drawing/2014/main" id="{FC4DF8AD-069A-4F9C-F988-5F1B2FE2913C}"/>
-            </a:ext>
-          </a:extLst>
-        </p:cNvPr>
-        <p:cNvGrpSpPr/>
-        <p:nvPr/>
-      </p:nvGrpSpPr>
-      <p:grpSpPr>
-        <a:xfrm>
-          <a:off x="0" y="0"/>
-          <a:ext cx="0" cy="0"/>
-          <a:chOff x="0" y="0"/>
-          <a:chExt cx="0" cy="0"/>
-        </a:xfrm>
-      </p:grpSpPr>
-      <p:sp>
-        <p:nvSpPr>
-          <p:cNvPr id="2" name="Title 1">
-            <a:extLst>
-              <a:ext uri="{FF2B5EF4-FFF2-40B4-BE49-F238E27FC236}">
-                <a16:creationId xmlns:a16="http://schemas.microsoft.com/office/drawing/2014/main" id="{A203D0EE-5F5A-066A-EC7D-4AE5C4E3B54E}"/>
-              </a:ext>
-            </a:extLst>
-          </p:cNvPr>
-          <p:cNvSpPr>
-            <a:spLocks noGrp="1"/>
-          </p:cNvSpPr>
-          <p:nvPr>
-            <p:ph type="ctrTitle"/>
-          </p:nvPr>
-        </p:nvSpPr>
-        <p:spPr>
-          <a:xfrm>
-            <a:off x="1261872" y="758952"/>
-            <a:ext cx="10549128" cy="4041648"/>
-          </a:xfrm>
-        </p:spPr>
-        <p:txBody>
-          <a:bodyPr/>
-          <a:lstStyle/>
-          <a:p>
-            <a:r>
-              <a:rPr lang="en-US" dirty="0"/>
-              <a:t>Conclusion</a:t>
-            </a:r>
-          </a:p>
-        </p:txBody>
-      </p:sp>
-      <p:sp>
-        <p:nvSpPr>
-          <p:cNvPr id="3" name="Subtitle 2">
-            <a:extLst>
-              <a:ext uri="{FF2B5EF4-FFF2-40B4-BE49-F238E27FC236}">
-                <a16:creationId xmlns:a16="http://schemas.microsoft.com/office/drawing/2014/main" id="{DA767F5D-2082-3A1C-315D-4C0306A835E8}"/>
-              </a:ext>
-            </a:extLst>
-          </p:cNvPr>
-          <p:cNvSpPr>
-            <a:spLocks noGrp="1"/>
-          </p:cNvSpPr>
-          <p:nvPr>
-            <p:ph type="subTitle" idx="1"/>
-          </p:nvPr>
-        </p:nvSpPr>
-        <p:spPr/>
-        <p:txBody>
-          <a:bodyPr>
-            <a:normAutofit/>
-          </a:bodyPr>
-          <a:lstStyle/>
-          <a:p>
-            <a:endParaRPr lang="en-US" sz="4400" dirty="0"/>
-          </a:p>
-        </p:txBody>
-      </p:sp>
-    </p:spTree>
-    <p:extLst>
-      <p:ext uri="{BB962C8B-B14F-4D97-AF65-F5344CB8AC3E}">
-        <p14:creationId xmlns:p14="http://schemas.microsoft.com/office/powerpoint/2010/main" val="3572315359"/>
-      </p:ext>
-    </p:extLst>
-  </p:cSld>
-  <p:clrMapOvr>
-    <a:masterClrMapping/>
-  </p:clrMapOvr>
-</p:sld>
-</file>
-
-<file path=ppt/slides/slide69.xml><?xml version="1.0" encoding="utf-8"?>
-<p:sld xmlns:a="http://schemas.openxmlformats.org/drawingml/2006/main" xmlns:r="http://schemas.openxmlformats.org/officeDocument/2006/relationships" xmlns:p="http://schemas.openxmlformats.org/presentationml/2006/main">
-  <p:cSld>
-    <p:spTree>
-      <p:nvGrpSpPr>
-        <p:cNvPr id="1" name=""/>
-        <p:cNvGrpSpPr/>
-        <p:nvPr/>
-      </p:nvGrpSpPr>
-      <p:grpSpPr>
-        <a:xfrm>
-          <a:off x="0" y="0"/>
-          <a:ext cx="0" cy="0"/>
-          <a:chOff x="0" y="0"/>
-          <a:chExt cx="0" cy="0"/>
-        </a:xfrm>
-      </p:grpSpPr>
-      <p:sp>
-        <p:nvSpPr>
-          <p:cNvPr id="2" name="Title 1"/>
-          <p:cNvSpPr>
-            <a:spLocks noGrp="1"/>
-          </p:cNvSpPr>
-          <p:nvPr>
-            <p:ph type="title"/>
-          </p:nvPr>
-        </p:nvSpPr>
-        <p:spPr>
-          <a:xfrm>
-            <a:off x="609600" y="337392"/>
-            <a:ext cx="10439400" cy="624840"/>
-          </a:xfrm>
-        </p:spPr>
-        <p:txBody>
-          <a:bodyPr>
-            <a:noAutofit/>
-          </a:bodyPr>
-          <a:lstStyle/>
-          <a:p>
-            <a:r>
-              <a:rPr lang="en-US" sz="3600" dirty="0">
-                <a:cs typeface="Times New Roman" panose="02020603050405020304" pitchFamily="18" charset="0"/>
-              </a:rPr>
-              <a:t>So where do you find questions? </a:t>
-            </a:r>
-            <a:endParaRPr lang="en-US" sz="3600" dirty="0">
-              <a:latin typeface="Times New Roman" panose="02020603050405020304" pitchFamily="18" charset="0"/>
-              <a:cs typeface="Times New Roman" panose="02020603050405020304" pitchFamily="18" charset="0"/>
-            </a:endParaRPr>
-          </a:p>
-        </p:txBody>
-      </p:sp>
-      <p:sp>
-        <p:nvSpPr>
-          <p:cNvPr id="3" name="Content Placeholder 2"/>
-          <p:cNvSpPr>
-            <a:spLocks noGrp="1"/>
-          </p:cNvSpPr>
-          <p:nvPr>
-            <p:ph idx="1"/>
-          </p:nvPr>
-        </p:nvSpPr>
-        <p:spPr>
-          <a:xfrm>
-            <a:off x="609600" y="1066801"/>
-            <a:ext cx="10363199" cy="5141388"/>
-          </a:xfrm>
-        </p:spPr>
-        <p:txBody>
-          <a:bodyPr>
-            <a:noAutofit/>
-          </a:bodyPr>
-          <a:lstStyle/>
-          <a:p>
-            <a:r>
-              <a:rPr lang="en-US" sz="2800" dirty="0">
-                <a:cs typeface="Times New Roman" panose="02020603050405020304" pitchFamily="18" charset="0"/>
-              </a:rPr>
-              <a:t>Reading papers is a good start, but not everything! </a:t>
-            </a:r>
-          </a:p>
-          <a:p>
-            <a:pPr lvl="1"/>
-            <a:r>
-              <a:rPr lang="en-US" sz="2600" dirty="0">
-                <a:cs typeface="Times New Roman" panose="02020603050405020304" pitchFamily="18" charset="0"/>
-              </a:rPr>
-              <a:t>You don’t want to get caught in an echo chamber</a:t>
-            </a:r>
-          </a:p>
-          <a:p>
-            <a:r>
-              <a:rPr lang="en-US" sz="2800" dirty="0">
-                <a:cs typeface="Times New Roman" panose="02020603050405020304" pitchFamily="18" charset="0"/>
-              </a:rPr>
-              <a:t>Come to seminars! </a:t>
-            </a:r>
-          </a:p>
-          <a:p>
-            <a:pPr lvl="1"/>
-            <a:r>
-              <a:rPr lang="en-US" sz="2600" dirty="0">
-                <a:cs typeface="Times New Roman" panose="02020603050405020304" pitchFamily="18" charset="0"/>
-              </a:rPr>
-              <a:t>Go see the big names when they come in (look at other departments too)</a:t>
-            </a:r>
-          </a:p>
-          <a:p>
-            <a:pPr lvl="1"/>
-            <a:r>
-              <a:rPr lang="en-US" sz="2600" dirty="0">
-                <a:cs typeface="Times New Roman" panose="02020603050405020304" pitchFamily="18" charset="0"/>
-              </a:rPr>
-              <a:t>But also go see the works in progress, what your peers are working on, your faculty, etc. </a:t>
-            </a:r>
-          </a:p>
-          <a:p>
-            <a:pPr lvl="1"/>
-            <a:r>
-              <a:rPr lang="en-US" sz="2600" dirty="0">
-                <a:cs typeface="Times New Roman" panose="02020603050405020304" pitchFamily="18" charset="0"/>
-              </a:rPr>
-              <a:t>Try to go to talks outside your field</a:t>
-            </a:r>
-          </a:p>
-          <a:p>
-            <a:r>
-              <a:rPr lang="en-US" sz="2800" dirty="0">
-                <a:cs typeface="Times New Roman" panose="02020603050405020304" pitchFamily="18" charset="0"/>
-              </a:rPr>
-              <a:t>Subscribe to newsletters</a:t>
-            </a:r>
-          </a:p>
-          <a:p>
-            <a:pPr lvl="1"/>
-            <a:r>
-              <a:rPr lang="en-US" sz="2600" dirty="0">
-                <a:cs typeface="Times New Roman" panose="02020603050405020304" pitchFamily="18" charset="0"/>
-              </a:rPr>
-              <a:t>Academic journals, sure</a:t>
-            </a:r>
-          </a:p>
-          <a:p>
-            <a:pPr lvl="1"/>
-            <a:r>
-              <a:rPr lang="en-US" sz="2600" dirty="0">
-                <a:cs typeface="Times New Roman" panose="02020603050405020304" pitchFamily="18" charset="0"/>
-              </a:rPr>
-              <a:t>But also things like: </a:t>
-            </a:r>
-            <a:r>
-              <a:rPr lang="en-US" sz="2600" dirty="0">
-                <a:cs typeface="Times New Roman" panose="02020603050405020304" pitchFamily="18" charset="0"/>
-                <a:hlinkClick r:id="rId3"/>
-              </a:rPr>
-              <a:t>Axios Vitals</a:t>
-            </a:r>
-            <a:r>
-              <a:rPr lang="en-US" sz="2600" dirty="0">
-                <a:cs typeface="Times New Roman" panose="02020603050405020304" pitchFamily="18" charset="0"/>
-              </a:rPr>
-              <a:t>, </a:t>
-            </a:r>
-            <a:r>
-              <a:rPr lang="en-US" sz="2600" dirty="0" err="1">
-                <a:cs typeface="Times New Roman" panose="02020603050405020304" pitchFamily="18" charset="0"/>
-                <a:hlinkClick r:id="rId4"/>
-              </a:rPr>
-              <a:t>Postcall</a:t>
-            </a:r>
-            <a:r>
-              <a:rPr lang="en-US" sz="2600" dirty="0">
-                <a:cs typeface="Times New Roman" panose="02020603050405020304" pitchFamily="18" charset="0"/>
-              </a:rPr>
-              <a:t>, etc. </a:t>
-            </a:r>
-          </a:p>
-          <a:p>
-            <a:pPr lvl="1"/>
-            <a:endParaRPr lang="en-US" sz="2600" dirty="0">
-              <a:cs typeface="Times New Roman" panose="02020603050405020304" pitchFamily="18" charset="0"/>
-            </a:endParaRPr>
-          </a:p>
-          <a:p>
-            <a:pPr lvl="1"/>
-            <a:endParaRPr lang="en-US" sz="2600" dirty="0">
-              <a:cs typeface="Times New Roman" panose="02020603050405020304" pitchFamily="18" charset="0"/>
-            </a:endParaRPr>
-          </a:p>
-        </p:txBody>
-      </p:sp>
-    </p:spTree>
-    <p:extLst>
-      <p:ext uri="{BB962C8B-B14F-4D97-AF65-F5344CB8AC3E}">
-        <p14:creationId xmlns:p14="http://schemas.microsoft.com/office/powerpoint/2010/main" val="1439514143"/>
       </p:ext>
     </p:extLst>
   </p:cSld>
@@ -29883,7 +30314,13 @@
   <p:cSld>
     <p:spTree>
       <p:nvGrpSpPr>
-        <p:cNvPr id="1" name=""/>
+        <p:cNvPr id="1" name="">
+          <a:extLst>
+            <a:ext uri="{FF2B5EF4-FFF2-40B4-BE49-F238E27FC236}">
+              <a16:creationId xmlns:a16="http://schemas.microsoft.com/office/drawing/2014/main" id="{FC4DF8AD-069A-4F9C-F988-5F1B2FE2913C}"/>
+            </a:ext>
+          </a:extLst>
+        </p:cNvPr>
         <p:cNvGrpSpPr/>
         <p:nvPr/>
       </p:nvGrpSpPr>
@@ -29897,183 +30334,68 @@
       </p:grpSpPr>
       <p:sp>
         <p:nvSpPr>
-          <p:cNvPr id="2" name="Title 1"/>
-          <p:cNvSpPr>
-            <a:spLocks noGrp="1"/>
-          </p:cNvSpPr>
-          <p:nvPr>
-            <p:ph type="title"/>
+          <p:cNvPr id="2" name="Title 1">
+            <a:extLst>
+              <a:ext uri="{FF2B5EF4-FFF2-40B4-BE49-F238E27FC236}">
+                <a16:creationId xmlns:a16="http://schemas.microsoft.com/office/drawing/2014/main" id="{A203D0EE-5F5A-066A-EC7D-4AE5C4E3B54E}"/>
+              </a:ext>
+            </a:extLst>
+          </p:cNvPr>
+          <p:cNvSpPr>
+            <a:spLocks noGrp="1"/>
+          </p:cNvSpPr>
+          <p:nvPr>
+            <p:ph type="ctrTitle"/>
           </p:nvPr>
         </p:nvSpPr>
         <p:spPr>
           <a:xfrm>
-            <a:off x="609600" y="337392"/>
-            <a:ext cx="10439400" cy="624840"/>
+            <a:off x="1261872" y="758952"/>
+            <a:ext cx="10549128" cy="4041648"/>
           </a:xfrm>
         </p:spPr>
         <p:txBody>
+          <a:bodyPr/>
+          <a:lstStyle/>
+          <a:p>
+            <a:r>
+              <a:rPr lang="en-US" dirty="0"/>
+              <a:t>Conclusion</a:t>
+            </a:r>
+          </a:p>
+        </p:txBody>
+      </p:sp>
+      <p:sp>
+        <p:nvSpPr>
+          <p:cNvPr id="3" name="Subtitle 2">
+            <a:extLst>
+              <a:ext uri="{FF2B5EF4-FFF2-40B4-BE49-F238E27FC236}">
+                <a16:creationId xmlns:a16="http://schemas.microsoft.com/office/drawing/2014/main" id="{DA767F5D-2082-3A1C-315D-4C0306A835E8}"/>
+              </a:ext>
+            </a:extLst>
+          </p:cNvPr>
+          <p:cNvSpPr>
+            <a:spLocks noGrp="1"/>
+          </p:cNvSpPr>
+          <p:nvPr>
+            <p:ph type="subTitle" idx="1"/>
+          </p:nvPr>
+        </p:nvSpPr>
+        <p:spPr/>
+        <p:txBody>
           <a:bodyPr>
-            <a:noAutofit/>
+            <a:normAutofit/>
           </a:bodyPr>
           <a:lstStyle/>
           <a:p>
-            <a:r>
-              <a:rPr lang="en-US" sz="3600" dirty="0">
-                <a:cs typeface="Times New Roman" panose="02020603050405020304" pitchFamily="18" charset="0"/>
-              </a:rPr>
-              <a:t>Choosing an Empirical Strategy</a:t>
-            </a:r>
-            <a:endParaRPr lang="en-US" sz="3600" dirty="0">
-              <a:latin typeface="Times New Roman" panose="02020603050405020304" pitchFamily="18" charset="0"/>
-              <a:cs typeface="Times New Roman" panose="02020603050405020304" pitchFamily="18" charset="0"/>
-            </a:endParaRPr>
-          </a:p>
-        </p:txBody>
-      </p:sp>
-      <p:sp>
-        <p:nvSpPr>
-          <p:cNvPr id="3" name="Content Placeholder 2"/>
-          <p:cNvSpPr>
-            <a:spLocks noGrp="1"/>
-          </p:cNvSpPr>
-          <p:nvPr>
-            <p:ph idx="1"/>
-          </p:nvPr>
-        </p:nvSpPr>
-        <p:spPr>
-          <a:xfrm>
-            <a:off x="762000" y="1066801"/>
-            <a:ext cx="10286999" cy="5141388"/>
-          </a:xfrm>
-        </p:spPr>
-        <p:txBody>
-          <a:bodyPr>
-            <a:noAutofit/>
-          </a:bodyPr>
-          <a:lstStyle/>
-          <a:p>
-            <a:pPr marL="0" indent="0">
-              <a:buNone/>
-            </a:pPr>
-            <a:r>
-              <a:rPr lang="en-US" sz="2400" dirty="0">
-                <a:cs typeface="Times New Roman" panose="02020603050405020304" pitchFamily="18" charset="0"/>
-              </a:rPr>
-              <a:t>Your empirical strategy consists of two (related) components: </a:t>
-            </a:r>
-          </a:p>
-          <a:p>
-            <a:pPr marL="457200" indent="-457200">
-              <a:buFont typeface="+mj-lt"/>
-              <a:buAutoNum type="arabicPeriod"/>
-            </a:pPr>
-            <a:r>
-              <a:rPr lang="en-US" sz="2400" b="1" dirty="0">
-                <a:solidFill>
-                  <a:schemeClr val="accent2">
-                    <a:lumMod val="75000"/>
-                  </a:schemeClr>
-                </a:solidFill>
-                <a:cs typeface="Times New Roman" panose="02020603050405020304" pitchFamily="18" charset="0"/>
-              </a:rPr>
-              <a:t>Estimation strategy: </a:t>
-            </a:r>
-            <a:r>
-              <a:rPr lang="en-US" sz="2400" dirty="0">
-                <a:cs typeface="Times New Roman" panose="02020603050405020304" pitchFamily="18" charset="0"/>
-              </a:rPr>
-              <a:t>what is estimated, how, inference, etc.</a:t>
-            </a:r>
-          </a:p>
-          <a:p>
-            <a:pPr lvl="1"/>
-            <a:r>
-              <a:rPr lang="en-US" sz="2400" dirty="0">
-                <a:cs typeface="Times New Roman" panose="02020603050405020304" pitchFamily="18" charset="0"/>
-              </a:rPr>
-              <a:t>Put equations in your papers! </a:t>
-            </a:r>
-          </a:p>
-          <a:p>
-            <a:pPr marL="457200" indent="-457200">
-              <a:buFont typeface="+mj-lt"/>
-              <a:buAutoNum type="arabicPeriod"/>
-            </a:pPr>
-            <a:r>
-              <a:rPr lang="en-US" sz="2400" b="1" dirty="0">
-                <a:solidFill>
-                  <a:schemeClr val="accent3">
-                    <a:lumMod val="75000"/>
-                  </a:schemeClr>
-                </a:solidFill>
-                <a:cs typeface="Times New Roman" panose="02020603050405020304" pitchFamily="18" charset="0"/>
-              </a:rPr>
-              <a:t>Identification strategy: </a:t>
-            </a:r>
-            <a:r>
-              <a:rPr lang="en-US" sz="2400" dirty="0">
-                <a:cs typeface="Times New Roman" panose="02020603050405020304" pitchFamily="18" charset="0"/>
-              </a:rPr>
-              <a:t>what allows making a causal statement?</a:t>
-            </a:r>
-          </a:p>
-          <a:p>
-            <a:pPr lvl="1"/>
-            <a:r>
-              <a:rPr lang="en-US" sz="2400" dirty="0">
-                <a:cs typeface="Times New Roman" panose="02020603050405020304" pitchFamily="18" charset="0"/>
-              </a:rPr>
-              <a:t>Do you have experimental variation? </a:t>
-            </a:r>
-          </a:p>
-          <a:p>
-            <a:pPr lvl="1"/>
-            <a:r>
-              <a:rPr lang="en-US" sz="2400" dirty="0">
-                <a:cs typeface="Times New Roman" panose="02020603050405020304" pitchFamily="18" charset="0"/>
-              </a:rPr>
-              <a:t>Balance? </a:t>
-            </a:r>
-          </a:p>
-          <a:p>
-            <a:pPr lvl="1"/>
-            <a:r>
-              <a:rPr lang="en-US" sz="2400" dirty="0">
-                <a:cs typeface="Times New Roman" panose="02020603050405020304" pitchFamily="18" charset="0"/>
-              </a:rPr>
-              <a:t>Is there endogeneity in your design? </a:t>
-            </a:r>
-          </a:p>
-          <a:p>
-            <a:pPr lvl="2"/>
-            <a:r>
-              <a:rPr lang="en-US" sz="2400" dirty="0">
-                <a:cs typeface="Times New Roman" panose="02020603050405020304" pitchFamily="18" charset="0"/>
-              </a:rPr>
-              <a:t>(reverse causality, heterogeneity, measurement/omitted error)</a:t>
-            </a:r>
-          </a:p>
-          <a:p>
-            <a:pPr lvl="1"/>
-            <a:r>
-              <a:rPr lang="en-US" sz="2600" b="1" u="sng" dirty="0">
-                <a:cs typeface="Times New Roman" panose="02020603050405020304" pitchFamily="18" charset="0"/>
-              </a:rPr>
-              <a:t>This will require your (untestable) identifying assumptions to move from randomized to quasi-experimental data!</a:t>
-            </a:r>
-          </a:p>
-          <a:p>
-            <a:pPr lvl="1"/>
-            <a:endParaRPr lang="en-US" sz="2600" dirty="0">
-              <a:cs typeface="Times New Roman" panose="02020603050405020304" pitchFamily="18" charset="0"/>
-            </a:endParaRPr>
+            <a:endParaRPr lang="en-US" sz="4400" dirty="0"/>
           </a:p>
         </p:txBody>
       </p:sp>
     </p:spTree>
     <p:extLst>
       <p:ext uri="{BB962C8B-B14F-4D97-AF65-F5344CB8AC3E}">
-        <p14:creationId xmlns:p14="http://schemas.microsoft.com/office/powerpoint/2010/main" val="1502230994"/>
+        <p14:creationId xmlns:p14="http://schemas.microsoft.com/office/powerpoint/2010/main" val="3572315359"/>
       </p:ext>
     </p:extLst>
   </p:cSld>
@@ -30126,6 +30448,415 @@
               <a:rPr lang="en-US" sz="3600" dirty="0">
                 <a:cs typeface="Times New Roman" panose="02020603050405020304" pitchFamily="18" charset="0"/>
               </a:rPr>
+              <a:t>So where do you find questions? </a:t>
+            </a:r>
+            <a:endParaRPr lang="en-US" sz="3600" dirty="0">
+              <a:latin typeface="Times New Roman" panose="02020603050405020304" pitchFamily="18" charset="0"/>
+              <a:cs typeface="Times New Roman" panose="02020603050405020304" pitchFamily="18" charset="0"/>
+            </a:endParaRPr>
+          </a:p>
+        </p:txBody>
+      </p:sp>
+      <p:sp>
+        <p:nvSpPr>
+          <p:cNvPr id="3" name="Content Placeholder 2"/>
+          <p:cNvSpPr>
+            <a:spLocks noGrp="1"/>
+          </p:cNvSpPr>
+          <p:nvPr>
+            <p:ph idx="1"/>
+          </p:nvPr>
+        </p:nvSpPr>
+        <p:spPr>
+          <a:xfrm>
+            <a:off x="609600" y="1066801"/>
+            <a:ext cx="10363199" cy="5141388"/>
+          </a:xfrm>
+        </p:spPr>
+        <p:txBody>
+          <a:bodyPr>
+            <a:noAutofit/>
+          </a:bodyPr>
+          <a:lstStyle/>
+          <a:p>
+            <a:r>
+              <a:rPr lang="en-US" sz="2800" dirty="0">
+                <a:cs typeface="Times New Roman" panose="02020603050405020304" pitchFamily="18" charset="0"/>
+              </a:rPr>
+              <a:t>Reading papers is a good start, but not everything! </a:t>
+            </a:r>
+          </a:p>
+          <a:p>
+            <a:pPr lvl="1"/>
+            <a:r>
+              <a:rPr lang="en-US" sz="2600" dirty="0">
+                <a:cs typeface="Times New Roman" panose="02020603050405020304" pitchFamily="18" charset="0"/>
+              </a:rPr>
+              <a:t>You don’t want to get caught in an echo chamber</a:t>
+            </a:r>
+          </a:p>
+          <a:p>
+            <a:r>
+              <a:rPr lang="en-US" sz="2800" dirty="0">
+                <a:cs typeface="Times New Roman" panose="02020603050405020304" pitchFamily="18" charset="0"/>
+              </a:rPr>
+              <a:t>Come to seminars! </a:t>
+            </a:r>
+          </a:p>
+          <a:p>
+            <a:pPr lvl="1"/>
+            <a:r>
+              <a:rPr lang="en-US" sz="2600" dirty="0">
+                <a:cs typeface="Times New Roman" panose="02020603050405020304" pitchFamily="18" charset="0"/>
+              </a:rPr>
+              <a:t>Go see the big names when they come in (look at other departments too)</a:t>
+            </a:r>
+          </a:p>
+          <a:p>
+            <a:pPr lvl="1"/>
+            <a:r>
+              <a:rPr lang="en-US" sz="2600" dirty="0">
+                <a:cs typeface="Times New Roman" panose="02020603050405020304" pitchFamily="18" charset="0"/>
+              </a:rPr>
+              <a:t>But also go see the works in progress, what your peers are working on, your faculty, etc. </a:t>
+            </a:r>
+          </a:p>
+          <a:p>
+            <a:pPr lvl="1"/>
+            <a:r>
+              <a:rPr lang="en-US" sz="2600" dirty="0">
+                <a:cs typeface="Times New Roman" panose="02020603050405020304" pitchFamily="18" charset="0"/>
+              </a:rPr>
+              <a:t>Try to go to talks outside your field</a:t>
+            </a:r>
+          </a:p>
+          <a:p>
+            <a:r>
+              <a:rPr lang="en-US" sz="2800" dirty="0">
+                <a:cs typeface="Times New Roman" panose="02020603050405020304" pitchFamily="18" charset="0"/>
+              </a:rPr>
+              <a:t>Subscribe to newsletters</a:t>
+            </a:r>
+          </a:p>
+          <a:p>
+            <a:pPr lvl="1"/>
+            <a:r>
+              <a:rPr lang="en-US" sz="2600" dirty="0">
+                <a:cs typeface="Times New Roman" panose="02020603050405020304" pitchFamily="18" charset="0"/>
+              </a:rPr>
+              <a:t>Academic journals, sure</a:t>
+            </a:r>
+          </a:p>
+          <a:p>
+            <a:pPr lvl="1"/>
+            <a:r>
+              <a:rPr lang="en-US" sz="2600" dirty="0">
+                <a:cs typeface="Times New Roman" panose="02020603050405020304" pitchFamily="18" charset="0"/>
+              </a:rPr>
+              <a:t>But also things like: </a:t>
+            </a:r>
+            <a:r>
+              <a:rPr lang="en-US" sz="2600" dirty="0">
+                <a:cs typeface="Times New Roman" panose="02020603050405020304" pitchFamily="18" charset="0"/>
+                <a:hlinkClick r:id="rId3"/>
+              </a:rPr>
+              <a:t>Axios Vitals</a:t>
+            </a:r>
+            <a:r>
+              <a:rPr lang="en-US" sz="2600" dirty="0">
+                <a:cs typeface="Times New Roman" panose="02020603050405020304" pitchFamily="18" charset="0"/>
+              </a:rPr>
+              <a:t>, </a:t>
+            </a:r>
+            <a:r>
+              <a:rPr lang="en-US" sz="2600" dirty="0" err="1">
+                <a:cs typeface="Times New Roman" panose="02020603050405020304" pitchFamily="18" charset="0"/>
+                <a:hlinkClick r:id="rId4"/>
+              </a:rPr>
+              <a:t>Postcall</a:t>
+            </a:r>
+            <a:r>
+              <a:rPr lang="en-US" sz="2600" dirty="0">
+                <a:cs typeface="Times New Roman" panose="02020603050405020304" pitchFamily="18" charset="0"/>
+              </a:rPr>
+              <a:t>, etc. </a:t>
+            </a:r>
+          </a:p>
+          <a:p>
+            <a:pPr lvl="1"/>
+            <a:endParaRPr lang="en-US" sz="2600" dirty="0">
+              <a:cs typeface="Times New Roman" panose="02020603050405020304" pitchFamily="18" charset="0"/>
+            </a:endParaRPr>
+          </a:p>
+          <a:p>
+            <a:pPr lvl="1"/>
+            <a:endParaRPr lang="en-US" sz="2600" dirty="0">
+              <a:cs typeface="Times New Roman" panose="02020603050405020304" pitchFamily="18" charset="0"/>
+            </a:endParaRPr>
+          </a:p>
+        </p:txBody>
+      </p:sp>
+    </p:spTree>
+    <p:extLst>
+      <p:ext uri="{BB962C8B-B14F-4D97-AF65-F5344CB8AC3E}">
+        <p14:creationId xmlns:p14="http://schemas.microsoft.com/office/powerpoint/2010/main" val="1439514143"/>
+      </p:ext>
+    </p:extLst>
+  </p:cSld>
+  <p:clrMapOvr>
+    <a:masterClrMapping/>
+  </p:clrMapOvr>
+</p:sld>
+</file>
+
+<file path=ppt/slides/slide72.xml><?xml version="1.0" encoding="utf-8"?>
+<p:sld xmlns:a="http://schemas.openxmlformats.org/drawingml/2006/main" xmlns:r="http://schemas.openxmlformats.org/officeDocument/2006/relationships" xmlns:p="http://schemas.openxmlformats.org/presentationml/2006/main">
+  <p:cSld>
+    <p:spTree>
+      <p:nvGrpSpPr>
+        <p:cNvPr id="1" name=""/>
+        <p:cNvGrpSpPr/>
+        <p:nvPr/>
+      </p:nvGrpSpPr>
+      <p:grpSpPr>
+        <a:xfrm>
+          <a:off x="0" y="0"/>
+          <a:ext cx="0" cy="0"/>
+          <a:chOff x="0" y="0"/>
+          <a:chExt cx="0" cy="0"/>
+        </a:xfrm>
+      </p:grpSpPr>
+      <p:sp>
+        <p:nvSpPr>
+          <p:cNvPr id="2" name="Title 1"/>
+          <p:cNvSpPr>
+            <a:spLocks noGrp="1"/>
+          </p:cNvSpPr>
+          <p:nvPr>
+            <p:ph type="title"/>
+          </p:nvPr>
+        </p:nvSpPr>
+        <p:spPr>
+          <a:xfrm>
+            <a:off x="609600" y="337392"/>
+            <a:ext cx="10439400" cy="624840"/>
+          </a:xfrm>
+        </p:spPr>
+        <p:txBody>
+          <a:bodyPr>
+            <a:noAutofit/>
+          </a:bodyPr>
+          <a:lstStyle/>
+          <a:p>
+            <a:r>
+              <a:rPr lang="en-US" sz="3600" dirty="0">
+                <a:cs typeface="Times New Roman" panose="02020603050405020304" pitchFamily="18" charset="0"/>
+              </a:rPr>
+              <a:t>Choosing an Empirical Strategy</a:t>
+            </a:r>
+            <a:endParaRPr lang="en-US" sz="3600" dirty="0">
+              <a:latin typeface="Times New Roman" panose="02020603050405020304" pitchFamily="18" charset="0"/>
+              <a:cs typeface="Times New Roman" panose="02020603050405020304" pitchFamily="18" charset="0"/>
+            </a:endParaRPr>
+          </a:p>
+        </p:txBody>
+      </p:sp>
+      <p:sp>
+        <p:nvSpPr>
+          <p:cNvPr id="3" name="Content Placeholder 2"/>
+          <p:cNvSpPr>
+            <a:spLocks noGrp="1"/>
+          </p:cNvSpPr>
+          <p:nvPr>
+            <p:ph idx="1"/>
+          </p:nvPr>
+        </p:nvSpPr>
+        <p:spPr>
+          <a:xfrm>
+            <a:off x="762000" y="1066801"/>
+            <a:ext cx="10286999" cy="5141388"/>
+          </a:xfrm>
+        </p:spPr>
+        <p:txBody>
+          <a:bodyPr>
+            <a:noAutofit/>
+          </a:bodyPr>
+          <a:lstStyle/>
+          <a:p>
+            <a:pPr marL="0" indent="0">
+              <a:buNone/>
+            </a:pPr>
+            <a:r>
+              <a:rPr lang="en-US" sz="2400" dirty="0">
+                <a:cs typeface="Times New Roman" panose="02020603050405020304" pitchFamily="18" charset="0"/>
+              </a:rPr>
+              <a:t>Your empirical strategy consists of two (related) components: </a:t>
+            </a:r>
+          </a:p>
+          <a:p>
+            <a:pPr marL="457200" indent="-457200">
+              <a:buFont typeface="+mj-lt"/>
+              <a:buAutoNum type="arabicPeriod"/>
+            </a:pPr>
+            <a:r>
+              <a:rPr lang="en-US" sz="2400" b="1" dirty="0">
+                <a:solidFill>
+                  <a:schemeClr val="accent2">
+                    <a:lumMod val="75000"/>
+                  </a:schemeClr>
+                </a:solidFill>
+                <a:cs typeface="Times New Roman" panose="02020603050405020304" pitchFamily="18" charset="0"/>
+              </a:rPr>
+              <a:t>Estimation strategy: </a:t>
+            </a:r>
+            <a:r>
+              <a:rPr lang="en-US" sz="2400" dirty="0">
+                <a:cs typeface="Times New Roman" panose="02020603050405020304" pitchFamily="18" charset="0"/>
+              </a:rPr>
+              <a:t>what is estimated, how, inference, etc.</a:t>
+            </a:r>
+          </a:p>
+          <a:p>
+            <a:pPr lvl="1"/>
+            <a:r>
+              <a:rPr lang="en-US" sz="2400" dirty="0">
+                <a:cs typeface="Times New Roman" panose="02020603050405020304" pitchFamily="18" charset="0"/>
+              </a:rPr>
+              <a:t>Put equations in your papers! </a:t>
+            </a:r>
+          </a:p>
+          <a:p>
+            <a:pPr marL="457200" indent="-457200">
+              <a:buFont typeface="+mj-lt"/>
+              <a:buAutoNum type="arabicPeriod"/>
+            </a:pPr>
+            <a:r>
+              <a:rPr lang="en-US" sz="2400" b="1" dirty="0">
+                <a:solidFill>
+                  <a:schemeClr val="accent3">
+                    <a:lumMod val="75000"/>
+                  </a:schemeClr>
+                </a:solidFill>
+                <a:cs typeface="Times New Roman" panose="02020603050405020304" pitchFamily="18" charset="0"/>
+              </a:rPr>
+              <a:t>Identification strategy: </a:t>
+            </a:r>
+            <a:r>
+              <a:rPr lang="en-US" sz="2400" dirty="0">
+                <a:cs typeface="Times New Roman" panose="02020603050405020304" pitchFamily="18" charset="0"/>
+              </a:rPr>
+              <a:t>what allows making a causal statement?</a:t>
+            </a:r>
+          </a:p>
+          <a:p>
+            <a:pPr lvl="1"/>
+            <a:r>
+              <a:rPr lang="en-US" sz="2400" dirty="0">
+                <a:cs typeface="Times New Roman" panose="02020603050405020304" pitchFamily="18" charset="0"/>
+              </a:rPr>
+              <a:t>Do you have experimental variation? </a:t>
+            </a:r>
+          </a:p>
+          <a:p>
+            <a:pPr lvl="1"/>
+            <a:r>
+              <a:rPr lang="en-US" sz="2400" dirty="0">
+                <a:cs typeface="Times New Roman" panose="02020603050405020304" pitchFamily="18" charset="0"/>
+              </a:rPr>
+              <a:t>Balance? </a:t>
+            </a:r>
+          </a:p>
+          <a:p>
+            <a:pPr lvl="1"/>
+            <a:r>
+              <a:rPr lang="en-US" sz="2400" dirty="0">
+                <a:cs typeface="Times New Roman" panose="02020603050405020304" pitchFamily="18" charset="0"/>
+              </a:rPr>
+              <a:t>Is there endogeneity in your design? </a:t>
+            </a:r>
+          </a:p>
+          <a:p>
+            <a:pPr lvl="2"/>
+            <a:r>
+              <a:rPr lang="en-US" sz="2400" dirty="0">
+                <a:cs typeface="Times New Roman" panose="02020603050405020304" pitchFamily="18" charset="0"/>
+              </a:rPr>
+              <a:t>(reverse causality, heterogeneity, measurement/omitted error)</a:t>
+            </a:r>
+          </a:p>
+          <a:p>
+            <a:pPr lvl="1"/>
+            <a:r>
+              <a:rPr lang="en-US" sz="2600" b="1" u="sng" dirty="0">
+                <a:cs typeface="Times New Roman" panose="02020603050405020304" pitchFamily="18" charset="0"/>
+              </a:rPr>
+              <a:t>This will require your (untestable) identifying assumptions to move from randomized to quasi-experimental data!</a:t>
+            </a:r>
+          </a:p>
+          <a:p>
+            <a:pPr lvl="1"/>
+            <a:endParaRPr lang="en-US" sz="2600" dirty="0">
+              <a:cs typeface="Times New Roman" panose="02020603050405020304" pitchFamily="18" charset="0"/>
+            </a:endParaRPr>
+          </a:p>
+        </p:txBody>
+      </p:sp>
+    </p:spTree>
+    <p:extLst>
+      <p:ext uri="{BB962C8B-B14F-4D97-AF65-F5344CB8AC3E}">
+        <p14:creationId xmlns:p14="http://schemas.microsoft.com/office/powerpoint/2010/main" val="1502230994"/>
+      </p:ext>
+    </p:extLst>
+  </p:cSld>
+  <p:clrMapOvr>
+    <a:masterClrMapping/>
+  </p:clrMapOvr>
+</p:sld>
+</file>
+
+<file path=ppt/slides/slide73.xml><?xml version="1.0" encoding="utf-8"?>
+<p:sld xmlns:a="http://schemas.openxmlformats.org/drawingml/2006/main" xmlns:r="http://schemas.openxmlformats.org/officeDocument/2006/relationships" xmlns:p="http://schemas.openxmlformats.org/presentationml/2006/main">
+  <p:cSld>
+    <p:spTree>
+      <p:nvGrpSpPr>
+        <p:cNvPr id="1" name=""/>
+        <p:cNvGrpSpPr/>
+        <p:nvPr/>
+      </p:nvGrpSpPr>
+      <p:grpSpPr>
+        <a:xfrm>
+          <a:off x="0" y="0"/>
+          <a:ext cx="0" cy="0"/>
+          <a:chOff x="0" y="0"/>
+          <a:chExt cx="0" cy="0"/>
+        </a:xfrm>
+      </p:grpSpPr>
+      <p:sp>
+        <p:nvSpPr>
+          <p:cNvPr id="2" name="Title 1"/>
+          <p:cNvSpPr>
+            <a:spLocks noGrp="1"/>
+          </p:cNvSpPr>
+          <p:nvPr>
+            <p:ph type="title"/>
+          </p:nvPr>
+        </p:nvSpPr>
+        <p:spPr>
+          <a:xfrm>
+            <a:off x="609600" y="337392"/>
+            <a:ext cx="10439400" cy="624840"/>
+          </a:xfrm>
+        </p:spPr>
+        <p:txBody>
+          <a:bodyPr>
+            <a:noAutofit/>
+          </a:bodyPr>
+          <a:lstStyle/>
+          <a:p>
+            <a:r>
+              <a:rPr lang="en-US" sz="3600" dirty="0">
+                <a:cs typeface="Times New Roman" panose="02020603050405020304" pitchFamily="18" charset="0"/>
+              </a:rPr>
               <a:t>Where do we get the identification?</a:t>
             </a:r>
             <a:endParaRPr lang="en-US" sz="3600" dirty="0">
@@ -30291,7 +31022,7 @@
 </p:sld>
 </file>
 
-<file path=ppt/slides/slide72.xml><?xml version="1.0" encoding="utf-8"?>
+<file path=ppt/slides/slide74.xml><?xml version="1.0" encoding="utf-8"?>
 <p:sld xmlns:a="http://schemas.openxmlformats.org/drawingml/2006/main" xmlns:r="http://schemas.openxmlformats.org/officeDocument/2006/relationships" xmlns:p="http://schemas.openxmlformats.org/presentationml/2006/main">
   <p:cSld>
     <p:spTree>
@@ -30466,7 +31197,7 @@
 </p:sld>
 </file>
 
-<file path=ppt/slides/slide73.xml><?xml version="1.0" encoding="utf-8"?>
+<file path=ppt/slides/slide75.xml><?xml version="1.0" encoding="utf-8"?>
 <p:sld xmlns:a="http://schemas.openxmlformats.org/drawingml/2006/main" xmlns:r="http://schemas.openxmlformats.org/officeDocument/2006/relationships" xmlns:p="http://schemas.openxmlformats.org/presentationml/2006/main">
   <p:cSld>
     <p:spTree>
@@ -30586,419 +31317,6 @@
 </p:sld>
 </file>
 
-<file path=ppt/slides/slide74.xml><?xml version="1.0" encoding="utf-8"?>
-<p:sld xmlns:a="http://schemas.openxmlformats.org/drawingml/2006/main" xmlns:r="http://schemas.openxmlformats.org/officeDocument/2006/relationships" xmlns:p="http://schemas.openxmlformats.org/presentationml/2006/main">
-  <p:cSld>
-    <p:spTree>
-      <p:nvGrpSpPr>
-        <p:cNvPr id="1" name=""/>
-        <p:cNvGrpSpPr/>
-        <p:nvPr/>
-      </p:nvGrpSpPr>
-      <p:grpSpPr>
-        <a:xfrm>
-          <a:off x="0" y="0"/>
-          <a:ext cx="0" cy="0"/>
-          <a:chOff x="0" y="0"/>
-          <a:chExt cx="0" cy="0"/>
-        </a:xfrm>
-      </p:grpSpPr>
-      <p:sp>
-        <p:nvSpPr>
-          <p:cNvPr id="2" name="Title 1">
-            <a:extLst>
-              <a:ext uri="{FF2B5EF4-FFF2-40B4-BE49-F238E27FC236}">
-                <a16:creationId xmlns:a16="http://schemas.microsoft.com/office/drawing/2014/main" id="{F6693EDF-660D-4391-A114-A6C54268E445}"/>
-              </a:ext>
-            </a:extLst>
-          </p:cNvPr>
-          <p:cNvSpPr>
-            <a:spLocks noGrp="1"/>
-          </p:cNvSpPr>
-          <p:nvPr>
-            <p:ph type="ctrTitle"/>
-          </p:nvPr>
-        </p:nvSpPr>
-        <p:spPr>
-          <a:xfrm>
-            <a:off x="1261872" y="758952"/>
-            <a:ext cx="10549128" cy="4041648"/>
-          </a:xfrm>
-        </p:spPr>
-        <p:txBody>
-          <a:bodyPr/>
-          <a:lstStyle/>
-          <a:p>
-            <a:r>
-              <a:rPr lang="en-US" dirty="0"/>
-              <a:t>Appendix</a:t>
-            </a:r>
-            <a:br>
-              <a:rPr lang="en-US" dirty="0"/>
-            </a:br>
-            <a:endParaRPr lang="en-US" dirty="0"/>
-          </a:p>
-        </p:txBody>
-      </p:sp>
-      <p:sp>
-        <p:nvSpPr>
-          <p:cNvPr id="3" name="Subtitle 2">
-            <a:extLst>
-              <a:ext uri="{FF2B5EF4-FFF2-40B4-BE49-F238E27FC236}">
-                <a16:creationId xmlns:a16="http://schemas.microsoft.com/office/drawing/2014/main" id="{9A7FADE3-4D7C-4B3A-B023-71CD85AECCCB}"/>
-              </a:ext>
-            </a:extLst>
-          </p:cNvPr>
-          <p:cNvSpPr>
-            <a:spLocks noGrp="1"/>
-          </p:cNvSpPr>
-          <p:nvPr>
-            <p:ph type="subTitle" idx="1"/>
-          </p:nvPr>
-        </p:nvSpPr>
-        <p:spPr/>
-        <p:txBody>
-          <a:bodyPr>
-            <a:normAutofit/>
-          </a:bodyPr>
-          <a:lstStyle/>
-          <a:p>
-            <a:endParaRPr lang="en-US" sz="4400" dirty="0"/>
-          </a:p>
-        </p:txBody>
-      </p:sp>
-    </p:spTree>
-    <p:extLst>
-      <p:ext uri="{BB962C8B-B14F-4D97-AF65-F5344CB8AC3E}">
-        <p14:creationId xmlns:p14="http://schemas.microsoft.com/office/powerpoint/2010/main" val="2673239905"/>
-      </p:ext>
-    </p:extLst>
-  </p:cSld>
-  <p:clrMapOvr>
-    <a:masterClrMapping/>
-  </p:clrMapOvr>
-</p:sld>
-</file>
-
-<file path=ppt/slides/slide75.xml><?xml version="1.0" encoding="utf-8"?>
-<p:sld xmlns:a="http://schemas.openxmlformats.org/drawingml/2006/main" xmlns:r="http://schemas.openxmlformats.org/officeDocument/2006/relationships" xmlns:p="http://schemas.openxmlformats.org/presentationml/2006/main">
-  <p:cSld>
-    <p:spTree>
-      <p:nvGrpSpPr>
-        <p:cNvPr id="1" name=""/>
-        <p:cNvGrpSpPr/>
-        <p:nvPr/>
-      </p:nvGrpSpPr>
-      <p:grpSpPr>
-        <a:xfrm>
-          <a:off x="0" y="0"/>
-          <a:ext cx="0" cy="0"/>
-          <a:chOff x="0" y="0"/>
-          <a:chExt cx="0" cy="0"/>
-        </a:xfrm>
-      </p:grpSpPr>
-      <p:sp>
-        <p:nvSpPr>
-          <p:cNvPr id="2" name="Title 1"/>
-          <p:cNvSpPr>
-            <a:spLocks noGrp="1"/>
-          </p:cNvSpPr>
-          <p:nvPr>
-            <p:ph type="title"/>
-          </p:nvPr>
-        </p:nvSpPr>
-        <p:spPr>
-          <a:xfrm>
-            <a:off x="609600" y="337392"/>
-            <a:ext cx="10439400" cy="624840"/>
-          </a:xfrm>
-        </p:spPr>
-        <p:txBody>
-          <a:bodyPr>
-            <a:noAutofit/>
-          </a:bodyPr>
-          <a:lstStyle/>
-          <a:p>
-            <a:r>
-              <a:rPr lang="en-US" sz="3600" dirty="0">
-                <a:cs typeface="Times New Roman" panose="02020603050405020304" pitchFamily="18" charset="0"/>
-              </a:rPr>
-              <a:t>Model vs. Design-based Approaches</a:t>
-            </a:r>
-            <a:endParaRPr lang="en-US" sz="3600" dirty="0">
-              <a:latin typeface="Times New Roman" panose="02020603050405020304" pitchFamily="18" charset="0"/>
-              <a:cs typeface="Times New Roman" panose="02020603050405020304" pitchFamily="18" charset="0"/>
-            </a:endParaRPr>
-          </a:p>
-        </p:txBody>
-      </p:sp>
-      <p:sp>
-        <p:nvSpPr>
-          <p:cNvPr id="3" name="Content Placeholder 2"/>
-          <p:cNvSpPr>
-            <a:spLocks noGrp="1"/>
-          </p:cNvSpPr>
-          <p:nvPr>
-            <p:ph idx="1"/>
-          </p:nvPr>
-        </p:nvSpPr>
-        <p:spPr>
-          <a:xfrm>
-            <a:off x="609601" y="1066801"/>
-            <a:ext cx="10015390" cy="5141388"/>
-          </a:xfrm>
-        </p:spPr>
-        <p:txBody>
-          <a:bodyPr>
-            <a:noAutofit/>
-          </a:bodyPr>
-          <a:lstStyle/>
-          <a:p>
-            <a:r>
-              <a:rPr lang="en-US" sz="2800" dirty="0">
-                <a:cs typeface="Times New Roman" panose="02020603050405020304" pitchFamily="18" charset="0"/>
-              </a:rPr>
-              <a:t>Approaches either rest on you having a DAG (</a:t>
-            </a:r>
-            <a:r>
-              <a:rPr lang="en-US" sz="2800" dirty="0">
-                <a:solidFill>
-                  <a:schemeClr val="accent3">
-                    <a:lumMod val="75000"/>
-                  </a:schemeClr>
-                </a:solidFill>
-                <a:cs typeface="Times New Roman" panose="02020603050405020304" pitchFamily="18" charset="0"/>
-              </a:rPr>
-              <a:t>model-based</a:t>
-            </a:r>
-            <a:r>
-              <a:rPr lang="en-US" sz="2800" dirty="0">
-                <a:cs typeface="Times New Roman" panose="02020603050405020304" pitchFamily="18" charset="0"/>
-              </a:rPr>
-              <a:t>) or a good source of exogenous variation to identify data generating processes (</a:t>
-            </a:r>
-            <a:r>
-              <a:rPr lang="en-US" sz="2800" dirty="0">
-                <a:solidFill>
-                  <a:schemeClr val="accent2">
-                    <a:lumMod val="75000"/>
-                  </a:schemeClr>
-                </a:solidFill>
-                <a:cs typeface="Times New Roman" panose="02020603050405020304" pitchFamily="18" charset="0"/>
-              </a:rPr>
-              <a:t>design-based</a:t>
-            </a:r>
-            <a:r>
-              <a:rPr lang="en-US" sz="2800" dirty="0">
-                <a:cs typeface="Times New Roman" panose="02020603050405020304" pitchFamily="18" charset="0"/>
-              </a:rPr>
-              <a:t>) </a:t>
-            </a:r>
-          </a:p>
-          <a:p>
-            <a:r>
-              <a:rPr lang="en-US" sz="2800" dirty="0">
-                <a:cs typeface="Times New Roman" panose="02020603050405020304" pitchFamily="18" charset="0"/>
-              </a:rPr>
-              <a:t>Examples of </a:t>
-            </a:r>
-            <a:r>
-              <a:rPr lang="en-US" sz="2800" dirty="0">
-                <a:solidFill>
-                  <a:schemeClr val="accent3">
-                    <a:lumMod val="75000"/>
-                  </a:schemeClr>
-                </a:solidFill>
-                <a:cs typeface="Times New Roman" panose="02020603050405020304" pitchFamily="18" charset="0"/>
-              </a:rPr>
-              <a:t>model-based</a:t>
-            </a:r>
-            <a:r>
-              <a:rPr lang="en-US" sz="2800" dirty="0">
-                <a:cs typeface="Times New Roman" panose="02020603050405020304" pitchFamily="18" charset="0"/>
-              </a:rPr>
-              <a:t>: matching, controlling, IPW</a:t>
-            </a:r>
-          </a:p>
-          <a:p>
-            <a:pPr lvl="1"/>
-            <a:r>
-              <a:rPr lang="en-US" sz="2400" dirty="0">
-                <a:cs typeface="Times New Roman" panose="02020603050405020304" pitchFamily="18" charset="0"/>
-              </a:rPr>
-              <a:t>Requires a</a:t>
-            </a:r>
-            <a:r>
-              <a:rPr lang="en-US" sz="2400" dirty="0">
-                <a:solidFill>
-                  <a:schemeClr val="accent3">
-                    <a:lumMod val="75000"/>
-                  </a:schemeClr>
-                </a:solidFill>
-                <a:cs typeface="Times New Roman" panose="02020603050405020304" pitchFamily="18" charset="0"/>
-              </a:rPr>
-              <a:t> </a:t>
-            </a:r>
-            <a:r>
-              <a:rPr lang="en-US" sz="2400" b="1" dirty="0">
-                <a:solidFill>
-                  <a:schemeClr val="accent3">
-                    <a:lumMod val="75000"/>
-                  </a:schemeClr>
-                </a:solidFill>
-                <a:cs typeface="Times New Roman" panose="02020603050405020304" pitchFamily="18" charset="0"/>
-              </a:rPr>
-              <a:t>big assumption</a:t>
-            </a:r>
-            <a:r>
-              <a:rPr lang="en-US" sz="2400" dirty="0">
-                <a:cs typeface="Times New Roman" panose="02020603050405020304" pitchFamily="18" charset="0"/>
-              </a:rPr>
-              <a:t> about your DAG (and selection on </a:t>
-            </a:r>
-            <a:r>
-              <a:rPr lang="en-US" sz="2400" dirty="0" err="1">
-                <a:cs typeface="Times New Roman" panose="02020603050405020304" pitchFamily="18" charset="0"/>
-              </a:rPr>
-              <a:t>unobservables</a:t>
-            </a:r>
-            <a:r>
-              <a:rPr lang="en-US" sz="2400" dirty="0">
-                <a:cs typeface="Times New Roman" panose="02020603050405020304" pitchFamily="18" charset="0"/>
-              </a:rPr>
-              <a:t>)</a:t>
-            </a:r>
-          </a:p>
-          <a:p>
-            <a:pPr lvl="1"/>
-            <a:r>
-              <a:rPr lang="en-US" sz="2400" dirty="0">
-                <a:cs typeface="Times New Roman" panose="02020603050405020304" pitchFamily="18" charset="0"/>
-              </a:rPr>
-              <a:t>Can go as far as structural model approaches</a:t>
-            </a:r>
-          </a:p>
-          <a:p>
-            <a:r>
-              <a:rPr lang="en-US" sz="2800" dirty="0">
-                <a:cs typeface="Times New Roman" panose="02020603050405020304" pitchFamily="18" charset="0"/>
-              </a:rPr>
-              <a:t>Examples of </a:t>
-            </a:r>
-            <a:r>
-              <a:rPr lang="en-US" sz="2800" dirty="0">
-                <a:solidFill>
-                  <a:schemeClr val="accent2">
-                    <a:lumMod val="75000"/>
-                  </a:schemeClr>
-                </a:solidFill>
-                <a:cs typeface="Times New Roman" panose="02020603050405020304" pitchFamily="18" charset="0"/>
-              </a:rPr>
-              <a:t>design-based:</a:t>
-            </a:r>
-            <a:r>
-              <a:rPr lang="en-US" sz="2800" dirty="0">
-                <a:cs typeface="Times New Roman" panose="02020603050405020304" pitchFamily="18" charset="0"/>
-              </a:rPr>
-              <a:t> RCT, DID, IV</a:t>
-            </a:r>
-          </a:p>
-          <a:p>
-            <a:pPr lvl="1"/>
-            <a:r>
-              <a:rPr lang="en-US" sz="2400" dirty="0">
-                <a:cs typeface="Times New Roman" panose="02020603050405020304" pitchFamily="18" charset="0"/>
-              </a:rPr>
-              <a:t>Need a </a:t>
-            </a:r>
-            <a:r>
-              <a:rPr lang="en-US" sz="2400" b="1" dirty="0">
-                <a:solidFill>
-                  <a:schemeClr val="accent2">
-                    <a:lumMod val="75000"/>
-                  </a:schemeClr>
-                </a:solidFill>
-                <a:cs typeface="Times New Roman" panose="02020603050405020304" pitchFamily="18" charset="0"/>
-              </a:rPr>
-              <a:t>specific</a:t>
-            </a:r>
-            <a:r>
-              <a:rPr lang="en-US" sz="2400" dirty="0">
-                <a:cs typeface="Times New Roman" panose="02020603050405020304" pitchFamily="18" charset="0"/>
-              </a:rPr>
-              <a:t> set of data and </a:t>
-            </a:r>
-            <a:r>
-              <a:rPr lang="en-US" sz="2400" b="1" dirty="0">
-                <a:solidFill>
-                  <a:schemeClr val="accent2">
-                    <a:lumMod val="75000"/>
-                  </a:schemeClr>
-                </a:solidFill>
-                <a:cs typeface="Times New Roman" panose="02020603050405020304" pitchFamily="18" charset="0"/>
-              </a:rPr>
-              <a:t>circumstances</a:t>
-            </a:r>
-            <a:r>
-              <a:rPr lang="en-US" sz="2400" dirty="0">
-                <a:cs typeface="Times New Roman" panose="02020603050405020304" pitchFamily="18" charset="0"/>
-              </a:rPr>
-              <a:t> (policy change, instrument)</a:t>
-            </a:r>
-          </a:p>
-          <a:p>
-            <a:pPr lvl="1"/>
-            <a:r>
-              <a:rPr lang="en-US" sz="2400" dirty="0">
-                <a:cs typeface="Times New Roman" panose="02020603050405020304" pitchFamily="18" charset="0"/>
-              </a:rPr>
-              <a:t>Still making assumptions about an underlying model! But minimizing the set of assumptions and making them more transparent</a:t>
-            </a:r>
-          </a:p>
-          <a:p>
-            <a:pPr lvl="1"/>
-            <a:r>
-              <a:rPr lang="en-US" sz="2400" dirty="0">
-                <a:cs typeface="Times New Roman" panose="02020603050405020304" pitchFamily="18" charset="0"/>
-              </a:rPr>
-              <a:t>Typically relies on what’s referred to as </a:t>
-            </a:r>
-            <a:r>
-              <a:rPr lang="en-US" sz="2400" u="sng" dirty="0">
-                <a:cs typeface="Times New Roman" panose="02020603050405020304" pitchFamily="18" charset="0"/>
-              </a:rPr>
-              <a:t>quasi-random variation</a:t>
-            </a:r>
-          </a:p>
-          <a:p>
-            <a:pPr lvl="1"/>
-            <a:r>
-              <a:rPr lang="en-US" sz="2400" b="1" u="sng" dirty="0">
-                <a:cs typeface="Times New Roman" panose="02020603050405020304" pitchFamily="18" charset="0"/>
-              </a:rPr>
-              <a:t>This is where we’re headed</a:t>
-            </a:r>
-          </a:p>
-          <a:p>
-            <a:endParaRPr lang="en-US" sz="2800" dirty="0">
-              <a:cs typeface="Times New Roman" panose="02020603050405020304" pitchFamily="18" charset="0"/>
-            </a:endParaRPr>
-          </a:p>
-        </p:txBody>
-      </p:sp>
-    </p:spTree>
-    <p:extLst>
-      <p:ext uri="{BB962C8B-B14F-4D97-AF65-F5344CB8AC3E}">
-        <p14:creationId xmlns:p14="http://schemas.microsoft.com/office/powerpoint/2010/main" val="2824117371"/>
-      </p:ext>
-    </p:extLst>
-  </p:cSld>
-  <p:clrMapOvr>
-    <a:masterClrMapping/>
-  </p:clrMapOvr>
-</p:sld>
-</file>
-
 <file path=ppt/slides/slide76.xml><?xml version="1.0" encoding="utf-8"?>
 <p:sld xmlns:a="http://schemas.openxmlformats.org/drawingml/2006/main" xmlns:r="http://schemas.openxmlformats.org/officeDocument/2006/relationships" xmlns:p="http://schemas.openxmlformats.org/presentationml/2006/main">
   <p:cSld>
@@ -31018,6 +31336,419 @@
       </p:grpSpPr>
       <p:sp>
         <p:nvSpPr>
+          <p:cNvPr id="2" name="Title 1">
+            <a:extLst>
+              <a:ext uri="{FF2B5EF4-FFF2-40B4-BE49-F238E27FC236}">
+                <a16:creationId xmlns:a16="http://schemas.microsoft.com/office/drawing/2014/main" id="{F6693EDF-660D-4391-A114-A6C54268E445}"/>
+              </a:ext>
+            </a:extLst>
+          </p:cNvPr>
+          <p:cNvSpPr>
+            <a:spLocks noGrp="1"/>
+          </p:cNvSpPr>
+          <p:nvPr>
+            <p:ph type="ctrTitle"/>
+          </p:nvPr>
+        </p:nvSpPr>
+        <p:spPr>
+          <a:xfrm>
+            <a:off x="1261872" y="758952"/>
+            <a:ext cx="10549128" cy="4041648"/>
+          </a:xfrm>
+        </p:spPr>
+        <p:txBody>
+          <a:bodyPr/>
+          <a:lstStyle/>
+          <a:p>
+            <a:r>
+              <a:rPr lang="en-US" dirty="0"/>
+              <a:t>Appendix</a:t>
+            </a:r>
+            <a:br>
+              <a:rPr lang="en-US" dirty="0"/>
+            </a:br>
+            <a:endParaRPr lang="en-US" dirty="0"/>
+          </a:p>
+        </p:txBody>
+      </p:sp>
+      <p:sp>
+        <p:nvSpPr>
+          <p:cNvPr id="3" name="Subtitle 2">
+            <a:extLst>
+              <a:ext uri="{FF2B5EF4-FFF2-40B4-BE49-F238E27FC236}">
+                <a16:creationId xmlns:a16="http://schemas.microsoft.com/office/drawing/2014/main" id="{9A7FADE3-4D7C-4B3A-B023-71CD85AECCCB}"/>
+              </a:ext>
+            </a:extLst>
+          </p:cNvPr>
+          <p:cNvSpPr>
+            <a:spLocks noGrp="1"/>
+          </p:cNvSpPr>
+          <p:nvPr>
+            <p:ph type="subTitle" idx="1"/>
+          </p:nvPr>
+        </p:nvSpPr>
+        <p:spPr/>
+        <p:txBody>
+          <a:bodyPr>
+            <a:normAutofit/>
+          </a:bodyPr>
+          <a:lstStyle/>
+          <a:p>
+            <a:endParaRPr lang="en-US" sz="4400" dirty="0"/>
+          </a:p>
+        </p:txBody>
+      </p:sp>
+    </p:spTree>
+    <p:extLst>
+      <p:ext uri="{BB962C8B-B14F-4D97-AF65-F5344CB8AC3E}">
+        <p14:creationId xmlns:p14="http://schemas.microsoft.com/office/powerpoint/2010/main" val="2673239905"/>
+      </p:ext>
+    </p:extLst>
+  </p:cSld>
+  <p:clrMapOvr>
+    <a:masterClrMapping/>
+  </p:clrMapOvr>
+</p:sld>
+</file>
+
+<file path=ppt/slides/slide77.xml><?xml version="1.0" encoding="utf-8"?>
+<p:sld xmlns:a="http://schemas.openxmlformats.org/drawingml/2006/main" xmlns:r="http://schemas.openxmlformats.org/officeDocument/2006/relationships" xmlns:p="http://schemas.openxmlformats.org/presentationml/2006/main">
+  <p:cSld>
+    <p:spTree>
+      <p:nvGrpSpPr>
+        <p:cNvPr id="1" name=""/>
+        <p:cNvGrpSpPr/>
+        <p:nvPr/>
+      </p:nvGrpSpPr>
+      <p:grpSpPr>
+        <a:xfrm>
+          <a:off x="0" y="0"/>
+          <a:ext cx="0" cy="0"/>
+          <a:chOff x="0" y="0"/>
+          <a:chExt cx="0" cy="0"/>
+        </a:xfrm>
+      </p:grpSpPr>
+      <p:sp>
+        <p:nvSpPr>
+          <p:cNvPr id="2" name="Title 1"/>
+          <p:cNvSpPr>
+            <a:spLocks noGrp="1"/>
+          </p:cNvSpPr>
+          <p:nvPr>
+            <p:ph type="title"/>
+          </p:nvPr>
+        </p:nvSpPr>
+        <p:spPr>
+          <a:xfrm>
+            <a:off x="609600" y="337392"/>
+            <a:ext cx="10439400" cy="624840"/>
+          </a:xfrm>
+        </p:spPr>
+        <p:txBody>
+          <a:bodyPr>
+            <a:noAutofit/>
+          </a:bodyPr>
+          <a:lstStyle/>
+          <a:p>
+            <a:r>
+              <a:rPr lang="en-US" sz="3600" dirty="0">
+                <a:cs typeface="Times New Roman" panose="02020603050405020304" pitchFamily="18" charset="0"/>
+              </a:rPr>
+              <a:t>Model vs. Design-based Approaches</a:t>
+            </a:r>
+            <a:endParaRPr lang="en-US" sz="3600" dirty="0">
+              <a:latin typeface="Times New Roman" panose="02020603050405020304" pitchFamily="18" charset="0"/>
+              <a:cs typeface="Times New Roman" panose="02020603050405020304" pitchFamily="18" charset="0"/>
+            </a:endParaRPr>
+          </a:p>
+        </p:txBody>
+      </p:sp>
+      <p:sp>
+        <p:nvSpPr>
+          <p:cNvPr id="3" name="Content Placeholder 2"/>
+          <p:cNvSpPr>
+            <a:spLocks noGrp="1"/>
+          </p:cNvSpPr>
+          <p:nvPr>
+            <p:ph idx="1"/>
+          </p:nvPr>
+        </p:nvSpPr>
+        <p:spPr>
+          <a:xfrm>
+            <a:off x="609601" y="1066801"/>
+            <a:ext cx="10015390" cy="5141388"/>
+          </a:xfrm>
+        </p:spPr>
+        <p:txBody>
+          <a:bodyPr>
+            <a:noAutofit/>
+          </a:bodyPr>
+          <a:lstStyle/>
+          <a:p>
+            <a:r>
+              <a:rPr lang="en-US" sz="2800" dirty="0">
+                <a:cs typeface="Times New Roman" panose="02020603050405020304" pitchFamily="18" charset="0"/>
+              </a:rPr>
+              <a:t>Approaches either rest on you having a DAG (</a:t>
+            </a:r>
+            <a:r>
+              <a:rPr lang="en-US" sz="2800" dirty="0">
+                <a:solidFill>
+                  <a:schemeClr val="accent3">
+                    <a:lumMod val="75000"/>
+                  </a:schemeClr>
+                </a:solidFill>
+                <a:cs typeface="Times New Roman" panose="02020603050405020304" pitchFamily="18" charset="0"/>
+              </a:rPr>
+              <a:t>model-based</a:t>
+            </a:r>
+            <a:r>
+              <a:rPr lang="en-US" sz="2800" dirty="0">
+                <a:cs typeface="Times New Roman" panose="02020603050405020304" pitchFamily="18" charset="0"/>
+              </a:rPr>
+              <a:t>) or a good source of exogenous variation to identify data generating processes (</a:t>
+            </a:r>
+            <a:r>
+              <a:rPr lang="en-US" sz="2800" dirty="0">
+                <a:solidFill>
+                  <a:schemeClr val="accent2">
+                    <a:lumMod val="75000"/>
+                  </a:schemeClr>
+                </a:solidFill>
+                <a:cs typeface="Times New Roman" panose="02020603050405020304" pitchFamily="18" charset="0"/>
+              </a:rPr>
+              <a:t>design-based</a:t>
+            </a:r>
+            <a:r>
+              <a:rPr lang="en-US" sz="2800" dirty="0">
+                <a:cs typeface="Times New Roman" panose="02020603050405020304" pitchFamily="18" charset="0"/>
+              </a:rPr>
+              <a:t>) </a:t>
+            </a:r>
+          </a:p>
+          <a:p>
+            <a:r>
+              <a:rPr lang="en-US" sz="2800" dirty="0">
+                <a:cs typeface="Times New Roman" panose="02020603050405020304" pitchFamily="18" charset="0"/>
+              </a:rPr>
+              <a:t>Examples of </a:t>
+            </a:r>
+            <a:r>
+              <a:rPr lang="en-US" sz="2800" dirty="0">
+                <a:solidFill>
+                  <a:schemeClr val="accent3">
+                    <a:lumMod val="75000"/>
+                  </a:schemeClr>
+                </a:solidFill>
+                <a:cs typeface="Times New Roman" panose="02020603050405020304" pitchFamily="18" charset="0"/>
+              </a:rPr>
+              <a:t>model-based</a:t>
+            </a:r>
+            <a:r>
+              <a:rPr lang="en-US" sz="2800" dirty="0">
+                <a:cs typeface="Times New Roman" panose="02020603050405020304" pitchFamily="18" charset="0"/>
+              </a:rPr>
+              <a:t>: matching, controlling, IPW</a:t>
+            </a:r>
+          </a:p>
+          <a:p>
+            <a:pPr lvl="1"/>
+            <a:r>
+              <a:rPr lang="en-US" sz="2400" dirty="0">
+                <a:cs typeface="Times New Roman" panose="02020603050405020304" pitchFamily="18" charset="0"/>
+              </a:rPr>
+              <a:t>Requires a</a:t>
+            </a:r>
+            <a:r>
+              <a:rPr lang="en-US" sz="2400" dirty="0">
+                <a:solidFill>
+                  <a:schemeClr val="accent3">
+                    <a:lumMod val="75000"/>
+                  </a:schemeClr>
+                </a:solidFill>
+                <a:cs typeface="Times New Roman" panose="02020603050405020304" pitchFamily="18" charset="0"/>
+              </a:rPr>
+              <a:t> </a:t>
+            </a:r>
+            <a:r>
+              <a:rPr lang="en-US" sz="2400" b="1" dirty="0">
+                <a:solidFill>
+                  <a:schemeClr val="accent3">
+                    <a:lumMod val="75000"/>
+                  </a:schemeClr>
+                </a:solidFill>
+                <a:cs typeface="Times New Roman" panose="02020603050405020304" pitchFamily="18" charset="0"/>
+              </a:rPr>
+              <a:t>big assumption</a:t>
+            </a:r>
+            <a:r>
+              <a:rPr lang="en-US" sz="2400" dirty="0">
+                <a:cs typeface="Times New Roman" panose="02020603050405020304" pitchFamily="18" charset="0"/>
+              </a:rPr>
+              <a:t> about your DAG (and selection on </a:t>
+            </a:r>
+            <a:r>
+              <a:rPr lang="en-US" sz="2400" dirty="0" err="1">
+                <a:cs typeface="Times New Roman" panose="02020603050405020304" pitchFamily="18" charset="0"/>
+              </a:rPr>
+              <a:t>unobservables</a:t>
+            </a:r>
+            <a:r>
+              <a:rPr lang="en-US" sz="2400" dirty="0">
+                <a:cs typeface="Times New Roman" panose="02020603050405020304" pitchFamily="18" charset="0"/>
+              </a:rPr>
+              <a:t>)</a:t>
+            </a:r>
+          </a:p>
+          <a:p>
+            <a:pPr lvl="1"/>
+            <a:r>
+              <a:rPr lang="en-US" sz="2400" dirty="0">
+                <a:cs typeface="Times New Roman" panose="02020603050405020304" pitchFamily="18" charset="0"/>
+              </a:rPr>
+              <a:t>Can go as far as structural model approaches</a:t>
+            </a:r>
+          </a:p>
+          <a:p>
+            <a:r>
+              <a:rPr lang="en-US" sz="2800" dirty="0">
+                <a:cs typeface="Times New Roman" panose="02020603050405020304" pitchFamily="18" charset="0"/>
+              </a:rPr>
+              <a:t>Examples of </a:t>
+            </a:r>
+            <a:r>
+              <a:rPr lang="en-US" sz="2800" dirty="0">
+                <a:solidFill>
+                  <a:schemeClr val="accent2">
+                    <a:lumMod val="75000"/>
+                  </a:schemeClr>
+                </a:solidFill>
+                <a:cs typeface="Times New Roman" panose="02020603050405020304" pitchFamily="18" charset="0"/>
+              </a:rPr>
+              <a:t>design-based:</a:t>
+            </a:r>
+            <a:r>
+              <a:rPr lang="en-US" sz="2800" dirty="0">
+                <a:cs typeface="Times New Roman" panose="02020603050405020304" pitchFamily="18" charset="0"/>
+              </a:rPr>
+              <a:t> RCT, DID, IV</a:t>
+            </a:r>
+          </a:p>
+          <a:p>
+            <a:pPr lvl="1"/>
+            <a:r>
+              <a:rPr lang="en-US" sz="2400" dirty="0">
+                <a:cs typeface="Times New Roman" panose="02020603050405020304" pitchFamily="18" charset="0"/>
+              </a:rPr>
+              <a:t>Need a </a:t>
+            </a:r>
+            <a:r>
+              <a:rPr lang="en-US" sz="2400" b="1" dirty="0">
+                <a:solidFill>
+                  <a:schemeClr val="accent2">
+                    <a:lumMod val="75000"/>
+                  </a:schemeClr>
+                </a:solidFill>
+                <a:cs typeface="Times New Roman" panose="02020603050405020304" pitchFamily="18" charset="0"/>
+              </a:rPr>
+              <a:t>specific</a:t>
+            </a:r>
+            <a:r>
+              <a:rPr lang="en-US" sz="2400" dirty="0">
+                <a:cs typeface="Times New Roman" panose="02020603050405020304" pitchFamily="18" charset="0"/>
+              </a:rPr>
+              <a:t> set of data and </a:t>
+            </a:r>
+            <a:r>
+              <a:rPr lang="en-US" sz="2400" b="1" dirty="0">
+                <a:solidFill>
+                  <a:schemeClr val="accent2">
+                    <a:lumMod val="75000"/>
+                  </a:schemeClr>
+                </a:solidFill>
+                <a:cs typeface="Times New Roman" panose="02020603050405020304" pitchFamily="18" charset="0"/>
+              </a:rPr>
+              <a:t>circumstances</a:t>
+            </a:r>
+            <a:r>
+              <a:rPr lang="en-US" sz="2400" dirty="0">
+                <a:cs typeface="Times New Roman" panose="02020603050405020304" pitchFamily="18" charset="0"/>
+              </a:rPr>
+              <a:t> (policy change, instrument)</a:t>
+            </a:r>
+          </a:p>
+          <a:p>
+            <a:pPr lvl="1"/>
+            <a:r>
+              <a:rPr lang="en-US" sz="2400" dirty="0">
+                <a:cs typeface="Times New Roman" panose="02020603050405020304" pitchFamily="18" charset="0"/>
+              </a:rPr>
+              <a:t>Still making assumptions about an underlying model! But minimizing the set of assumptions and making them more transparent</a:t>
+            </a:r>
+          </a:p>
+          <a:p>
+            <a:pPr lvl="1"/>
+            <a:r>
+              <a:rPr lang="en-US" sz="2400" dirty="0">
+                <a:cs typeface="Times New Roman" panose="02020603050405020304" pitchFamily="18" charset="0"/>
+              </a:rPr>
+              <a:t>Typically relies on what’s referred to as </a:t>
+            </a:r>
+            <a:r>
+              <a:rPr lang="en-US" sz="2400" u="sng" dirty="0">
+                <a:cs typeface="Times New Roman" panose="02020603050405020304" pitchFamily="18" charset="0"/>
+              </a:rPr>
+              <a:t>quasi-random variation</a:t>
+            </a:r>
+          </a:p>
+          <a:p>
+            <a:pPr lvl="1"/>
+            <a:r>
+              <a:rPr lang="en-US" sz="2400" b="1" u="sng" dirty="0">
+                <a:cs typeface="Times New Roman" panose="02020603050405020304" pitchFamily="18" charset="0"/>
+              </a:rPr>
+              <a:t>This is where we’re headed</a:t>
+            </a:r>
+          </a:p>
+          <a:p>
+            <a:endParaRPr lang="en-US" sz="2800" dirty="0">
+              <a:cs typeface="Times New Roman" panose="02020603050405020304" pitchFamily="18" charset="0"/>
+            </a:endParaRPr>
+          </a:p>
+        </p:txBody>
+      </p:sp>
+    </p:spTree>
+    <p:extLst>
+      <p:ext uri="{BB962C8B-B14F-4D97-AF65-F5344CB8AC3E}">
+        <p14:creationId xmlns:p14="http://schemas.microsoft.com/office/powerpoint/2010/main" val="2824117371"/>
+      </p:ext>
+    </p:extLst>
+  </p:cSld>
+  <p:clrMapOvr>
+    <a:masterClrMapping/>
+  </p:clrMapOvr>
+</p:sld>
+</file>
+
+<file path=ppt/slides/slide78.xml><?xml version="1.0" encoding="utf-8"?>
+<p:sld xmlns:a="http://schemas.openxmlformats.org/drawingml/2006/main" xmlns:r="http://schemas.openxmlformats.org/officeDocument/2006/relationships" xmlns:p="http://schemas.openxmlformats.org/presentationml/2006/main">
+  <p:cSld>
+    <p:spTree>
+      <p:nvGrpSpPr>
+        <p:cNvPr id="1" name=""/>
+        <p:cNvGrpSpPr/>
+        <p:nvPr/>
+      </p:nvGrpSpPr>
+      <p:grpSpPr>
+        <a:xfrm>
+          <a:off x="0" y="0"/>
+          <a:ext cx="0" cy="0"/>
+          <a:chOff x="0" y="0"/>
+          <a:chExt cx="0" cy="0"/>
+        </a:xfrm>
+      </p:grpSpPr>
+      <p:sp>
+        <p:nvSpPr>
           <p:cNvPr id="2" name="Title 1"/>
           <p:cNvSpPr>
             <a:spLocks noGrp="1"/>
@@ -31198,7 +31929,7 @@
 </p:sld>
 </file>
 
-<file path=ppt/slides/slide77.xml><?xml version="1.0" encoding="utf-8"?>
+<file path=ppt/slides/slide79.xml><?xml version="1.0" encoding="utf-8"?>
 <p:sld xmlns:a="http://schemas.openxmlformats.org/drawingml/2006/main" xmlns:r="http://schemas.openxmlformats.org/officeDocument/2006/relationships" xmlns:p="http://schemas.openxmlformats.org/presentationml/2006/main">
   <p:cSld>
     <p:spTree>
@@ -31339,7 +32070,7 @@
                     <m:sSub>
                       <m:sSubPr>
                         <m:ctrlPr>
-                          <a:rPr lang="en-US" sz="2600" b="0" i="1" smtClean="0">
+                          <a:rPr lang="en-US" sz="2600" b="0" i="0" smtClean="0">
                             <a:latin typeface="Cambria Math" panose="02040503050406030204" pitchFamily="18" charset="0"/>
                             <a:cs typeface="Times New Roman" panose="02020603050405020304" pitchFamily="18" charset="0"/>
                           </a:rPr>
@@ -31774,438 +32505,6 @@
 </p:sld>
 </file>
 
-<file path=ppt/slides/slide78.xml><?xml version="1.0" encoding="utf-8"?>
-<p:sld xmlns:a="http://schemas.openxmlformats.org/drawingml/2006/main" xmlns:r="http://schemas.openxmlformats.org/officeDocument/2006/relationships" xmlns:p="http://schemas.openxmlformats.org/presentationml/2006/main">
-  <p:cSld>
-    <p:spTree>
-      <p:nvGrpSpPr>
-        <p:cNvPr id="1" name=""/>
-        <p:cNvGrpSpPr/>
-        <p:nvPr/>
-      </p:nvGrpSpPr>
-      <p:grpSpPr>
-        <a:xfrm>
-          <a:off x="0" y="0"/>
-          <a:ext cx="0" cy="0"/>
-          <a:chOff x="0" y="0"/>
-          <a:chExt cx="0" cy="0"/>
-        </a:xfrm>
-      </p:grpSpPr>
-      <p:sp>
-        <p:nvSpPr>
-          <p:cNvPr id="2" name="Title 1"/>
-          <p:cNvSpPr>
-            <a:spLocks noGrp="1"/>
-          </p:cNvSpPr>
-          <p:nvPr>
-            <p:ph type="title"/>
-          </p:nvPr>
-        </p:nvSpPr>
-        <p:spPr>
-          <a:xfrm>
-            <a:off x="609600" y="337392"/>
-            <a:ext cx="10439400" cy="624840"/>
-          </a:xfrm>
-        </p:spPr>
-        <p:txBody>
-          <a:bodyPr>
-            <a:noAutofit/>
-          </a:bodyPr>
-          <a:lstStyle/>
-          <a:p>
-            <a:r>
-              <a:rPr lang="en-US" sz="3600" dirty="0">
-                <a:latin typeface="Times New Roman" panose="02020603050405020304" pitchFamily="18" charset="0"/>
-                <a:cs typeface="Times New Roman" panose="02020603050405020304" pitchFamily="18" charset="0"/>
-              </a:rPr>
-              <a:t>Three Examples of Models</a:t>
-            </a:r>
-          </a:p>
-        </p:txBody>
-      </p:sp>
-      <p:sp>
-        <p:nvSpPr>
-          <p:cNvPr id="3" name="Content Placeholder 2"/>
-          <p:cNvSpPr>
-            <a:spLocks noGrp="1"/>
-          </p:cNvSpPr>
-          <p:nvPr>
-            <p:ph idx="1"/>
-          </p:nvPr>
-        </p:nvSpPr>
-        <p:spPr>
-          <a:xfrm>
-            <a:off x="609601" y="1066801"/>
-            <a:ext cx="10015390" cy="5141388"/>
-          </a:xfrm>
-        </p:spPr>
-        <p:txBody>
-          <a:bodyPr>
-            <a:noAutofit/>
-          </a:bodyPr>
-          <a:lstStyle/>
-          <a:p>
-            <a:pPr marL="788670" lvl="1" indent="-514350">
-              <a:buFont typeface="+mj-lt"/>
-              <a:buAutoNum type="arabicPeriod"/>
-            </a:pPr>
-            <a:r>
-              <a:rPr lang="en-US" sz="2600" dirty="0">
-                <a:cs typeface="Times New Roman" panose="02020603050405020304" pitchFamily="18" charset="0"/>
-              </a:rPr>
-              <a:t>Explicit, approximation</a:t>
-            </a:r>
-          </a:p>
-          <a:p>
-            <a:pPr marL="788670" lvl="1" indent="-514350">
-              <a:buFont typeface="+mj-lt"/>
-              <a:buAutoNum type="arabicPeriod"/>
-            </a:pPr>
-            <a:r>
-              <a:rPr lang="en-US" sz="2600" u="sng" dirty="0">
-                <a:cs typeface="Times New Roman" panose="02020603050405020304" pitchFamily="18" charset="0"/>
-              </a:rPr>
-              <a:t>Explicit, (more) exact</a:t>
-            </a:r>
-          </a:p>
-          <a:p>
-            <a:pPr marL="788670" lvl="1" indent="-514350">
-              <a:buFont typeface="+mj-lt"/>
-              <a:buAutoNum type="arabicPeriod"/>
-            </a:pPr>
-            <a:endParaRPr lang="en-US" sz="2600" u="sng" dirty="0">
-              <a:cs typeface="Times New Roman" panose="02020603050405020304" pitchFamily="18" charset="0"/>
-            </a:endParaRPr>
-          </a:p>
-          <a:p>
-            <a:pPr marL="274320" lvl="1" indent="0">
-              <a:buNone/>
-            </a:pPr>
-            <a:r>
-              <a:rPr lang="en-US" sz="2600" dirty="0">
-                <a:cs typeface="Times New Roman" panose="02020603050405020304" pitchFamily="18" charset="0"/>
-              </a:rPr>
-              <a:t>We could go to the other extreme, and set a full model (e.g., structural model) </a:t>
-            </a:r>
-          </a:p>
-          <a:p>
-            <a:pPr lvl="1"/>
-            <a:r>
-              <a:rPr lang="en-US" sz="2600" dirty="0">
-                <a:cs typeface="Times New Roman" panose="02020603050405020304" pitchFamily="18" charset="0"/>
-              </a:rPr>
-              <a:t>Specify the complete data generating process (e.g., all utility functions for each individual-outcome pair + unobserved heterogeneity in tastes) </a:t>
-            </a:r>
-          </a:p>
-          <a:p>
-            <a:pPr lvl="1"/>
-            <a:r>
-              <a:rPr lang="en-US" sz="2600" dirty="0">
-                <a:cs typeface="Times New Roman" panose="02020603050405020304" pitchFamily="18" charset="0"/>
-              </a:rPr>
-              <a:t>Doing so yields a fully-specified (over-specified) demand system that identifies many parameters</a:t>
-            </a:r>
-          </a:p>
-          <a:p>
-            <a:pPr lvl="1"/>
-            <a:r>
-              <a:rPr lang="en-US" sz="2600" dirty="0">
-                <a:cs typeface="Times New Roman" panose="02020603050405020304" pitchFamily="18" charset="0"/>
-              </a:rPr>
-              <a:t>Estimation is extremely complicated</a:t>
-            </a:r>
-          </a:p>
-          <a:p>
-            <a:pPr lvl="1"/>
-            <a:r>
-              <a:rPr lang="en-US" sz="2600" dirty="0">
-                <a:cs typeface="Times New Roman" panose="02020603050405020304" pitchFamily="18" charset="0"/>
-              </a:rPr>
-              <a:t>Each identified parameter requires a unique identifying assumption – strong set of assumptions! </a:t>
-            </a:r>
-          </a:p>
-        </p:txBody>
-      </p:sp>
-    </p:spTree>
-    <p:extLst>
-      <p:ext uri="{BB962C8B-B14F-4D97-AF65-F5344CB8AC3E}">
-        <p14:creationId xmlns:p14="http://schemas.microsoft.com/office/powerpoint/2010/main" val="2035017464"/>
-      </p:ext>
-    </p:extLst>
-  </p:cSld>
-  <p:clrMapOvr>
-    <a:masterClrMapping/>
-  </p:clrMapOvr>
-</p:sld>
-</file>
-
-<file path=ppt/slides/slide79.xml><?xml version="1.0" encoding="utf-8"?>
-<p:sld xmlns:a="http://schemas.openxmlformats.org/drawingml/2006/main" xmlns:r="http://schemas.openxmlformats.org/officeDocument/2006/relationships" xmlns:p="http://schemas.openxmlformats.org/presentationml/2006/main">
-  <p:cSld>
-    <p:spTree>
-      <p:nvGrpSpPr>
-        <p:cNvPr id="1" name=""/>
-        <p:cNvGrpSpPr/>
-        <p:nvPr/>
-      </p:nvGrpSpPr>
-      <p:grpSpPr>
-        <a:xfrm>
-          <a:off x="0" y="0"/>
-          <a:ext cx="0" cy="0"/>
-          <a:chOff x="0" y="0"/>
-          <a:chExt cx="0" cy="0"/>
-        </a:xfrm>
-      </p:grpSpPr>
-      <p:sp>
-        <p:nvSpPr>
-          <p:cNvPr id="2" name="Title 1"/>
-          <p:cNvSpPr>
-            <a:spLocks noGrp="1"/>
-          </p:cNvSpPr>
-          <p:nvPr>
-            <p:ph type="title"/>
-          </p:nvPr>
-        </p:nvSpPr>
-        <p:spPr>
-          <a:xfrm>
-            <a:off x="609600" y="337392"/>
-            <a:ext cx="10439400" cy="624840"/>
-          </a:xfrm>
-        </p:spPr>
-        <p:txBody>
-          <a:bodyPr>
-            <a:noAutofit/>
-          </a:bodyPr>
-          <a:lstStyle/>
-          <a:p>
-            <a:r>
-              <a:rPr lang="en-US" sz="3600" dirty="0">
-                <a:cs typeface="Times New Roman" panose="02020603050405020304" pitchFamily="18" charset="0"/>
-              </a:rPr>
-              <a:t>Relying on Theoretical Frameworks</a:t>
-            </a:r>
-            <a:endParaRPr lang="en-US" sz="3600" dirty="0">
-              <a:latin typeface="Times New Roman" panose="02020603050405020304" pitchFamily="18" charset="0"/>
-              <a:cs typeface="Times New Roman" panose="02020603050405020304" pitchFamily="18" charset="0"/>
-            </a:endParaRPr>
-          </a:p>
-        </p:txBody>
-      </p:sp>
-      <mc:AlternateContent xmlns:mc="http://schemas.openxmlformats.org/markup-compatibility/2006" xmlns:a14="http://schemas.microsoft.com/office/drawing/2010/main">
-        <mc:Choice Requires="a14">
-          <p:sp>
-            <p:nvSpPr>
-              <p:cNvPr id="3" name="Content Placeholder 2"/>
-              <p:cNvSpPr>
-                <a:spLocks noGrp="1"/>
-              </p:cNvSpPr>
-              <p:nvPr>
-                <p:ph idx="1"/>
-              </p:nvPr>
-            </p:nvSpPr>
-            <p:spPr>
-              <a:xfrm>
-                <a:off x="762001" y="1066801"/>
-                <a:ext cx="9862990" cy="5141388"/>
-              </a:xfrm>
-            </p:spPr>
-            <p:txBody>
-              <a:bodyPr>
-                <a:noAutofit/>
-              </a:bodyPr>
-              <a:lstStyle/>
-              <a:p>
-                <a:r>
-                  <a:rPr lang="en-US" sz="2400" dirty="0">
-                    <a:cs typeface="Times New Roman" panose="02020603050405020304" pitchFamily="18" charset="0"/>
-                  </a:rPr>
-                  <a:t>Almost all frameworks are </a:t>
-                </a:r>
-                <a:r>
-                  <a:rPr lang="en-US" sz="2400" b="1" dirty="0">
-                    <a:solidFill>
-                      <a:schemeClr val="accent2">
-                        <a:lumMod val="75000"/>
-                      </a:schemeClr>
-                    </a:solidFill>
-                    <a:cs typeface="Times New Roman" panose="02020603050405020304" pitchFamily="18" charset="0"/>
-                  </a:rPr>
-                  <a:t>theories of change </a:t>
-                </a:r>
-                <a:r>
-                  <a:rPr lang="en-US" sz="2400" dirty="0">
-                    <a:cs typeface="Times New Roman" panose="02020603050405020304" pitchFamily="18" charset="0"/>
-                  </a:rPr>
-                  <a:t>(causal pathways)</a:t>
-                </a:r>
-              </a:p>
-              <a:p>
-                <a:r>
-                  <a:rPr lang="en-US" sz="2400" dirty="0">
-                    <a:cs typeface="Times New Roman" panose="02020603050405020304" pitchFamily="18" charset="0"/>
-                  </a:rPr>
-                  <a:t>But how can a framework motivate a design?</a:t>
-                </a:r>
-              </a:p>
-              <a:p>
-                <a:pPr marL="731520" lvl="1" indent="-457200">
-                  <a:buFont typeface="+mj-lt"/>
-                  <a:buAutoNum type="arabicPeriod"/>
-                </a:pPr>
-                <a:r>
-                  <a:rPr lang="en-US" sz="2200" dirty="0">
-                    <a:cs typeface="Times New Roman" panose="02020603050405020304" pitchFamily="18" charset="0"/>
-                  </a:rPr>
-                  <a:t>Write your research question as </a:t>
-                </a:r>
-                <a:r>
-                  <a:rPr lang="en-US" sz="2200" b="1" dirty="0">
-                    <a:solidFill>
-                      <a:schemeClr val="accent2">
-                        <a:lumMod val="75000"/>
-                      </a:schemeClr>
-                    </a:solidFill>
-                    <a:cs typeface="Times New Roman" panose="02020603050405020304" pitchFamily="18" charset="0"/>
-                  </a:rPr>
-                  <a:t>explicitly</a:t>
-                </a:r>
-                <a:r>
-                  <a:rPr lang="en-US" sz="2200" b="1" dirty="0">
-                    <a:cs typeface="Times New Roman" panose="02020603050405020304" pitchFamily="18" charset="0"/>
-                  </a:rPr>
-                  <a:t> </a:t>
-                </a:r>
-                <a:r>
-                  <a:rPr lang="en-US" sz="2200" dirty="0">
-                    <a:cs typeface="Times New Roman" panose="02020603050405020304" pitchFamily="18" charset="0"/>
-                  </a:rPr>
-                  <a:t>as possible</a:t>
-                </a:r>
-              </a:p>
-              <a:p>
-                <a:pPr marL="731520" lvl="1" indent="-457200">
-                  <a:buFont typeface="+mj-lt"/>
-                  <a:buAutoNum type="arabicPeriod"/>
-                </a:pPr>
-                <a:r>
-                  <a:rPr lang="en-US" sz="2200" dirty="0">
-                    <a:cs typeface="Times New Roman" panose="02020603050405020304" pitchFamily="18" charset="0"/>
-                  </a:rPr>
-                  <a:t>Draw a DAG! Take time thinking about open back- and front-doors</a:t>
-                </a:r>
-              </a:p>
-              <a:p>
-                <a:pPr marL="731520" lvl="1" indent="-457200">
-                  <a:buFont typeface="+mj-lt"/>
-                  <a:buAutoNum type="arabicPeriod"/>
-                </a:pPr>
-                <a:r>
-                  <a:rPr lang="en-US" sz="2200" dirty="0">
-                    <a:cs typeface="Times New Roman" panose="02020603050405020304" pitchFamily="18" charset="0"/>
-                  </a:rPr>
-                  <a:t>Maybe build the DAG into a theoretical model</a:t>
-                </a:r>
-              </a:p>
-              <a:p>
-                <a:pPr marL="731520" lvl="1" indent="-457200">
-                  <a:buFont typeface="+mj-lt"/>
-                  <a:buAutoNum type="arabicPeriod"/>
-                </a:pPr>
-                <a:r>
-                  <a:rPr lang="en-US" sz="2200" dirty="0">
-                    <a:cs typeface="Times New Roman" panose="02020603050405020304" pitchFamily="18" charset="0"/>
-                  </a:rPr>
-                  <a:t>DAG + model </a:t>
-                </a:r>
-                <a14:m>
-                  <m:oMath xmlns:m="http://schemas.openxmlformats.org/officeDocument/2006/math">
-                    <m:r>
-                      <a:rPr lang="en-CA" sz="2200" b="0" i="1" smtClean="0">
-                        <a:latin typeface="Cambria Math" panose="02040503050406030204" pitchFamily="18" charset="0"/>
-                        <a:cs typeface="Times New Roman" panose="02020603050405020304" pitchFamily="18" charset="0"/>
-                      </a:rPr>
-                      <m:t>⇒</m:t>
-                    </m:r>
-                  </m:oMath>
-                </a14:m>
-                <a:r>
-                  <a:rPr lang="en-US" sz="2200" dirty="0">
-                    <a:cs typeface="Times New Roman" panose="02020603050405020304" pitchFamily="18" charset="0"/>
-                  </a:rPr>
-                  <a:t> Regressions, assumptions, even </a:t>
-                </a:r>
-                <a:r>
-                  <a:rPr lang="en-US" sz="2200" b="1" dirty="0">
-                    <a:solidFill>
-                      <a:schemeClr val="accent3">
-                        <a:lumMod val="75000"/>
-                      </a:schemeClr>
-                    </a:solidFill>
-                    <a:cs typeface="Times New Roman" panose="02020603050405020304" pitchFamily="18" charset="0"/>
-                  </a:rPr>
-                  <a:t>identification</a:t>
-                </a:r>
-                <a:r>
-                  <a:rPr lang="en-US" sz="2200" dirty="0">
-                    <a:cs typeface="Times New Roman" panose="02020603050405020304" pitchFamily="18" charset="0"/>
-                  </a:rPr>
-                  <a:t>!</a:t>
-                </a:r>
-              </a:p>
-            </p:txBody>
-          </p:sp>
-        </mc:Choice>
-        <mc:Fallback xmlns="">
-          <p:sp>
-            <p:nvSpPr>
-              <p:cNvPr id="3" name="Content Placeholder 2"/>
-              <p:cNvSpPr>
-                <a:spLocks noGrp="1" noRot="1" noChangeAspect="1" noMove="1" noResize="1" noEditPoints="1" noAdjustHandles="1" noChangeArrowheads="1" noChangeShapeType="1" noTextEdit="1"/>
-              </p:cNvSpPr>
-              <p:nvPr>
-                <p:ph idx="1"/>
-              </p:nvPr>
-            </p:nvSpPr>
-            <p:spPr>
-              <a:xfrm>
-                <a:off x="762001" y="1066801"/>
-                <a:ext cx="9862990" cy="5141388"/>
-              </a:xfrm>
-              <a:blipFill>
-                <a:blip r:embed="rId3"/>
-                <a:stretch>
-                  <a:fillRect l="-433" t="-1305"/>
-                </a:stretch>
-              </a:blipFill>
-            </p:spPr>
-            <p:txBody>
-              <a:bodyPr/>
-              <a:lstStyle/>
-              <a:p>
-                <a:r>
-                  <a:rPr lang="en-US">
-                    <a:noFill/>
-                  </a:rPr>
-                  <a:t> </a:t>
-                </a:r>
-              </a:p>
-            </p:txBody>
-          </p:sp>
-        </mc:Fallback>
-      </mc:AlternateContent>
-    </p:spTree>
-    <p:extLst>
-      <p:ext uri="{BB962C8B-B14F-4D97-AF65-F5344CB8AC3E}">
-        <p14:creationId xmlns:p14="http://schemas.microsoft.com/office/powerpoint/2010/main" val="1507514134"/>
-      </p:ext>
-    </p:extLst>
-  </p:cSld>
-  <p:clrMapOvr>
-    <a:masterClrMapping/>
-  </p:clrMapOvr>
-</p:sld>
-</file>
-
 <file path=ppt/slides/slide8.xml><?xml version="1.0" encoding="utf-8"?>
 <p:sld xmlns:a="http://schemas.openxmlformats.org/drawingml/2006/main" xmlns:r="http://schemas.openxmlformats.org/officeDocument/2006/relationships" xmlns:p="http://schemas.openxmlformats.org/presentationml/2006/main">
   <p:cSld>
@@ -33180,7 +33479,7 @@
                 <a:latin typeface="Times New Roman" panose="02020603050405020304" pitchFamily="18" charset="0"/>
                 <a:cs typeface="Times New Roman" panose="02020603050405020304" pitchFamily="18" charset="0"/>
               </a:rPr>
-              <a:t>Three Examples of Models – why design-based?</a:t>
+              <a:t>Three Examples of Models</a:t>
             </a:r>
           </a:p>
         </p:txBody>
@@ -33224,22 +33523,10 @@
               <a:buAutoNum type="arabicPeriod"/>
             </a:pPr>
             <a:r>
-              <a:rPr lang="en-US" sz="2600" dirty="0">
-                <a:cs typeface="Times New Roman" panose="02020603050405020304" pitchFamily="18" charset="0"/>
-              </a:rPr>
-              <a:t>Explicit, (more) exact</a:t>
-            </a:r>
-          </a:p>
-          <a:p>
-            <a:pPr marL="788670" lvl="1" indent="-514350">
-              <a:buFont typeface="+mj-lt"/>
-              <a:buAutoNum type="arabicPeriod"/>
-            </a:pPr>
-            <a:r>
               <a:rPr lang="en-US" sz="2600" u="sng" dirty="0">
                 <a:cs typeface="Times New Roman" panose="02020603050405020304" pitchFamily="18" charset="0"/>
               </a:rPr>
-              <a:t>Implicit</a:t>
+              <a:t>Explicit, (more) exact</a:t>
             </a:r>
           </a:p>
           <a:p>
@@ -33259,26 +33546,16 @@
               <a:rPr lang="en-US" sz="2600" dirty="0">
                 <a:cs typeface="Times New Roman" panose="02020603050405020304" pitchFamily="18" charset="0"/>
               </a:rPr>
-              <a:t>So frequently, we do something that’s more in the middle </a:t>
-            </a:r>
-          </a:p>
-          <a:p>
-            <a:pPr marL="274320" lvl="1" indent="0">
-              <a:buNone/>
-            </a:pPr>
-            <a:endParaRPr lang="en-US" sz="2600" dirty="0">
-              <a:cs typeface="Times New Roman" panose="02020603050405020304" pitchFamily="18" charset="0"/>
-            </a:endParaRPr>
-          </a:p>
-          <a:p>
-            <a:pPr marL="274320" lvl="1" indent="0">
-              <a:buNone/>
-            </a:pPr>
+              <a:t>We could go to the other extreme, and set a full model (e.g., structural model) </a:t>
+            </a:r>
+          </a:p>
+          <a:p>
+            <a:pPr lvl="1"/>
             <a:r>
               <a:rPr lang="en-US" sz="2600" dirty="0">
                 <a:cs typeface="Times New Roman" panose="02020603050405020304" pitchFamily="18" charset="0"/>
               </a:rPr>
-              <a:t>Rather than specify a behavioral model explicitly, we focus on a single causal relationship and identify it using quasi-exogenous variation: </a:t>
+              <a:t>Specify the complete data generating process (e.g., all utility functions for each individual-outcome pair + unobserved heterogeneity in tastes) </a:t>
             </a:r>
           </a:p>
           <a:p>
@@ -33287,7 +33564,7 @@
               <a:rPr lang="en-US" sz="2600" dirty="0">
                 <a:cs typeface="Times New Roman" panose="02020603050405020304" pitchFamily="18" charset="0"/>
               </a:rPr>
-              <a:t>What is the effect of job training on employment/income? Find a state that randomized people to take job training and evaluate their outcomes relative to a control state</a:t>
+              <a:t>Doing so yields a fully-specified (over-specified) demand system that identifies many parameters</a:t>
             </a:r>
           </a:p>
           <a:p>
@@ -33296,7 +33573,16 @@
               <a:rPr lang="en-US" sz="2600" dirty="0">
                 <a:cs typeface="Times New Roman" panose="02020603050405020304" pitchFamily="18" charset="0"/>
               </a:rPr>
-              <a:t>What are the advantages/disadvantages of this? </a:t>
+              <a:t>Estimation is extremely complicated</a:t>
+            </a:r>
+          </a:p>
+          <a:p>
+            <a:pPr lvl="1"/>
+            <a:r>
+              <a:rPr lang="en-US" sz="2600" dirty="0">
+                <a:cs typeface="Times New Roman" panose="02020603050405020304" pitchFamily="18" charset="0"/>
+              </a:rPr>
+              <a:t>Each identified parameter requires a unique identifying assumption – strong set of assumptions! </a:t>
             </a:r>
           </a:p>
         </p:txBody>
@@ -33304,7 +33590,7 @@
     </p:spTree>
     <p:extLst>
       <p:ext uri="{BB962C8B-B14F-4D97-AF65-F5344CB8AC3E}">
-        <p14:creationId xmlns:p14="http://schemas.microsoft.com/office/powerpoint/2010/main" val="4230878884"/>
+        <p14:creationId xmlns:p14="http://schemas.microsoft.com/office/powerpoint/2010/main" val="2035017464"/>
       </p:ext>
     </p:extLst>
   </p:cSld>
@@ -33355,158 +33641,223 @@
           <a:p>
             <a:r>
               <a:rPr lang="en-US" sz="3600" dirty="0">
-                <a:latin typeface="Times New Roman" panose="02020603050405020304" pitchFamily="18" charset="0"/>
                 <a:cs typeface="Times New Roman" panose="02020603050405020304" pitchFamily="18" charset="0"/>
               </a:rPr>
-              <a:t>So what do we get from design-based inference?</a:t>
-            </a:r>
-          </a:p>
-        </p:txBody>
-      </p:sp>
-      <p:sp>
-        <p:nvSpPr>
-          <p:cNvPr id="3" name="Content Placeholder 2"/>
-          <p:cNvSpPr>
-            <a:spLocks noGrp="1"/>
-          </p:cNvSpPr>
-          <p:nvPr>
-            <p:ph idx="1"/>
-          </p:nvPr>
-        </p:nvSpPr>
-        <p:spPr>
-          <a:xfrm>
-            <a:off x="609601" y="1066801"/>
-            <a:ext cx="10015390" cy="5141388"/>
-          </a:xfrm>
-        </p:spPr>
-        <p:txBody>
-          <a:bodyPr>
-            <a:noAutofit/>
-          </a:bodyPr>
-          <a:lstStyle/>
-          <a:p>
-            <a:pPr marL="274320" lvl="1" indent="0">
-              <a:buNone/>
-            </a:pPr>
-            <a:r>
-              <a:rPr lang="en-US" sz="2600" b="1" dirty="0">
-                <a:cs typeface="Times New Roman" panose="02020603050405020304" pitchFamily="18" charset="0"/>
-              </a:rPr>
-              <a:t>Counterfactuals and causality</a:t>
-            </a:r>
-          </a:p>
-          <a:p>
-            <a:pPr lvl="1"/>
-            <a:r>
-              <a:rPr lang="en-US" sz="2600" dirty="0">
-                <a:cs typeface="Times New Roman" panose="02020603050405020304" pitchFamily="18" charset="0"/>
-              </a:rPr>
-              <a:t>In many ways, the identification </a:t>
-            </a:r>
-            <a:r>
-              <a:rPr lang="en-US" sz="2600" i="1" dirty="0">
-                <a:cs typeface="Times New Roman" panose="02020603050405020304" pitchFamily="18" charset="0"/>
-              </a:rPr>
-              <a:t>becomes</a:t>
-            </a:r>
-            <a:r>
-              <a:rPr lang="en-US" sz="2600" dirty="0">
-                <a:cs typeface="Times New Roman" panose="02020603050405020304" pitchFamily="18" charset="0"/>
-              </a:rPr>
-              <a:t> the research design</a:t>
-            </a:r>
-          </a:p>
-          <a:p>
-            <a:pPr lvl="1"/>
-            <a:r>
-              <a:rPr lang="en-US" sz="2600" dirty="0">
-                <a:cs typeface="Times New Roman" panose="02020603050405020304" pitchFamily="18" charset="0"/>
-              </a:rPr>
-              <a:t>It defines the counterfactual estimation when the design is credible</a:t>
-            </a:r>
-          </a:p>
-          <a:p>
-            <a:pPr lvl="1"/>
-            <a:endParaRPr lang="en-US" sz="2600" dirty="0">
+              <a:t>Relying on Theoretical Frameworks</a:t>
+            </a:r>
+            <a:endParaRPr lang="en-US" sz="3600" dirty="0">
+              <a:latin typeface="Times New Roman" panose="02020603050405020304" pitchFamily="18" charset="0"/>
               <a:cs typeface="Times New Roman" panose="02020603050405020304" pitchFamily="18" charset="0"/>
             </a:endParaRPr>
           </a:p>
-          <a:p>
-            <a:pPr marL="274320" lvl="1" indent="0">
-              <a:buNone/>
-            </a:pPr>
-            <a:r>
-              <a:rPr lang="en-US" sz="2600" b="1" dirty="0">
-                <a:cs typeface="Times New Roman" panose="02020603050405020304" pitchFamily="18" charset="0"/>
-              </a:rPr>
-              <a:t>Descriptive + Causal Evidence</a:t>
-            </a:r>
-          </a:p>
-          <a:p>
-            <a:pPr lvl="1"/>
-            <a:r>
-              <a:rPr lang="en-US" sz="2600" dirty="0">
-                <a:cs typeface="Times New Roman" panose="02020603050405020304" pitchFamily="18" charset="0"/>
-              </a:rPr>
-              <a:t>Without a full structural approach, many papers become “storytelling” </a:t>
-            </a:r>
-          </a:p>
-          <a:p>
-            <a:pPr lvl="1"/>
-            <a:r>
-              <a:rPr lang="en-US" sz="2600" dirty="0">
-                <a:cs typeface="Times New Roman" panose="02020603050405020304" pitchFamily="18" charset="0"/>
-              </a:rPr>
-              <a:t>You present a set of descriptive + causal evidence, sometimes under the umbrella of a formal model (“applied theory”) and sometimes just as a narrative</a:t>
-            </a:r>
-          </a:p>
-          <a:p>
-            <a:pPr lvl="1"/>
-            <a:endParaRPr lang="en-US" sz="2600" dirty="0">
-              <a:cs typeface="Times New Roman" panose="02020603050405020304" pitchFamily="18" charset="0"/>
-            </a:endParaRPr>
-          </a:p>
-          <a:p>
-            <a:pPr marL="274320" lvl="1" indent="0">
-              <a:buNone/>
-            </a:pPr>
-            <a:r>
-              <a:rPr lang="en-US" sz="2600" b="1" dirty="0">
-                <a:cs typeface="Times New Roman" panose="02020603050405020304" pitchFamily="18" charset="0"/>
-              </a:rPr>
-              <a:t>Replicability </a:t>
-            </a:r>
-          </a:p>
-          <a:p>
-            <a:pPr lvl="1"/>
-            <a:r>
-              <a:rPr lang="en-US" sz="2600" dirty="0">
-                <a:cs typeface="Times New Roman" panose="02020603050405020304" pitchFamily="18" charset="0"/>
-              </a:rPr>
-              <a:t>Credible replication of your own results</a:t>
-            </a:r>
-          </a:p>
-          <a:p>
-            <a:pPr lvl="1"/>
-            <a:r>
-              <a:rPr lang="en-US" sz="2600" dirty="0">
-                <a:cs typeface="Times New Roman" panose="02020603050405020304" pitchFamily="18" charset="0"/>
-              </a:rPr>
-              <a:t>Credible replication of results in other contexts/data/etc.</a:t>
-            </a:r>
-          </a:p>
-          <a:p>
-            <a:pPr lvl="1"/>
-            <a:endParaRPr lang="en-US" sz="2600" dirty="0">
-              <a:cs typeface="Times New Roman" panose="02020603050405020304" pitchFamily="18" charset="0"/>
-            </a:endParaRPr>
-          </a:p>
-        </p:txBody>
-      </p:sp>
+        </p:txBody>
+      </p:sp>
+      <mc:AlternateContent xmlns:mc="http://schemas.openxmlformats.org/markup-compatibility/2006" xmlns:a14="http://schemas.microsoft.com/office/drawing/2010/main">
+        <mc:Choice Requires="a14">
+          <p:sp>
+            <p:nvSpPr>
+              <p:cNvPr id="3" name="Content Placeholder 2"/>
+              <p:cNvSpPr>
+                <a:spLocks noGrp="1"/>
+              </p:cNvSpPr>
+              <p:nvPr>
+                <p:ph idx="1"/>
+              </p:nvPr>
+            </p:nvSpPr>
+            <p:spPr>
+              <a:xfrm>
+                <a:off x="762001" y="1066801"/>
+                <a:ext cx="9862990" cy="5141388"/>
+              </a:xfrm>
+            </p:spPr>
+            <p:txBody>
+              <a:bodyPr>
+                <a:noAutofit/>
+              </a:bodyPr>
+              <a:lstStyle/>
+              <a:p>
+                <a:r>
+                  <a:rPr lang="en-US" sz="2400" dirty="0">
+                    <a:cs typeface="Times New Roman" panose="02020603050405020304" pitchFamily="18" charset="0"/>
+                  </a:rPr>
+                  <a:t>Almost all frameworks are </a:t>
+                </a:r>
+                <a:r>
+                  <a:rPr lang="en-US" sz="2400" b="1" dirty="0">
+                    <a:solidFill>
+                      <a:schemeClr val="accent2">
+                        <a:lumMod val="75000"/>
+                      </a:schemeClr>
+                    </a:solidFill>
+                    <a:cs typeface="Times New Roman" panose="02020603050405020304" pitchFamily="18" charset="0"/>
+                  </a:rPr>
+                  <a:t>theories of change </a:t>
+                </a:r>
+                <a:r>
+                  <a:rPr lang="en-US" sz="2400" dirty="0">
+                    <a:cs typeface="Times New Roman" panose="02020603050405020304" pitchFamily="18" charset="0"/>
+                  </a:rPr>
+                  <a:t>(causal pathways)</a:t>
+                </a:r>
+              </a:p>
+              <a:p>
+                <a:r>
+                  <a:rPr lang="en-US" sz="2400" dirty="0">
+                    <a:cs typeface="Times New Roman" panose="02020603050405020304" pitchFamily="18" charset="0"/>
+                  </a:rPr>
+                  <a:t>But how can a framework motivate a design?</a:t>
+                </a:r>
+              </a:p>
+              <a:p>
+                <a:pPr marL="731520" lvl="1" indent="-457200">
+                  <a:buFont typeface="+mj-lt"/>
+                  <a:buAutoNum type="arabicPeriod"/>
+                </a:pPr>
+                <a:r>
+                  <a:rPr lang="en-US" sz="2200" dirty="0">
+                    <a:cs typeface="Times New Roman" panose="02020603050405020304" pitchFamily="18" charset="0"/>
+                  </a:rPr>
+                  <a:t>Write your research question as </a:t>
+                </a:r>
+                <a:r>
+                  <a:rPr lang="en-US" sz="2200" b="1" dirty="0">
+                    <a:solidFill>
+                      <a:schemeClr val="accent2">
+                        <a:lumMod val="75000"/>
+                      </a:schemeClr>
+                    </a:solidFill>
+                    <a:cs typeface="Times New Roman" panose="02020603050405020304" pitchFamily="18" charset="0"/>
+                  </a:rPr>
+                  <a:t>explicitly</a:t>
+                </a:r>
+                <a:r>
+                  <a:rPr lang="en-US" sz="2200" b="1" dirty="0">
+                    <a:cs typeface="Times New Roman" panose="02020603050405020304" pitchFamily="18" charset="0"/>
+                  </a:rPr>
+                  <a:t> </a:t>
+                </a:r>
+                <a:r>
+                  <a:rPr lang="en-US" sz="2200" dirty="0">
+                    <a:cs typeface="Times New Roman" panose="02020603050405020304" pitchFamily="18" charset="0"/>
+                  </a:rPr>
+                  <a:t>as possible</a:t>
+                </a:r>
+              </a:p>
+              <a:p>
+                <a:pPr marL="731520" lvl="1" indent="-457200">
+                  <a:buFont typeface="+mj-lt"/>
+                  <a:buAutoNum type="arabicPeriod"/>
+                </a:pPr>
+                <a:r>
+                  <a:rPr lang="en-US" sz="2200" dirty="0">
+                    <a:cs typeface="Times New Roman" panose="02020603050405020304" pitchFamily="18" charset="0"/>
+                  </a:rPr>
+                  <a:t>Draw a DAG! Take time thinking about open back- and front-doors</a:t>
+                </a:r>
+              </a:p>
+              <a:p>
+                <a:pPr marL="731520" lvl="1" indent="-457200">
+                  <a:buFont typeface="+mj-lt"/>
+                  <a:buAutoNum type="arabicPeriod"/>
+                </a:pPr>
+                <a:r>
+                  <a:rPr lang="en-US" sz="2200" dirty="0">
+                    <a:cs typeface="Times New Roman" panose="02020603050405020304" pitchFamily="18" charset="0"/>
+                  </a:rPr>
+                  <a:t>Maybe build the DAG into a theoretical model</a:t>
+                </a:r>
+              </a:p>
+              <a:p>
+                <a:pPr marL="731520" lvl="1" indent="-457200">
+                  <a:buFont typeface="+mj-lt"/>
+                  <a:buAutoNum type="arabicPeriod"/>
+                </a:pPr>
+                <a:r>
+                  <a:rPr lang="en-US" sz="2200" dirty="0">
+                    <a:cs typeface="Times New Roman" panose="02020603050405020304" pitchFamily="18" charset="0"/>
+                  </a:rPr>
+                  <a:t>DAG + model </a:t>
+                </a:r>
+                <a14:m>
+                  <m:oMath xmlns:m="http://schemas.openxmlformats.org/officeDocument/2006/math">
+                    <m:r>
+                      <a:rPr lang="en-CA" sz="2200" b="0" i="1" smtClean="0">
+                        <a:latin typeface="Cambria Math" panose="02040503050406030204" pitchFamily="18" charset="0"/>
+                        <a:cs typeface="Times New Roman" panose="02020603050405020304" pitchFamily="18" charset="0"/>
+                      </a:rPr>
+                      <m:t>⇒</m:t>
+                    </m:r>
+                  </m:oMath>
+                </a14:m>
+                <a:r>
+                  <a:rPr lang="en-US" sz="2200" dirty="0">
+                    <a:cs typeface="Times New Roman" panose="02020603050405020304" pitchFamily="18" charset="0"/>
+                  </a:rPr>
+                  <a:t> Regressions, assumptions, even </a:t>
+                </a:r>
+                <a:r>
+                  <a:rPr lang="en-US" sz="2200" b="1" dirty="0">
+                    <a:solidFill>
+                      <a:schemeClr val="accent3">
+                        <a:lumMod val="75000"/>
+                      </a:schemeClr>
+                    </a:solidFill>
+                    <a:cs typeface="Times New Roman" panose="02020603050405020304" pitchFamily="18" charset="0"/>
+                  </a:rPr>
+                  <a:t>identification</a:t>
+                </a:r>
+                <a:r>
+                  <a:rPr lang="en-US" sz="2200" dirty="0">
+                    <a:cs typeface="Times New Roman" panose="02020603050405020304" pitchFamily="18" charset="0"/>
+                  </a:rPr>
+                  <a:t>!</a:t>
+                </a:r>
+              </a:p>
+            </p:txBody>
+          </p:sp>
+        </mc:Choice>
+        <mc:Fallback xmlns="">
+          <p:sp>
+            <p:nvSpPr>
+              <p:cNvPr id="3" name="Content Placeholder 2"/>
+              <p:cNvSpPr>
+                <a:spLocks noGrp="1" noRot="1" noChangeAspect="1" noMove="1" noResize="1" noEditPoints="1" noAdjustHandles="1" noChangeArrowheads="1" noChangeShapeType="1" noTextEdit="1"/>
+              </p:cNvSpPr>
+              <p:nvPr>
+                <p:ph idx="1"/>
+              </p:nvPr>
+            </p:nvSpPr>
+            <p:spPr>
+              <a:xfrm>
+                <a:off x="762001" y="1066801"/>
+                <a:ext cx="9862990" cy="5141388"/>
+              </a:xfrm>
+              <a:blipFill>
+                <a:blip r:embed="rId3"/>
+                <a:stretch>
+                  <a:fillRect l="-433" t="-1305"/>
+                </a:stretch>
+              </a:blipFill>
+            </p:spPr>
+            <p:txBody>
+              <a:bodyPr/>
+              <a:lstStyle/>
+              <a:p>
+                <a:r>
+                  <a:rPr lang="en-US">
+                    <a:noFill/>
+                  </a:rPr>
+                  <a:t> </a:t>
+                </a:r>
+              </a:p>
+            </p:txBody>
+          </p:sp>
+        </mc:Fallback>
+      </mc:AlternateContent>
     </p:spTree>
     <p:extLst>
       <p:ext uri="{BB962C8B-B14F-4D97-AF65-F5344CB8AC3E}">
-        <p14:creationId xmlns:p14="http://schemas.microsoft.com/office/powerpoint/2010/main" val="2203409957"/>
+        <p14:creationId xmlns:p14="http://schemas.microsoft.com/office/powerpoint/2010/main" val="1507514134"/>
       </p:ext>
     </p:extLst>
   </p:cSld>
@@ -33521,13 +33872,7 @@
   <p:cSld>
     <p:spTree>
       <p:nvGrpSpPr>
-        <p:cNvPr id="1" name="">
-          <a:extLst>
-            <a:ext uri="{FF2B5EF4-FFF2-40B4-BE49-F238E27FC236}">
-              <a16:creationId xmlns:a16="http://schemas.microsoft.com/office/drawing/2014/main" id="{51FCF29B-C526-4B29-7CD4-F60A983018E9}"/>
-            </a:ext>
-          </a:extLst>
-        </p:cNvPr>
+        <p:cNvPr id="1" name=""/>
         <p:cNvGrpSpPr/>
         <p:nvPr/>
       </p:nvGrpSpPr>
@@ -33541,68 +33886,156 @@
       </p:grpSpPr>
       <p:sp>
         <p:nvSpPr>
-          <p:cNvPr id="2" name="Title 1">
-            <a:extLst>
-              <a:ext uri="{FF2B5EF4-FFF2-40B4-BE49-F238E27FC236}">
-                <a16:creationId xmlns:a16="http://schemas.microsoft.com/office/drawing/2014/main" id="{E5D02D30-86C3-6C5D-4A14-D848CC6168CE}"/>
-              </a:ext>
-            </a:extLst>
-          </p:cNvPr>
-          <p:cNvSpPr>
-            <a:spLocks noGrp="1"/>
-          </p:cNvSpPr>
-          <p:nvPr>
-            <p:ph type="ctrTitle"/>
+          <p:cNvPr id="2" name="Title 1"/>
+          <p:cNvSpPr>
+            <a:spLocks noGrp="1"/>
+          </p:cNvSpPr>
+          <p:nvPr>
+            <p:ph type="title"/>
           </p:nvPr>
         </p:nvSpPr>
         <p:spPr>
           <a:xfrm>
-            <a:off x="1261872" y="758952"/>
-            <a:ext cx="10549128" cy="4041648"/>
+            <a:off x="609600" y="337392"/>
+            <a:ext cx="10439400" cy="624840"/>
           </a:xfrm>
         </p:spPr>
         <p:txBody>
-          <a:bodyPr/>
-          <a:lstStyle/>
-          <a:p>
-            <a:r>
-              <a:rPr lang="en-US" dirty="0"/>
-              <a:t>Communicating Findings</a:t>
-            </a:r>
-          </a:p>
-        </p:txBody>
-      </p:sp>
-      <p:sp>
-        <p:nvSpPr>
-          <p:cNvPr id="3" name="Subtitle 2">
-            <a:extLst>
-              <a:ext uri="{FF2B5EF4-FFF2-40B4-BE49-F238E27FC236}">
-                <a16:creationId xmlns:a16="http://schemas.microsoft.com/office/drawing/2014/main" id="{1D6216EC-BC76-242D-F4A5-D7C4C024FAC0}"/>
-              </a:ext>
-            </a:extLst>
-          </p:cNvPr>
-          <p:cNvSpPr>
-            <a:spLocks noGrp="1"/>
-          </p:cNvSpPr>
-          <p:nvPr>
-            <p:ph type="subTitle" idx="1"/>
-          </p:nvPr>
-        </p:nvSpPr>
-        <p:spPr/>
-        <p:txBody>
           <a:bodyPr>
-            <a:normAutofit/>
+            <a:noAutofit/>
           </a:bodyPr>
           <a:lstStyle/>
           <a:p>
-            <a:endParaRPr lang="en-US" sz="4400" dirty="0"/>
+            <a:r>
+              <a:rPr lang="en-US" sz="3600" dirty="0">
+                <a:latin typeface="Times New Roman" panose="02020603050405020304" pitchFamily="18" charset="0"/>
+                <a:cs typeface="Times New Roman" panose="02020603050405020304" pitchFamily="18" charset="0"/>
+              </a:rPr>
+              <a:t>Three Examples of Models – why design-based?</a:t>
+            </a:r>
+          </a:p>
+        </p:txBody>
+      </p:sp>
+      <p:sp>
+        <p:nvSpPr>
+          <p:cNvPr id="3" name="Content Placeholder 2"/>
+          <p:cNvSpPr>
+            <a:spLocks noGrp="1"/>
+          </p:cNvSpPr>
+          <p:nvPr>
+            <p:ph idx="1"/>
+          </p:nvPr>
+        </p:nvSpPr>
+        <p:spPr>
+          <a:xfrm>
+            <a:off x="609601" y="1066801"/>
+            <a:ext cx="10015390" cy="5141388"/>
+          </a:xfrm>
+        </p:spPr>
+        <p:txBody>
+          <a:bodyPr>
+            <a:noAutofit/>
+          </a:bodyPr>
+          <a:lstStyle/>
+          <a:p>
+            <a:pPr marL="788670" lvl="1" indent="-514350">
+              <a:buFont typeface="+mj-lt"/>
+              <a:buAutoNum type="arabicPeriod"/>
+            </a:pPr>
+            <a:r>
+              <a:rPr lang="en-US" sz="2600" dirty="0">
+                <a:cs typeface="Times New Roman" panose="02020603050405020304" pitchFamily="18" charset="0"/>
+              </a:rPr>
+              <a:t>Explicit, approximation</a:t>
+            </a:r>
+          </a:p>
+          <a:p>
+            <a:pPr marL="788670" lvl="1" indent="-514350">
+              <a:buFont typeface="+mj-lt"/>
+              <a:buAutoNum type="arabicPeriod"/>
+            </a:pPr>
+            <a:r>
+              <a:rPr lang="en-US" sz="2600" dirty="0">
+                <a:cs typeface="Times New Roman" panose="02020603050405020304" pitchFamily="18" charset="0"/>
+              </a:rPr>
+              <a:t>Explicit, (more) exact</a:t>
+            </a:r>
+          </a:p>
+          <a:p>
+            <a:pPr marL="788670" lvl="1" indent="-514350">
+              <a:buFont typeface="+mj-lt"/>
+              <a:buAutoNum type="arabicPeriod"/>
+            </a:pPr>
+            <a:r>
+              <a:rPr lang="en-US" sz="2600" u="sng" dirty="0">
+                <a:cs typeface="Times New Roman" panose="02020603050405020304" pitchFamily="18" charset="0"/>
+              </a:rPr>
+              <a:t>Implicit</a:t>
+            </a:r>
+          </a:p>
+          <a:p>
+            <a:pPr marL="788670" lvl="1" indent="-514350">
+              <a:buFont typeface="+mj-lt"/>
+              <a:buAutoNum type="arabicPeriod"/>
+            </a:pPr>
+            <a:endParaRPr lang="en-US" sz="2600" u="sng" dirty="0">
+              <a:cs typeface="Times New Roman" panose="02020603050405020304" pitchFamily="18" charset="0"/>
+            </a:endParaRPr>
+          </a:p>
+          <a:p>
+            <a:pPr marL="274320" lvl="1" indent="0">
+              <a:buNone/>
+            </a:pPr>
+            <a:r>
+              <a:rPr lang="en-US" sz="2600" dirty="0">
+                <a:cs typeface="Times New Roman" panose="02020603050405020304" pitchFamily="18" charset="0"/>
+              </a:rPr>
+              <a:t>So frequently, we do something that’s more in the middle </a:t>
+            </a:r>
+          </a:p>
+          <a:p>
+            <a:pPr marL="274320" lvl="1" indent="0">
+              <a:buNone/>
+            </a:pPr>
+            <a:endParaRPr lang="en-US" sz="2600" dirty="0">
+              <a:cs typeface="Times New Roman" panose="02020603050405020304" pitchFamily="18" charset="0"/>
+            </a:endParaRPr>
+          </a:p>
+          <a:p>
+            <a:pPr marL="274320" lvl="1" indent="0">
+              <a:buNone/>
+            </a:pPr>
+            <a:r>
+              <a:rPr lang="en-US" sz="2600" dirty="0">
+                <a:cs typeface="Times New Roman" panose="02020603050405020304" pitchFamily="18" charset="0"/>
+              </a:rPr>
+              <a:t>Rather than specify a behavioral model explicitly, we focus on a single causal relationship and identify it using quasi-exogenous variation: </a:t>
+            </a:r>
+          </a:p>
+          <a:p>
+            <a:pPr lvl="1"/>
+            <a:r>
+              <a:rPr lang="en-US" sz="2600" dirty="0">
+                <a:cs typeface="Times New Roman" panose="02020603050405020304" pitchFamily="18" charset="0"/>
+              </a:rPr>
+              <a:t>What is the effect of job training on employment/income? Find a state that randomized people to take job training and evaluate their outcomes relative to a control state</a:t>
+            </a:r>
+          </a:p>
+          <a:p>
+            <a:pPr lvl="1"/>
+            <a:r>
+              <a:rPr lang="en-US" sz="2600" dirty="0">
+                <a:cs typeface="Times New Roman" panose="02020603050405020304" pitchFamily="18" charset="0"/>
+              </a:rPr>
+              <a:t>What are the advantages/disadvantages of this? </a:t>
+            </a:r>
           </a:p>
         </p:txBody>
       </p:sp>
     </p:spTree>
     <p:extLst>
       <p:ext uri="{BB962C8B-B14F-4D97-AF65-F5344CB8AC3E}">
-        <p14:creationId xmlns:p14="http://schemas.microsoft.com/office/powerpoint/2010/main" val="1974926705"/>
+        <p14:creationId xmlns:p14="http://schemas.microsoft.com/office/powerpoint/2010/main" val="4230878884"/>
       </p:ext>
     </p:extLst>
   </p:cSld>
@@ -33653,6 +34086,304 @@
           <a:p>
             <a:r>
               <a:rPr lang="en-US" sz="3600" dirty="0">
+                <a:latin typeface="Times New Roman" panose="02020603050405020304" pitchFamily="18" charset="0"/>
+                <a:cs typeface="Times New Roman" panose="02020603050405020304" pitchFamily="18" charset="0"/>
+              </a:rPr>
+              <a:t>So what do we get from design-based inference?</a:t>
+            </a:r>
+          </a:p>
+        </p:txBody>
+      </p:sp>
+      <p:sp>
+        <p:nvSpPr>
+          <p:cNvPr id="3" name="Content Placeholder 2"/>
+          <p:cNvSpPr>
+            <a:spLocks noGrp="1"/>
+          </p:cNvSpPr>
+          <p:nvPr>
+            <p:ph idx="1"/>
+          </p:nvPr>
+        </p:nvSpPr>
+        <p:spPr>
+          <a:xfrm>
+            <a:off x="609601" y="1066801"/>
+            <a:ext cx="10015390" cy="5141388"/>
+          </a:xfrm>
+        </p:spPr>
+        <p:txBody>
+          <a:bodyPr>
+            <a:noAutofit/>
+          </a:bodyPr>
+          <a:lstStyle/>
+          <a:p>
+            <a:pPr marL="274320" lvl="1" indent="0">
+              <a:buNone/>
+            </a:pPr>
+            <a:r>
+              <a:rPr lang="en-US" sz="2600" b="1" dirty="0">
+                <a:cs typeface="Times New Roman" panose="02020603050405020304" pitchFamily="18" charset="0"/>
+              </a:rPr>
+              <a:t>Counterfactuals and causality</a:t>
+            </a:r>
+          </a:p>
+          <a:p>
+            <a:pPr lvl="1"/>
+            <a:r>
+              <a:rPr lang="en-US" sz="2600" dirty="0">
+                <a:cs typeface="Times New Roman" panose="02020603050405020304" pitchFamily="18" charset="0"/>
+              </a:rPr>
+              <a:t>In many ways, the identification </a:t>
+            </a:r>
+            <a:r>
+              <a:rPr lang="en-US" sz="2600" i="1" dirty="0">
+                <a:cs typeface="Times New Roman" panose="02020603050405020304" pitchFamily="18" charset="0"/>
+              </a:rPr>
+              <a:t>becomes</a:t>
+            </a:r>
+            <a:r>
+              <a:rPr lang="en-US" sz="2600" dirty="0">
+                <a:cs typeface="Times New Roman" panose="02020603050405020304" pitchFamily="18" charset="0"/>
+              </a:rPr>
+              <a:t> the research design</a:t>
+            </a:r>
+          </a:p>
+          <a:p>
+            <a:pPr lvl="1"/>
+            <a:r>
+              <a:rPr lang="en-US" sz="2600" dirty="0">
+                <a:cs typeface="Times New Roman" panose="02020603050405020304" pitchFamily="18" charset="0"/>
+              </a:rPr>
+              <a:t>It defines the counterfactual estimation when the design is credible</a:t>
+            </a:r>
+          </a:p>
+          <a:p>
+            <a:pPr lvl="1"/>
+            <a:endParaRPr lang="en-US" sz="2600" dirty="0">
+              <a:cs typeface="Times New Roman" panose="02020603050405020304" pitchFamily="18" charset="0"/>
+            </a:endParaRPr>
+          </a:p>
+          <a:p>
+            <a:pPr marL="274320" lvl="1" indent="0">
+              <a:buNone/>
+            </a:pPr>
+            <a:r>
+              <a:rPr lang="en-US" sz="2600" b="1" dirty="0">
+                <a:cs typeface="Times New Roman" panose="02020603050405020304" pitchFamily="18" charset="0"/>
+              </a:rPr>
+              <a:t>Descriptive + Causal Evidence</a:t>
+            </a:r>
+          </a:p>
+          <a:p>
+            <a:pPr lvl="1"/>
+            <a:r>
+              <a:rPr lang="en-US" sz="2600" dirty="0">
+                <a:cs typeface="Times New Roman" panose="02020603050405020304" pitchFamily="18" charset="0"/>
+              </a:rPr>
+              <a:t>Without a full structural approach, many papers become “storytelling” </a:t>
+            </a:r>
+          </a:p>
+          <a:p>
+            <a:pPr lvl="1"/>
+            <a:r>
+              <a:rPr lang="en-US" sz="2600" dirty="0">
+                <a:cs typeface="Times New Roman" panose="02020603050405020304" pitchFamily="18" charset="0"/>
+              </a:rPr>
+              <a:t>You present a set of descriptive + causal evidence, sometimes under the umbrella of a formal model (“applied theory”) and sometimes just as a narrative</a:t>
+            </a:r>
+          </a:p>
+          <a:p>
+            <a:pPr lvl="1"/>
+            <a:endParaRPr lang="en-US" sz="2600" dirty="0">
+              <a:cs typeface="Times New Roman" panose="02020603050405020304" pitchFamily="18" charset="0"/>
+            </a:endParaRPr>
+          </a:p>
+          <a:p>
+            <a:pPr marL="274320" lvl="1" indent="0">
+              <a:buNone/>
+            </a:pPr>
+            <a:r>
+              <a:rPr lang="en-US" sz="2600" b="1" dirty="0">
+                <a:cs typeface="Times New Roman" panose="02020603050405020304" pitchFamily="18" charset="0"/>
+              </a:rPr>
+              <a:t>Replicability </a:t>
+            </a:r>
+          </a:p>
+          <a:p>
+            <a:pPr lvl="1"/>
+            <a:r>
+              <a:rPr lang="en-US" sz="2600" dirty="0">
+                <a:cs typeface="Times New Roman" panose="02020603050405020304" pitchFamily="18" charset="0"/>
+              </a:rPr>
+              <a:t>Credible replication of your own results</a:t>
+            </a:r>
+          </a:p>
+          <a:p>
+            <a:pPr lvl="1"/>
+            <a:r>
+              <a:rPr lang="en-US" sz="2600" dirty="0">
+                <a:cs typeface="Times New Roman" panose="02020603050405020304" pitchFamily="18" charset="0"/>
+              </a:rPr>
+              <a:t>Credible replication of results in other contexts/data/etc.</a:t>
+            </a:r>
+          </a:p>
+          <a:p>
+            <a:pPr lvl="1"/>
+            <a:endParaRPr lang="en-US" sz="2600" dirty="0">
+              <a:cs typeface="Times New Roman" panose="02020603050405020304" pitchFamily="18" charset="0"/>
+            </a:endParaRPr>
+          </a:p>
+        </p:txBody>
+      </p:sp>
+    </p:spTree>
+    <p:extLst>
+      <p:ext uri="{BB962C8B-B14F-4D97-AF65-F5344CB8AC3E}">
+        <p14:creationId xmlns:p14="http://schemas.microsoft.com/office/powerpoint/2010/main" val="2203409957"/>
+      </p:ext>
+    </p:extLst>
+  </p:cSld>
+  <p:clrMapOvr>
+    <a:masterClrMapping/>
+  </p:clrMapOvr>
+</p:sld>
+</file>
+
+<file path=ppt/slides/slide84.xml><?xml version="1.0" encoding="utf-8"?>
+<p:sld xmlns:a="http://schemas.openxmlformats.org/drawingml/2006/main" xmlns:r="http://schemas.openxmlformats.org/officeDocument/2006/relationships" xmlns:p="http://schemas.openxmlformats.org/presentationml/2006/main">
+  <p:cSld>
+    <p:spTree>
+      <p:nvGrpSpPr>
+        <p:cNvPr id="1" name="">
+          <a:extLst>
+            <a:ext uri="{FF2B5EF4-FFF2-40B4-BE49-F238E27FC236}">
+              <a16:creationId xmlns:a16="http://schemas.microsoft.com/office/drawing/2014/main" id="{51FCF29B-C526-4B29-7CD4-F60A983018E9}"/>
+            </a:ext>
+          </a:extLst>
+        </p:cNvPr>
+        <p:cNvGrpSpPr/>
+        <p:nvPr/>
+      </p:nvGrpSpPr>
+      <p:grpSpPr>
+        <a:xfrm>
+          <a:off x="0" y="0"/>
+          <a:ext cx="0" cy="0"/>
+          <a:chOff x="0" y="0"/>
+          <a:chExt cx="0" cy="0"/>
+        </a:xfrm>
+      </p:grpSpPr>
+      <p:sp>
+        <p:nvSpPr>
+          <p:cNvPr id="2" name="Title 1">
+            <a:extLst>
+              <a:ext uri="{FF2B5EF4-FFF2-40B4-BE49-F238E27FC236}">
+                <a16:creationId xmlns:a16="http://schemas.microsoft.com/office/drawing/2014/main" id="{E5D02D30-86C3-6C5D-4A14-D848CC6168CE}"/>
+              </a:ext>
+            </a:extLst>
+          </p:cNvPr>
+          <p:cNvSpPr>
+            <a:spLocks noGrp="1"/>
+          </p:cNvSpPr>
+          <p:nvPr>
+            <p:ph type="ctrTitle"/>
+          </p:nvPr>
+        </p:nvSpPr>
+        <p:spPr>
+          <a:xfrm>
+            <a:off x="1261872" y="758952"/>
+            <a:ext cx="10549128" cy="4041648"/>
+          </a:xfrm>
+        </p:spPr>
+        <p:txBody>
+          <a:bodyPr/>
+          <a:lstStyle/>
+          <a:p>
+            <a:r>
+              <a:rPr lang="en-US" dirty="0"/>
+              <a:t>Communicating Findings</a:t>
+            </a:r>
+          </a:p>
+        </p:txBody>
+      </p:sp>
+      <p:sp>
+        <p:nvSpPr>
+          <p:cNvPr id="3" name="Subtitle 2">
+            <a:extLst>
+              <a:ext uri="{FF2B5EF4-FFF2-40B4-BE49-F238E27FC236}">
+                <a16:creationId xmlns:a16="http://schemas.microsoft.com/office/drawing/2014/main" id="{1D6216EC-BC76-242D-F4A5-D7C4C024FAC0}"/>
+              </a:ext>
+            </a:extLst>
+          </p:cNvPr>
+          <p:cNvSpPr>
+            <a:spLocks noGrp="1"/>
+          </p:cNvSpPr>
+          <p:nvPr>
+            <p:ph type="subTitle" idx="1"/>
+          </p:nvPr>
+        </p:nvSpPr>
+        <p:spPr/>
+        <p:txBody>
+          <a:bodyPr>
+            <a:normAutofit/>
+          </a:bodyPr>
+          <a:lstStyle/>
+          <a:p>
+            <a:endParaRPr lang="en-US" sz="4400" dirty="0"/>
+          </a:p>
+        </p:txBody>
+      </p:sp>
+    </p:spTree>
+    <p:extLst>
+      <p:ext uri="{BB962C8B-B14F-4D97-AF65-F5344CB8AC3E}">
+        <p14:creationId xmlns:p14="http://schemas.microsoft.com/office/powerpoint/2010/main" val="1974926705"/>
+      </p:ext>
+    </p:extLst>
+  </p:cSld>
+  <p:clrMapOvr>
+    <a:masterClrMapping/>
+  </p:clrMapOvr>
+</p:sld>
+</file>
+
+<file path=ppt/slides/slide85.xml><?xml version="1.0" encoding="utf-8"?>
+<p:sld xmlns:a="http://schemas.openxmlformats.org/drawingml/2006/main" xmlns:r="http://schemas.openxmlformats.org/officeDocument/2006/relationships" xmlns:p="http://schemas.openxmlformats.org/presentationml/2006/main">
+  <p:cSld>
+    <p:spTree>
+      <p:nvGrpSpPr>
+        <p:cNvPr id="1" name=""/>
+        <p:cNvGrpSpPr/>
+        <p:nvPr/>
+      </p:nvGrpSpPr>
+      <p:grpSpPr>
+        <a:xfrm>
+          <a:off x="0" y="0"/>
+          <a:ext cx="0" cy="0"/>
+          <a:chOff x="0" y="0"/>
+          <a:chExt cx="0" cy="0"/>
+        </a:xfrm>
+      </p:grpSpPr>
+      <p:sp>
+        <p:nvSpPr>
+          <p:cNvPr id="2" name="Title 1"/>
+          <p:cNvSpPr>
+            <a:spLocks noGrp="1"/>
+          </p:cNvSpPr>
+          <p:nvPr>
+            <p:ph type="title"/>
+          </p:nvPr>
+        </p:nvSpPr>
+        <p:spPr>
+          <a:xfrm>
+            <a:off x="609600" y="337392"/>
+            <a:ext cx="10439400" cy="624840"/>
+          </a:xfrm>
+        </p:spPr>
+        <p:txBody>
+          <a:bodyPr>
+            <a:noAutofit/>
+          </a:bodyPr>
+          <a:lstStyle/>
+          <a:p>
+            <a:r>
+              <a:rPr lang="en-US" sz="3600" dirty="0">
                 <a:cs typeface="Times New Roman" panose="02020603050405020304" pitchFamily="18" charset="0"/>
               </a:rPr>
               <a:t>Data Viz</a:t>
@@ -33824,7 +34555,7 @@
 </p:sld>
 </file>
 
-<file path=ppt/slides/slide84.xml><?xml version="1.0" encoding="utf-8"?>
+<file path=ppt/slides/slide86.xml><?xml version="1.0" encoding="utf-8"?>
 <p:sld xmlns:a="http://schemas.openxmlformats.org/drawingml/2006/main" xmlns:r="http://schemas.openxmlformats.org/officeDocument/2006/relationships" xmlns:p="http://schemas.openxmlformats.org/presentationml/2006/main">
   <p:cSld>
     <p:spTree>
@@ -33944,7 +34675,7 @@
 </p:sld>
 </file>
 
-<file path=ppt/slides/slide85.xml><?xml version="1.0" encoding="utf-8"?>
+<file path=ppt/slides/slide87.xml><?xml version="1.0" encoding="utf-8"?>
 <p:sld xmlns:a="http://schemas.openxmlformats.org/drawingml/2006/main" xmlns:r="http://schemas.openxmlformats.org/officeDocument/2006/relationships" xmlns:p="http://schemas.openxmlformats.org/presentationml/2006/main">
   <p:cSld>
     <p:spTree>
@@ -34064,7 +34795,7 @@
 </p:sld>
 </file>
 
-<file path=ppt/slides/slide86.xml><?xml version="1.0" encoding="utf-8"?>
+<file path=ppt/slides/slide88.xml><?xml version="1.0" encoding="utf-8"?>
 <p:sld xmlns:a="http://schemas.openxmlformats.org/drawingml/2006/main" xmlns:r="http://schemas.openxmlformats.org/officeDocument/2006/relationships" xmlns:p="http://schemas.openxmlformats.org/presentationml/2006/main">
   <p:cSld>
     <p:spTree>
@@ -34184,7 +34915,7 @@
 </p:sld>
 </file>
 
-<file path=ppt/slides/slide87.xml><?xml version="1.0" encoding="utf-8"?>
+<file path=ppt/slides/slide89.xml><?xml version="1.0" encoding="utf-8"?>
 <p:sld xmlns:a="http://schemas.openxmlformats.org/drawingml/2006/main" xmlns:r="http://schemas.openxmlformats.org/officeDocument/2006/relationships" xmlns:p="http://schemas.openxmlformats.org/presentationml/2006/main">
   <p:cSld>
     <p:spTree>
@@ -34304,7 +35035,153 @@
 </p:sld>
 </file>
 
-<file path=ppt/slides/slide88.xml><?xml version="1.0" encoding="utf-8"?>
+<file path=ppt/slides/slide9.xml><?xml version="1.0" encoding="utf-8"?>
+<p:sld xmlns:a="http://schemas.openxmlformats.org/drawingml/2006/main" xmlns:r="http://schemas.openxmlformats.org/officeDocument/2006/relationships" xmlns:p="http://schemas.openxmlformats.org/presentationml/2006/main">
+  <p:cSld>
+    <p:spTree>
+      <p:nvGrpSpPr>
+        <p:cNvPr id="1" name="">
+          <a:extLst>
+            <a:ext uri="{FF2B5EF4-FFF2-40B4-BE49-F238E27FC236}">
+              <a16:creationId xmlns:a16="http://schemas.microsoft.com/office/drawing/2014/main" id="{04D94B09-66A3-1639-E79E-CA4D5B7C435C}"/>
+            </a:ext>
+          </a:extLst>
+        </p:cNvPr>
+        <p:cNvGrpSpPr/>
+        <p:nvPr/>
+      </p:nvGrpSpPr>
+      <p:grpSpPr>
+        <a:xfrm>
+          <a:off x="0" y="0"/>
+          <a:ext cx="0" cy="0"/>
+          <a:chOff x="0" y="0"/>
+          <a:chExt cx="0" cy="0"/>
+        </a:xfrm>
+      </p:grpSpPr>
+      <p:sp>
+        <p:nvSpPr>
+          <p:cNvPr id="5" name="Title 4">
+            <a:extLst>
+              <a:ext uri="{FF2B5EF4-FFF2-40B4-BE49-F238E27FC236}">
+                <a16:creationId xmlns:a16="http://schemas.microsoft.com/office/drawing/2014/main" id="{61EAF8C6-037C-285E-D30A-2EA895A391FA}"/>
+              </a:ext>
+            </a:extLst>
+          </p:cNvPr>
+          <p:cNvSpPr>
+            <a:spLocks noGrp="1"/>
+          </p:cNvSpPr>
+          <p:nvPr>
+            <p:ph type="title"/>
+          </p:nvPr>
+        </p:nvSpPr>
+        <p:spPr/>
+        <p:txBody>
+          <a:bodyPr/>
+          <a:lstStyle/>
+          <a:p>
+            <a:endParaRPr lang="en-CA"/>
+          </a:p>
+        </p:txBody>
+      </p:sp>
+      <p:pic>
+        <p:nvPicPr>
+          <p:cNvPr id="1026" name="Picture 2" descr="🎤 Ken voice: 'My job is just... beach.' 🌊 Would you like to be a  full-time beachcomber?">
+            <a:extLst>
+              <a:ext uri="{FF2B5EF4-FFF2-40B4-BE49-F238E27FC236}">
+                <a16:creationId xmlns:a16="http://schemas.microsoft.com/office/drawing/2014/main" id="{0E5627B7-6175-7CA7-5645-EEE71274CE25}"/>
+              </a:ext>
+            </a:extLst>
+          </p:cNvPr>
+          <p:cNvPicPr>
+            <a:picLocks noChangeAspect="1" noChangeArrowheads="1"/>
+          </p:cNvPicPr>
+          <p:nvPr/>
+        </p:nvPicPr>
+        <p:blipFill>
+          <a:blip r:embed="rId3">
+            <a:extLst>
+              <a:ext uri="{28A0092B-C50C-407E-A947-70E740481C1C}">
+                <a14:useLocalDpi xmlns:a14="http://schemas.microsoft.com/office/drawing/2010/main" val="0"/>
+              </a:ext>
+            </a:extLst>
+          </a:blip>
+          <a:srcRect/>
+          <a:stretch>
+            <a:fillRect/>
+          </a:stretch>
+        </p:blipFill>
+        <p:spPr bwMode="auto">
+          <a:xfrm>
+            <a:off x="457199" y="348826"/>
+            <a:ext cx="10484733" cy="5899573"/>
+          </a:xfrm>
+          <a:prstGeom prst="rect">
+            <a:avLst/>
+          </a:prstGeom>
+          <a:noFill/>
+          <a:extLst>
+            <a:ext uri="{909E8E84-426E-40DD-AFC4-6F175D3DCCD1}">
+              <a14:hiddenFill xmlns:a14="http://schemas.microsoft.com/office/drawing/2010/main">
+                <a:solidFill>
+                  <a:srgbClr val="FFFFFF"/>
+                </a:solidFill>
+              </a14:hiddenFill>
+            </a:ext>
+          </a:extLst>
+        </p:spPr>
+      </p:pic>
+      <p:sp>
+        <p:nvSpPr>
+          <p:cNvPr id="12" name="TextBox 11">
+            <a:extLst>
+              <a:ext uri="{FF2B5EF4-FFF2-40B4-BE49-F238E27FC236}">
+                <a16:creationId xmlns:a16="http://schemas.microsoft.com/office/drawing/2014/main" id="{EC7E712B-CA41-A25B-65EE-B5C709ECFE41}"/>
+              </a:ext>
+            </a:extLst>
+          </p:cNvPr>
+          <p:cNvSpPr txBox="1"/>
+          <p:nvPr/>
+        </p:nvSpPr>
+        <p:spPr>
+          <a:xfrm>
+            <a:off x="7315200" y="5715000"/>
+            <a:ext cx="1981200" cy="369332"/>
+          </a:xfrm>
+          <a:prstGeom prst="rect">
+            <a:avLst/>
+          </a:prstGeom>
+          <a:solidFill>
+            <a:schemeClr val="bg1"/>
+          </a:solidFill>
+        </p:spPr>
+        <p:txBody>
+          <a:bodyPr wrap="square" rtlCol="0">
+            <a:spAutoFit/>
+          </a:bodyPr>
+          <a:lstStyle/>
+          <a:p>
+            <a:r>
+              <a:rPr lang="en-US" b="1" dirty="0"/>
+              <a:t>Data cleaning</a:t>
+            </a:r>
+            <a:endParaRPr lang="en-CA" b="1" dirty="0"/>
+          </a:p>
+        </p:txBody>
+      </p:sp>
+    </p:spTree>
+    <p:extLst>
+      <p:ext uri="{BB962C8B-B14F-4D97-AF65-F5344CB8AC3E}">
+        <p14:creationId xmlns:p14="http://schemas.microsoft.com/office/powerpoint/2010/main" val="3635539773"/>
+      </p:ext>
+    </p:extLst>
+  </p:cSld>
+  <p:clrMapOvr>
+    <a:masterClrMapping/>
+  </p:clrMapOvr>
+</p:sld>
+</file>
+
+<file path=ppt/slides/slide90.xml><?xml version="1.0" encoding="utf-8"?>
 <p:sld xmlns:a="http://schemas.openxmlformats.org/drawingml/2006/main" xmlns:r="http://schemas.openxmlformats.org/officeDocument/2006/relationships" xmlns:p="http://schemas.openxmlformats.org/presentationml/2006/main">
   <p:cSld>
     <p:spTree>
@@ -34673,7 +35550,7 @@
 </p:sld>
 </file>
 
-<file path=ppt/slides/slide89.xml><?xml version="1.0" encoding="utf-8"?>
+<file path=ppt/slides/slide91.xml><?xml version="1.0" encoding="utf-8"?>
 <p:sld xmlns:a="http://schemas.openxmlformats.org/drawingml/2006/main" xmlns:r="http://schemas.openxmlformats.org/officeDocument/2006/relationships" xmlns:p="http://schemas.openxmlformats.org/presentationml/2006/main">
   <p:cSld>
     <p:spTree>
@@ -34800,153 +35677,7 @@
 </p:sld>
 </file>
 
-<file path=ppt/slides/slide9.xml><?xml version="1.0" encoding="utf-8"?>
-<p:sld xmlns:a="http://schemas.openxmlformats.org/drawingml/2006/main" xmlns:r="http://schemas.openxmlformats.org/officeDocument/2006/relationships" xmlns:p="http://schemas.openxmlformats.org/presentationml/2006/main">
-  <p:cSld>
-    <p:spTree>
-      <p:nvGrpSpPr>
-        <p:cNvPr id="1" name="">
-          <a:extLst>
-            <a:ext uri="{FF2B5EF4-FFF2-40B4-BE49-F238E27FC236}">
-              <a16:creationId xmlns:a16="http://schemas.microsoft.com/office/drawing/2014/main" id="{04D94B09-66A3-1639-E79E-CA4D5B7C435C}"/>
-            </a:ext>
-          </a:extLst>
-        </p:cNvPr>
-        <p:cNvGrpSpPr/>
-        <p:nvPr/>
-      </p:nvGrpSpPr>
-      <p:grpSpPr>
-        <a:xfrm>
-          <a:off x="0" y="0"/>
-          <a:ext cx="0" cy="0"/>
-          <a:chOff x="0" y="0"/>
-          <a:chExt cx="0" cy="0"/>
-        </a:xfrm>
-      </p:grpSpPr>
-      <p:sp>
-        <p:nvSpPr>
-          <p:cNvPr id="5" name="Title 4">
-            <a:extLst>
-              <a:ext uri="{FF2B5EF4-FFF2-40B4-BE49-F238E27FC236}">
-                <a16:creationId xmlns:a16="http://schemas.microsoft.com/office/drawing/2014/main" id="{61EAF8C6-037C-285E-D30A-2EA895A391FA}"/>
-              </a:ext>
-            </a:extLst>
-          </p:cNvPr>
-          <p:cNvSpPr>
-            <a:spLocks noGrp="1"/>
-          </p:cNvSpPr>
-          <p:nvPr>
-            <p:ph type="title"/>
-          </p:nvPr>
-        </p:nvSpPr>
-        <p:spPr/>
-        <p:txBody>
-          <a:bodyPr/>
-          <a:lstStyle/>
-          <a:p>
-            <a:endParaRPr lang="en-CA"/>
-          </a:p>
-        </p:txBody>
-      </p:sp>
-      <p:pic>
-        <p:nvPicPr>
-          <p:cNvPr id="1026" name="Picture 2" descr="🎤 Ken voice: 'My job is just... beach.' 🌊 Would you like to be a  full-time beachcomber?">
-            <a:extLst>
-              <a:ext uri="{FF2B5EF4-FFF2-40B4-BE49-F238E27FC236}">
-                <a16:creationId xmlns:a16="http://schemas.microsoft.com/office/drawing/2014/main" id="{0E5627B7-6175-7CA7-5645-EEE71274CE25}"/>
-              </a:ext>
-            </a:extLst>
-          </p:cNvPr>
-          <p:cNvPicPr>
-            <a:picLocks noChangeAspect="1" noChangeArrowheads="1"/>
-          </p:cNvPicPr>
-          <p:nvPr/>
-        </p:nvPicPr>
-        <p:blipFill>
-          <a:blip r:embed="rId3">
-            <a:extLst>
-              <a:ext uri="{28A0092B-C50C-407E-A947-70E740481C1C}">
-                <a14:useLocalDpi xmlns:a14="http://schemas.microsoft.com/office/drawing/2010/main" val="0"/>
-              </a:ext>
-            </a:extLst>
-          </a:blip>
-          <a:srcRect/>
-          <a:stretch>
-            <a:fillRect/>
-          </a:stretch>
-        </p:blipFill>
-        <p:spPr bwMode="auto">
-          <a:xfrm>
-            <a:off x="457199" y="348826"/>
-            <a:ext cx="10484733" cy="5899573"/>
-          </a:xfrm>
-          <a:prstGeom prst="rect">
-            <a:avLst/>
-          </a:prstGeom>
-          <a:noFill/>
-          <a:extLst>
-            <a:ext uri="{909E8E84-426E-40DD-AFC4-6F175D3DCCD1}">
-              <a14:hiddenFill xmlns:a14="http://schemas.microsoft.com/office/drawing/2010/main">
-                <a:solidFill>
-                  <a:srgbClr val="FFFFFF"/>
-                </a:solidFill>
-              </a14:hiddenFill>
-            </a:ext>
-          </a:extLst>
-        </p:spPr>
-      </p:pic>
-      <p:sp>
-        <p:nvSpPr>
-          <p:cNvPr id="12" name="TextBox 11">
-            <a:extLst>
-              <a:ext uri="{FF2B5EF4-FFF2-40B4-BE49-F238E27FC236}">
-                <a16:creationId xmlns:a16="http://schemas.microsoft.com/office/drawing/2014/main" id="{EC7E712B-CA41-A25B-65EE-B5C709ECFE41}"/>
-              </a:ext>
-            </a:extLst>
-          </p:cNvPr>
-          <p:cNvSpPr txBox="1"/>
-          <p:nvPr/>
-        </p:nvSpPr>
-        <p:spPr>
-          <a:xfrm>
-            <a:off x="7315200" y="5715000"/>
-            <a:ext cx="1981200" cy="369332"/>
-          </a:xfrm>
-          <a:prstGeom prst="rect">
-            <a:avLst/>
-          </a:prstGeom>
-          <a:solidFill>
-            <a:schemeClr val="bg1"/>
-          </a:solidFill>
-        </p:spPr>
-        <p:txBody>
-          <a:bodyPr wrap="square" rtlCol="0">
-            <a:spAutoFit/>
-          </a:bodyPr>
-          <a:lstStyle/>
-          <a:p>
-            <a:r>
-              <a:rPr lang="en-US" b="1" dirty="0"/>
-              <a:t>Data cleaning</a:t>
-            </a:r>
-            <a:endParaRPr lang="en-CA" b="1" dirty="0"/>
-          </a:p>
-        </p:txBody>
-      </p:sp>
-    </p:spTree>
-    <p:extLst>
-      <p:ext uri="{BB962C8B-B14F-4D97-AF65-F5344CB8AC3E}">
-        <p14:creationId xmlns:p14="http://schemas.microsoft.com/office/powerpoint/2010/main" val="3635539773"/>
-      </p:ext>
-    </p:extLst>
-  </p:cSld>
-  <p:clrMapOvr>
-    <a:masterClrMapping/>
-  </p:clrMapOvr>
-</p:sld>
-</file>
-
-<file path=ppt/slides/slide90.xml><?xml version="1.0" encoding="utf-8"?>
+<file path=ppt/slides/slide92.xml><?xml version="1.0" encoding="utf-8"?>
 <p:sld xmlns:a="http://schemas.openxmlformats.org/drawingml/2006/main" xmlns:r="http://schemas.openxmlformats.org/officeDocument/2006/relationships" xmlns:p="http://schemas.openxmlformats.org/presentationml/2006/main">
   <p:cSld>
     <p:spTree>
